--- a/Devops - option 2 Dev professionnel - 12-3il-2-PROMO 23 25-26.pptx
+++ b/Devops - option 2 Dev professionnel - 12-3il-2-PROMO 23 25-26.pptx
@@ -5,55 +5,58 @@
     <p:sldMasterId id="2147484395" r:id="rId4"/>
   </p:sldMasterIdLst>
   <p:notesMasterIdLst>
-    <p:notesMasterId r:id="rId43"/>
+    <p:notesMasterId r:id="rId46"/>
   </p:notesMasterIdLst>
   <p:handoutMasterIdLst>
-    <p:handoutMasterId r:id="rId44"/>
+    <p:handoutMasterId r:id="rId47"/>
   </p:handoutMasterIdLst>
   <p:sldIdLst>
     <p:sldId id="1185" r:id="rId5"/>
     <p:sldId id="2147483307" r:id="rId6"/>
-    <p:sldId id="2147483337" r:id="rId7"/>
-    <p:sldId id="2147483412" r:id="rId8"/>
-    <p:sldId id="2147483534" r:id="rId9"/>
-    <p:sldId id="2147483535" r:id="rId10"/>
-    <p:sldId id="2147483536" r:id="rId11"/>
-    <p:sldId id="2147483537" r:id="rId12"/>
-    <p:sldId id="2147483504" r:id="rId13"/>
-    <p:sldId id="2147483505" r:id="rId14"/>
-    <p:sldId id="2147483506" r:id="rId15"/>
-    <p:sldId id="2147483507" r:id="rId16"/>
-    <p:sldId id="2147483532" r:id="rId17"/>
-    <p:sldId id="2147483508" r:id="rId18"/>
-    <p:sldId id="2147483509" r:id="rId19"/>
-    <p:sldId id="2147483510" r:id="rId20"/>
-    <p:sldId id="2147483511" r:id="rId21"/>
-    <p:sldId id="2147483512" r:id="rId22"/>
-    <p:sldId id="2147483513" r:id="rId23"/>
-    <p:sldId id="2147483514" r:id="rId24"/>
-    <p:sldId id="2147483515" r:id="rId25"/>
-    <p:sldId id="2147483516" r:id="rId26"/>
-    <p:sldId id="2147483517" r:id="rId27"/>
-    <p:sldId id="2147483518" r:id="rId28"/>
-    <p:sldId id="2147483533" r:id="rId29"/>
-    <p:sldId id="2147483519" r:id="rId30"/>
-    <p:sldId id="2147483520" r:id="rId31"/>
-    <p:sldId id="2147483521" r:id="rId32"/>
-    <p:sldId id="2147483522" r:id="rId33"/>
-    <p:sldId id="2147483523" r:id="rId34"/>
-    <p:sldId id="2147483524" r:id="rId35"/>
-    <p:sldId id="2147483525" r:id="rId36"/>
-    <p:sldId id="2147483526" r:id="rId37"/>
-    <p:sldId id="2147483527" r:id="rId38"/>
-    <p:sldId id="2147483528" r:id="rId39"/>
-    <p:sldId id="2147483529" r:id="rId40"/>
-    <p:sldId id="2147483530" r:id="rId41"/>
-    <p:sldId id="2147483531" r:id="rId42"/>
+    <p:sldId id="2147483412" r:id="rId7"/>
+    <p:sldId id="2147483538" r:id="rId8"/>
+    <p:sldId id="2147483539" r:id="rId9"/>
+    <p:sldId id="2147483540" r:id="rId10"/>
+    <p:sldId id="2147483541" r:id="rId11"/>
+    <p:sldId id="2147483534" r:id="rId12"/>
+    <p:sldId id="2147483535" r:id="rId13"/>
+    <p:sldId id="2147483536" r:id="rId14"/>
+    <p:sldId id="2147483537" r:id="rId15"/>
+    <p:sldId id="2147483504" r:id="rId16"/>
+    <p:sldId id="2147483505" r:id="rId17"/>
+    <p:sldId id="2147483506" r:id="rId18"/>
+    <p:sldId id="2147483507" r:id="rId19"/>
+    <p:sldId id="2147483532" r:id="rId20"/>
+    <p:sldId id="2147483508" r:id="rId21"/>
+    <p:sldId id="2147483509" r:id="rId22"/>
+    <p:sldId id="2147483510" r:id="rId23"/>
+    <p:sldId id="2147483511" r:id="rId24"/>
+    <p:sldId id="2147483512" r:id="rId25"/>
+    <p:sldId id="2147483513" r:id="rId26"/>
+    <p:sldId id="2147483514" r:id="rId27"/>
+    <p:sldId id="2147483515" r:id="rId28"/>
+    <p:sldId id="2147483516" r:id="rId29"/>
+    <p:sldId id="2147483517" r:id="rId30"/>
+    <p:sldId id="2147483518" r:id="rId31"/>
+    <p:sldId id="2147483533" r:id="rId32"/>
+    <p:sldId id="2147483519" r:id="rId33"/>
+    <p:sldId id="2147483520" r:id="rId34"/>
+    <p:sldId id="2147483521" r:id="rId35"/>
+    <p:sldId id="2147483522" r:id="rId36"/>
+    <p:sldId id="2147483523" r:id="rId37"/>
+    <p:sldId id="2147483524" r:id="rId38"/>
+    <p:sldId id="2147483525" r:id="rId39"/>
+    <p:sldId id="2147483526" r:id="rId40"/>
+    <p:sldId id="2147483527" r:id="rId41"/>
+    <p:sldId id="2147483528" r:id="rId42"/>
+    <p:sldId id="2147483529" r:id="rId43"/>
+    <p:sldId id="2147483530" r:id="rId44"/>
+    <p:sldId id="2147483531" r:id="rId45"/>
   </p:sldIdLst>
   <p:sldSz cx="9144000" cy="5143500" type="screen16x9"/>
   <p:notesSz cx="6811963" cy="9942513"/>
   <p:custDataLst>
-    <p:tags r:id="rId45"/>
+    <p:tags r:id="rId48"/>
   </p:custDataLst>
   <p:defaultTextStyle>
     <a:defPPr>
@@ -187,8 +190,11 @@
           <p14:sldIdLst>
             <p14:sldId id="1185"/>
             <p14:sldId id="2147483307"/>
-            <p14:sldId id="2147483337"/>
             <p14:sldId id="2147483412"/>
+            <p14:sldId id="2147483538"/>
+            <p14:sldId id="2147483539"/>
+            <p14:sldId id="2147483540"/>
+            <p14:sldId id="2147483541"/>
             <p14:sldId id="2147483534"/>
             <p14:sldId id="2147483535"/>
             <p14:sldId id="2147483536"/>
@@ -3507,7 +3513,7 @@
               <a:pPr>
                 <a:defRPr/>
               </a:pPr>
-              <a:t>2/25/2026</a:t>
+              <a:t>3/11/2026</a:t>
             </a:fld>
             <a:endParaRPr lang="de-DE"/>
           </a:p>
@@ -3723,7 +3729,7 @@
               <a:pPr>
                 <a:defRPr/>
               </a:pPr>
-              <a:t>2/25/2026</a:t>
+              <a:t>3/11/2026</a:t>
             </a:fld>
             <a:endParaRPr lang="en-US"/>
           </a:p>
@@ -4881,7 +4887,7 @@
           <a:lstStyle/>
           <a:p>
             <a:pPr lvl="0"/>
-            <a:endParaRPr/>
+            <a:endParaRPr dirty="0"/>
           </a:p>
         </p:txBody>
       </p:sp>
@@ -5151,7 +5157,7 @@
           <a:lstStyle/>
           <a:p>
             <a:r>
-              <a:rPr lang="fr-FR"/>
+              <a:rPr lang="fr-FR" dirty="0"/>
               <a:t>Modifiez le style du titre</a:t>
             </a:r>
           </a:p>
@@ -5184,35 +5190,35 @@
           <a:p>
             <a:pPr lvl="0"/>
             <a:r>
-              <a:rPr lang="fr-FR"/>
+              <a:rPr lang="fr-FR" dirty="0"/>
               <a:t>Modifier les styles du texte du masque</a:t>
             </a:r>
           </a:p>
           <a:p>
             <a:pPr lvl="1"/>
             <a:r>
-              <a:rPr lang="fr-FR"/>
+              <a:rPr lang="fr-FR" dirty="0"/>
               <a:t>Deuxième niveau</a:t>
             </a:r>
           </a:p>
           <a:p>
             <a:pPr lvl="2"/>
             <a:r>
-              <a:rPr lang="fr-FR"/>
+              <a:rPr lang="fr-FR" dirty="0"/>
               <a:t>Troisième niveau</a:t>
             </a:r>
           </a:p>
           <a:p>
             <a:pPr lvl="3"/>
             <a:r>
-              <a:rPr lang="fr-FR"/>
+              <a:rPr lang="fr-FR" dirty="0"/>
               <a:t>Quatrième niveau</a:t>
             </a:r>
           </a:p>
           <a:p>
             <a:pPr lvl="4"/>
             <a:r>
-              <a:rPr lang="fr-FR"/>
+              <a:rPr lang="fr-FR" dirty="0"/>
               <a:t>Cinquième niveau</a:t>
             </a:r>
           </a:p>
@@ -5321,7 +5327,7 @@
           <a:spcPct val="0"/>
         </a:spcBef>
         <a:buNone/>
-        <a:defRPr sz="3300" kern="1200">
+        <a:defRPr sz="2400" kern="1200">
           <a:solidFill>
             <a:schemeClr val="tx1"/>
           </a:solidFill>
@@ -5341,7 +5347,7 @@
         </a:spcBef>
         <a:buFont typeface="Arial" panose="020B0604020202020204" pitchFamily="34" charset="0"/>
         <a:buChar char="•"/>
-        <a:defRPr sz="2100" kern="1200">
+        <a:defRPr sz="1400" kern="1200">
           <a:solidFill>
             <a:schemeClr val="tx1"/>
           </a:solidFill>
@@ -5359,7 +5365,7 @@
         </a:spcBef>
         <a:buFont typeface="Arial" panose="020B0604020202020204" pitchFamily="34" charset="0"/>
         <a:buChar char="•"/>
-        <a:defRPr sz="1800" kern="1200">
+        <a:defRPr sz="1200" kern="1200">
           <a:solidFill>
             <a:schemeClr val="tx1"/>
           </a:solidFill>
@@ -5377,7 +5383,7 @@
         </a:spcBef>
         <a:buFont typeface="Arial" panose="020B0604020202020204" pitchFamily="34" charset="0"/>
         <a:buChar char="•"/>
-        <a:defRPr sz="1500" kern="1200">
+        <a:defRPr sz="1200" kern="1200">
           <a:solidFill>
             <a:schemeClr val="tx1"/>
           </a:solidFill>
@@ -5395,7 +5401,7 @@
         </a:spcBef>
         <a:buFont typeface="Arial" panose="020B0604020202020204" pitchFamily="34" charset="0"/>
         <a:buChar char="•"/>
-        <a:defRPr sz="1350" kern="1200">
+        <a:defRPr sz="1200" kern="1200">
           <a:solidFill>
             <a:schemeClr val="tx1"/>
           </a:solidFill>
@@ -5413,7 +5419,7 @@
         </a:spcBef>
         <a:buFont typeface="Arial" panose="020B0604020202020204" pitchFamily="34" charset="0"/>
         <a:buChar char="•"/>
-        <a:defRPr sz="1350" kern="1200">
+        <a:defRPr sz="1200" kern="1200">
           <a:solidFill>
             <a:schemeClr val="tx1"/>
           </a:solidFill>
@@ -5957,6 +5963,575 @@
             <p:ph type="title"/>
           </p:nvPr>
         </p:nvSpPr>
+        <p:spPr/>
+        <p:txBody>
+          <a:bodyPr/>
+          <a:lstStyle/>
+          <a:p>
+            <a:r>
+              <a:rPr lang="fr-FR" sz="2400" dirty="0" smtClean="0"/>
+              <a:t>xxx</a:t>
+            </a:r>
+            <a:endParaRPr lang="fr-FR" sz="2400" dirty="0"/>
+          </a:p>
+        </p:txBody>
+      </p:sp>
+      <p:sp>
+        <p:nvSpPr>
+          <p:cNvPr id="3" name="Espace réservé du contenu 2"/>
+          <p:cNvSpPr>
+            <a:spLocks noGrp="1"/>
+          </p:cNvSpPr>
+          <p:nvPr>
+            <p:ph idx="1"/>
+          </p:nvPr>
+        </p:nvSpPr>
+        <p:spPr>
+          <a:xfrm>
+            <a:off x="177451" y="993643"/>
+            <a:ext cx="8047211" cy="3568458"/>
+          </a:xfrm>
+        </p:spPr>
+        <p:txBody>
+          <a:bodyPr>
+            <a:normAutofit/>
+          </a:bodyPr>
+          <a:lstStyle/>
+          <a:p>
+            <a:pPr marL="0" indent="0">
+              <a:buNone/>
+            </a:pPr>
+            <a:r>
+              <a:rPr lang="fr-FR" sz="1200" b="1" dirty="0" smtClean="0"/>
+              <a:t>xxx</a:t>
+            </a:r>
+            <a:endParaRPr lang="fr-FR" sz="1200" dirty="0"/>
+          </a:p>
+          <a:p>
+            <a:pPr marL="0" indent="0">
+              <a:buNone/>
+            </a:pPr>
+            <a:endParaRPr lang="fr-FR" sz="1200" dirty="0"/>
+          </a:p>
+          <a:p>
+            <a:pPr marL="0" indent="0">
+              <a:buNone/>
+            </a:pPr>
+            <a:endParaRPr lang="fr-FR" sz="1200" dirty="0"/>
+          </a:p>
+        </p:txBody>
+      </p:sp>
+    </p:spTree>
+    <p:extLst>
+      <p:ext uri="{BB962C8B-B14F-4D97-AF65-F5344CB8AC3E}">
+        <p14:creationId xmlns:p14="http://schemas.microsoft.com/office/powerpoint/2010/main" val="2418676195"/>
+      </p:ext>
+    </p:extLst>
+  </p:cSld>
+  <p:clrMapOvr>
+    <a:masterClrMapping/>
+  </p:clrMapOvr>
+</p:sld>
+</file>
+
+<file path=ppt/slides/slide11.xml><?xml version="1.0" encoding="utf-8"?>
+<p:sld xmlns:a="http://schemas.openxmlformats.org/drawingml/2006/main" xmlns:r="http://schemas.openxmlformats.org/officeDocument/2006/relationships" xmlns:p="http://schemas.openxmlformats.org/presentationml/2006/main">
+  <p:cSld>
+    <p:spTree>
+      <p:nvGrpSpPr>
+        <p:cNvPr id="1" name=""/>
+        <p:cNvGrpSpPr/>
+        <p:nvPr/>
+      </p:nvGrpSpPr>
+      <p:grpSpPr>
+        <a:xfrm>
+          <a:off x="0" y="0"/>
+          <a:ext cx="0" cy="0"/>
+          <a:chOff x="0" y="0"/>
+          <a:chExt cx="0" cy="0"/>
+        </a:xfrm>
+      </p:grpSpPr>
+      <p:sp>
+        <p:nvSpPr>
+          <p:cNvPr id="2" name="Titre 1"/>
+          <p:cNvSpPr>
+            <a:spLocks noGrp="1"/>
+          </p:cNvSpPr>
+          <p:nvPr>
+            <p:ph type="title"/>
+          </p:nvPr>
+        </p:nvSpPr>
+        <p:spPr/>
+        <p:txBody>
+          <a:bodyPr/>
+          <a:lstStyle/>
+          <a:p>
+            <a:r>
+              <a:rPr lang="fr-FR" sz="2400" dirty="0" smtClean="0"/>
+              <a:t>xxx</a:t>
+            </a:r>
+            <a:endParaRPr lang="fr-FR" sz="2400" dirty="0"/>
+          </a:p>
+        </p:txBody>
+      </p:sp>
+      <p:sp>
+        <p:nvSpPr>
+          <p:cNvPr id="3" name="Espace réservé du contenu 2"/>
+          <p:cNvSpPr>
+            <a:spLocks noGrp="1"/>
+          </p:cNvSpPr>
+          <p:nvPr>
+            <p:ph idx="1"/>
+          </p:nvPr>
+        </p:nvSpPr>
+        <p:spPr>
+          <a:xfrm>
+            <a:off x="177451" y="993643"/>
+            <a:ext cx="8047211" cy="3568458"/>
+          </a:xfrm>
+        </p:spPr>
+        <p:txBody>
+          <a:bodyPr>
+            <a:normAutofit/>
+          </a:bodyPr>
+          <a:lstStyle/>
+          <a:p>
+            <a:pPr marL="0" indent="0">
+              <a:buNone/>
+            </a:pPr>
+            <a:r>
+              <a:rPr lang="fr-FR" sz="1200" b="1" dirty="0" smtClean="0"/>
+              <a:t>xxx</a:t>
+            </a:r>
+            <a:endParaRPr lang="fr-FR" sz="1200" dirty="0"/>
+          </a:p>
+          <a:p>
+            <a:pPr marL="0" indent="0">
+              <a:buNone/>
+            </a:pPr>
+            <a:endParaRPr lang="fr-FR" sz="1200" dirty="0"/>
+          </a:p>
+          <a:p>
+            <a:pPr marL="0" indent="0">
+              <a:buNone/>
+            </a:pPr>
+            <a:endParaRPr lang="fr-FR" sz="1200" dirty="0"/>
+          </a:p>
+        </p:txBody>
+      </p:sp>
+    </p:spTree>
+    <p:extLst>
+      <p:ext uri="{BB962C8B-B14F-4D97-AF65-F5344CB8AC3E}">
+        <p14:creationId xmlns:p14="http://schemas.microsoft.com/office/powerpoint/2010/main" val="50873378"/>
+      </p:ext>
+    </p:extLst>
+  </p:cSld>
+  <p:clrMapOvr>
+    <a:masterClrMapping/>
+  </p:clrMapOvr>
+</p:sld>
+</file>
+
+<file path=ppt/slides/slide12.xml><?xml version="1.0" encoding="utf-8"?>
+<p:sld xmlns:a="http://schemas.openxmlformats.org/drawingml/2006/main" xmlns:r="http://schemas.openxmlformats.org/officeDocument/2006/relationships" xmlns:p="http://schemas.openxmlformats.org/presentationml/2006/main">
+  <p:cSld>
+    <p:spTree>
+      <p:nvGrpSpPr>
+        <p:cNvPr id="1" name=""/>
+        <p:cNvGrpSpPr/>
+        <p:nvPr/>
+      </p:nvGrpSpPr>
+      <p:grpSpPr>
+        <a:xfrm>
+          <a:off x="0" y="0"/>
+          <a:ext cx="0" cy="0"/>
+          <a:chOff x="0" y="0"/>
+          <a:chExt cx="0" cy="0"/>
+        </a:xfrm>
+      </p:grpSpPr>
+      <p:sp>
+        <p:nvSpPr>
+          <p:cNvPr id="2" name="Titre 1"/>
+          <p:cNvSpPr>
+            <a:spLocks noGrp="1"/>
+          </p:cNvSpPr>
+          <p:nvPr>
+            <p:ph type="title"/>
+          </p:nvPr>
+        </p:nvSpPr>
+        <p:spPr>
+          <a:xfrm>
+            <a:off x="611560" y="267494"/>
+            <a:ext cx="8380040" cy="531900"/>
+          </a:xfrm>
+        </p:spPr>
+        <p:txBody>
+          <a:bodyPr/>
+          <a:lstStyle/>
+          <a:p>
+            <a:r>
+              <a:rPr lang="fr-FR" sz="2400" dirty="0"/>
+              <a:t>Introduction au </a:t>
+            </a:r>
+            <a:r>
+              <a:rPr lang="fr-FR" sz="2400" dirty="0" err="1"/>
+              <a:t>DevSecOps</a:t>
+            </a:r>
+            <a:r>
+              <a:rPr lang="fr-FR" sz="2400" dirty="0"/>
+              <a:t> et à la Security by Design</a:t>
+            </a:r>
+            <a:br>
+              <a:rPr lang="fr-FR" sz="2400" dirty="0"/>
+            </a:br>
+            <a:r>
+              <a:rPr lang="fr-FR" sz="1800" dirty="0"/>
+              <a:t>Pourquoi la sécurité doit évoluer</a:t>
+            </a:r>
+          </a:p>
+        </p:txBody>
+      </p:sp>
+      <p:sp>
+        <p:nvSpPr>
+          <p:cNvPr id="3" name="Espace réservé du contenu 2"/>
+          <p:cNvSpPr>
+            <a:spLocks noGrp="1"/>
+          </p:cNvSpPr>
+          <p:nvPr>
+            <p:ph idx="1"/>
+          </p:nvPr>
+        </p:nvSpPr>
+        <p:spPr>
+          <a:xfrm>
+            <a:off x="421900" y="937260"/>
+            <a:ext cx="8569700" cy="3562972"/>
+          </a:xfrm>
+        </p:spPr>
+        <p:txBody>
+          <a:bodyPr>
+            <a:noAutofit/>
+          </a:bodyPr>
+          <a:lstStyle/>
+          <a:p>
+            <a:r>
+              <a:rPr lang="fr-FR" sz="1200" b="1" dirty="0"/>
+              <a:t>Sécurité traditionnelle (historique)</a:t>
+            </a:r>
+          </a:p>
+          <a:p>
+            <a:pPr lvl="1">
+              <a:buFont typeface="Arial" pitchFamily="34" charset="0"/>
+              <a:buChar char="•"/>
+            </a:pPr>
+            <a:r>
+              <a:rPr lang="fr-FR" sz="1200" dirty="0"/>
+              <a:t>Intervient :</a:t>
+            </a:r>
+          </a:p>
+          <a:p>
+            <a:pPr lvl="2">
+              <a:buFont typeface="Arial" pitchFamily="34" charset="0"/>
+              <a:buChar char="•"/>
+            </a:pPr>
+            <a:r>
+              <a:rPr lang="fr-FR" sz="1200" dirty="0"/>
+              <a:t>en fin de projet,</a:t>
+            </a:r>
+          </a:p>
+          <a:p>
+            <a:pPr lvl="2">
+              <a:buFont typeface="Arial" pitchFamily="34" charset="0"/>
+              <a:buChar char="•"/>
+            </a:pPr>
+            <a:r>
+              <a:rPr lang="fr-FR" sz="1200" dirty="0"/>
+              <a:t>avant la mise en production,</a:t>
+            </a:r>
+          </a:p>
+          <a:p>
+            <a:pPr lvl="2">
+              <a:buFont typeface="Arial" pitchFamily="34" charset="0"/>
+              <a:buChar char="•"/>
+            </a:pPr>
+            <a:r>
+              <a:rPr lang="fr-FR" sz="1200" dirty="0"/>
+              <a:t>sous forme d’audits ponctuels.</a:t>
+            </a:r>
+          </a:p>
+          <a:p>
+            <a:pPr lvl="1">
+              <a:buFont typeface="Arial" pitchFamily="34" charset="0"/>
+              <a:buChar char="•"/>
+            </a:pPr>
+            <a:r>
+              <a:rPr lang="fr-FR" sz="1200" dirty="0"/>
+              <a:t>Fonctionne sur :</a:t>
+            </a:r>
+          </a:p>
+          <a:p>
+            <a:pPr lvl="2">
+              <a:buFont typeface="Arial" pitchFamily="34" charset="0"/>
+              <a:buChar char="•"/>
+            </a:pPr>
+            <a:r>
+              <a:rPr lang="fr-FR" sz="1200" dirty="0"/>
+              <a:t>des cycles longs,</a:t>
+            </a:r>
+          </a:p>
+          <a:p>
+            <a:pPr lvl="2">
+              <a:buFont typeface="Arial" pitchFamily="34" charset="0"/>
+              <a:buChar char="•"/>
+            </a:pPr>
+            <a:r>
+              <a:rPr lang="fr-FR" sz="1200" dirty="0"/>
+              <a:t>des architectures stables,</a:t>
+            </a:r>
+          </a:p>
+          <a:p>
+            <a:pPr lvl="2">
+              <a:buFont typeface="Arial" pitchFamily="34" charset="0"/>
+              <a:buChar char="•"/>
+            </a:pPr>
+            <a:r>
+              <a:rPr lang="fr-FR" sz="1200" dirty="0"/>
+              <a:t>peu de changements.</a:t>
+            </a:r>
+          </a:p>
+          <a:p>
+            <a:r>
+              <a:rPr lang="fr-FR" sz="1200" b="1" dirty="0"/>
+              <a:t>Limites dans un monde </a:t>
+            </a:r>
+            <a:r>
+              <a:rPr lang="fr-FR" sz="1200" b="1" dirty="0" err="1"/>
+              <a:t>DevOps</a:t>
+            </a:r>
+            <a:endParaRPr lang="fr-FR" sz="1200" b="1" dirty="0"/>
+          </a:p>
+          <a:p>
+            <a:pPr lvl="1">
+              <a:buFont typeface="Arial" pitchFamily="34" charset="0"/>
+              <a:buChar char="•"/>
+            </a:pPr>
+            <a:r>
+              <a:rPr lang="fr-FR" sz="1200" dirty="0"/>
+              <a:t>Déploiements fréquents.</a:t>
+            </a:r>
+          </a:p>
+          <a:p>
+            <a:pPr lvl="1">
+              <a:buFont typeface="Arial" pitchFamily="34" charset="0"/>
+              <a:buChar char="•"/>
+            </a:pPr>
+            <a:r>
+              <a:rPr lang="fr-FR" sz="1200" dirty="0"/>
+              <a:t>Architectures distribuées.</a:t>
+            </a:r>
+          </a:p>
+          <a:p>
+            <a:pPr lvl="1">
+              <a:buFont typeface="Arial" pitchFamily="34" charset="0"/>
+              <a:buChar char="•"/>
+            </a:pPr>
+            <a:r>
+              <a:rPr lang="fr-FR" sz="1200" dirty="0"/>
+              <a:t>Infrastructure dynamique.</a:t>
+            </a:r>
+          </a:p>
+          <a:p>
+            <a:pPr lvl="1">
+              <a:buFont typeface="Arial" pitchFamily="34" charset="0"/>
+              <a:buChar char="•"/>
+            </a:pPr>
+            <a:r>
+              <a:rPr lang="fr-FR" sz="1200" dirty="0"/>
+              <a:t>Équipes autonomes.</a:t>
+            </a:r>
+          </a:p>
+          <a:p>
+            <a:pPr marL="0" indent="0">
+              <a:buNone/>
+            </a:pPr>
+            <a:r>
+              <a:rPr lang="fr-FR" sz="1200" dirty="0"/>
+              <a:t>Une sécurité tardive est une </a:t>
+            </a:r>
+            <a:r>
+              <a:rPr lang="fr-FR" sz="1200" b="1" dirty="0"/>
+              <a:t>sécurité inefficace</a:t>
+            </a:r>
+            <a:r>
+              <a:rPr lang="fr-FR" sz="1200" dirty="0"/>
+              <a:t>, une faille détectée en production est toujours une faille détectée trop tard.</a:t>
+            </a:r>
+          </a:p>
+        </p:txBody>
+      </p:sp>
+      <p:sp>
+        <p:nvSpPr>
+          <p:cNvPr id="4" name="Rectangle 3"/>
+          <p:cNvSpPr/>
+          <p:nvPr/>
+        </p:nvSpPr>
+        <p:spPr>
+          <a:xfrm>
+            <a:off x="6059146" y="2119044"/>
+            <a:ext cx="2909594" cy="646331"/>
+          </a:xfrm>
+          <a:prstGeom prst="rect">
+            <a:avLst/>
+          </a:prstGeom>
+        </p:spPr>
+        <p:txBody>
+          <a:bodyPr wrap="square">
+            <a:spAutoFit/>
+          </a:bodyPr>
+          <a:lstStyle/>
+          <a:p>
+            <a:r>
+              <a:rPr lang="fr-FR" sz="1200" dirty="0">
+                <a:solidFill>
+                  <a:srgbClr val="485155"/>
+                </a:solidFill>
+                <a:latin typeface="Arial"/>
+                <a:cs typeface="Arial"/>
+              </a:rPr>
+              <a:t>La sécurité est perçue comme un frein,</a:t>
+            </a:r>
+          </a:p>
+          <a:p>
+            <a:r>
+              <a:rPr lang="fr-FR" sz="1200" dirty="0">
+                <a:solidFill>
+                  <a:srgbClr val="485155"/>
+                </a:solidFill>
+                <a:latin typeface="Arial"/>
+                <a:cs typeface="Arial"/>
+              </a:rPr>
+              <a:t>les vulnérabilités détectées trop tard, les opérationnels contournent la sécurité</a:t>
+            </a:r>
+          </a:p>
+        </p:txBody>
+      </p:sp>
+      <p:sp>
+        <p:nvSpPr>
+          <p:cNvPr id="5" name="Flèche droite 4"/>
+          <p:cNvSpPr/>
+          <p:nvPr/>
+        </p:nvSpPr>
+        <p:spPr>
+          <a:xfrm>
+            <a:off x="5373346" y="2252826"/>
+            <a:ext cx="685800" cy="378768"/>
+          </a:xfrm>
+          <a:prstGeom prst="rightArrow">
+            <a:avLst/>
+          </a:prstGeom>
+        </p:spPr>
+        <p:style>
+          <a:lnRef idx="2">
+            <a:schemeClr val="accent1">
+              <a:shade val="50000"/>
+            </a:schemeClr>
+          </a:lnRef>
+          <a:fillRef idx="1">
+            <a:schemeClr val="accent1"/>
+          </a:fillRef>
+          <a:effectRef idx="0">
+            <a:schemeClr val="accent1"/>
+          </a:effectRef>
+          <a:fontRef idx="minor">
+            <a:schemeClr val="lt1"/>
+          </a:fontRef>
+        </p:style>
+        <p:txBody>
+          <a:bodyPr rtlCol="0" anchor="ctr"/>
+          <a:lstStyle/>
+          <a:p>
+            <a:pPr algn="ctr"/>
+            <a:endParaRPr lang="fr-FR"/>
+          </a:p>
+        </p:txBody>
+      </p:sp>
+      <p:sp>
+        <p:nvSpPr>
+          <p:cNvPr id="6" name="Accolade fermante 5"/>
+          <p:cNvSpPr/>
+          <p:nvPr/>
+        </p:nvSpPr>
+        <p:spPr>
+          <a:xfrm>
+            <a:off x="4853940" y="998220"/>
+            <a:ext cx="335280" cy="2887980"/>
+          </a:xfrm>
+          <a:prstGeom prst="rightBrace">
+            <a:avLst/>
+          </a:prstGeom>
+        </p:spPr>
+        <p:style>
+          <a:lnRef idx="2">
+            <a:schemeClr val="accent1"/>
+          </a:lnRef>
+          <a:fillRef idx="0">
+            <a:schemeClr val="accent1"/>
+          </a:fillRef>
+          <a:effectRef idx="1">
+            <a:schemeClr val="accent1"/>
+          </a:effectRef>
+          <a:fontRef idx="minor">
+            <a:schemeClr val="tx1"/>
+          </a:fontRef>
+        </p:style>
+        <p:txBody>
+          <a:bodyPr rtlCol="0" anchor="ctr"/>
+          <a:lstStyle/>
+          <a:p>
+            <a:pPr algn="ctr"/>
+            <a:endParaRPr lang="fr-FR"/>
+          </a:p>
+        </p:txBody>
+      </p:sp>
+    </p:spTree>
+    <p:extLst>
+      <p:ext uri="{BB962C8B-B14F-4D97-AF65-F5344CB8AC3E}">
+        <p14:creationId xmlns:p14="http://schemas.microsoft.com/office/powerpoint/2010/main" val="3032461768"/>
+      </p:ext>
+    </p:extLst>
+  </p:cSld>
+  <p:clrMapOvr>
+    <a:masterClrMapping/>
+  </p:clrMapOvr>
+</p:sld>
+</file>
+
+<file path=ppt/slides/slide13.xml><?xml version="1.0" encoding="utf-8"?>
+<p:sld xmlns:a="http://schemas.openxmlformats.org/drawingml/2006/main" xmlns:r="http://schemas.openxmlformats.org/officeDocument/2006/relationships" xmlns:p="http://schemas.openxmlformats.org/presentationml/2006/main">
+  <p:cSld>
+    <p:spTree>
+      <p:nvGrpSpPr>
+        <p:cNvPr id="1" name=""/>
+        <p:cNvGrpSpPr/>
+        <p:nvPr/>
+      </p:nvGrpSpPr>
+      <p:grpSpPr>
+        <a:xfrm>
+          <a:off x="0" y="0"/>
+          <a:ext cx="0" cy="0"/>
+          <a:chOff x="0" y="0"/>
+          <a:chExt cx="0" cy="0"/>
+        </a:xfrm>
+      </p:grpSpPr>
+      <p:sp>
+        <p:nvSpPr>
+          <p:cNvPr id="2" name="Titre 1"/>
+          <p:cNvSpPr>
+            <a:spLocks noGrp="1"/>
+          </p:cNvSpPr>
+          <p:nvPr>
+            <p:ph type="title"/>
+          </p:nvPr>
+        </p:nvSpPr>
         <p:spPr>
           <a:xfrm>
             <a:off x="611560" y="267494"/>
@@ -6203,7 +6778,7 @@
 </p:sld>
 </file>
 
-<file path=ppt/slides/slide11.xml><?xml version="1.0" encoding="utf-8"?>
+<file path=ppt/slides/slide14.xml><?xml version="1.0" encoding="utf-8"?>
 <p:sld xmlns:a="http://schemas.openxmlformats.org/drawingml/2006/main" xmlns:r="http://schemas.openxmlformats.org/officeDocument/2006/relationships" xmlns:p="http://schemas.openxmlformats.org/presentationml/2006/main">
   <p:cSld>
     <p:spTree>
@@ -6915,7 +7490,7 @@
 </p:sld>
 </file>
 
-<file path=ppt/slides/slide12.xml><?xml version="1.0" encoding="utf-8"?>
+<file path=ppt/slides/slide15.xml><?xml version="1.0" encoding="utf-8"?>
 <p:sld xmlns:a="http://schemas.openxmlformats.org/drawingml/2006/main" xmlns:r="http://schemas.openxmlformats.org/officeDocument/2006/relationships" xmlns:p="http://schemas.openxmlformats.org/presentationml/2006/main">
   <p:cSld>
     <p:spTree>
@@ -7284,7 +7859,7 @@
 </p:sld>
 </file>
 
-<file path=ppt/slides/slide13.xml><?xml version="1.0" encoding="utf-8"?>
+<file path=ppt/slides/slide16.xml><?xml version="1.0" encoding="utf-8"?>
 <p:sld xmlns:a="http://schemas.openxmlformats.org/drawingml/2006/main" xmlns:r="http://schemas.openxmlformats.org/officeDocument/2006/relationships" xmlns:p="http://schemas.openxmlformats.org/presentationml/2006/main">
   <p:cSld>
     <p:spTree>
@@ -7478,7 +8053,7 @@
 </p:sld>
 </file>
 
-<file path=ppt/slides/slide14.xml><?xml version="1.0" encoding="utf-8"?>
+<file path=ppt/slides/slide17.xml><?xml version="1.0" encoding="utf-8"?>
 <p:sld xmlns:a="http://schemas.openxmlformats.org/drawingml/2006/main" xmlns:r="http://schemas.openxmlformats.org/officeDocument/2006/relationships" xmlns:p="http://schemas.openxmlformats.org/presentationml/2006/main">
   <p:cSld>
     <p:spTree>
@@ -7740,7 +8315,7 @@
 </p:sld>
 </file>
 
-<file path=ppt/slides/slide15.xml><?xml version="1.0" encoding="utf-8"?>
+<file path=ppt/slides/slide18.xml><?xml version="1.0" encoding="utf-8"?>
 <p:sld xmlns:a="http://schemas.openxmlformats.org/drawingml/2006/main" xmlns:r="http://schemas.openxmlformats.org/officeDocument/2006/relationships" xmlns:p="http://schemas.openxmlformats.org/presentationml/2006/main">
   <p:cSld>
     <p:spTree>
@@ -7984,7 +8559,7 @@
 </p:sld>
 </file>
 
-<file path=ppt/slides/slide16.xml><?xml version="1.0" encoding="utf-8"?>
+<file path=ppt/slides/slide19.xml><?xml version="1.0" encoding="utf-8"?>
 <p:sld xmlns:a="http://schemas.openxmlformats.org/drawingml/2006/main" xmlns:r="http://schemas.openxmlformats.org/officeDocument/2006/relationships" xmlns:p="http://schemas.openxmlformats.org/presentationml/2006/main">
   <p:cSld>
     <p:spTree>
@@ -8527,7 +9102,856 @@
 </p:sld>
 </file>
 
-<file path=ppt/slides/slide17.xml><?xml version="1.0" encoding="utf-8"?>
+<file path=ppt/slides/slide2.xml><?xml version="1.0" encoding="utf-8"?>
+<p:sld xmlns:a="http://schemas.openxmlformats.org/drawingml/2006/main" xmlns:r="http://schemas.openxmlformats.org/officeDocument/2006/relationships" xmlns:p="http://schemas.openxmlformats.org/presentationml/2006/main">
+  <p:cSld>
+    <p:spTree>
+      <p:nvGrpSpPr>
+        <p:cNvPr id="1" name=""/>
+        <p:cNvGrpSpPr/>
+        <p:nvPr/>
+      </p:nvGrpSpPr>
+      <p:grpSpPr>
+        <a:xfrm>
+          <a:off x="0" y="0"/>
+          <a:ext cx="0" cy="0"/>
+          <a:chOff x="0" y="0"/>
+          <a:chExt cx="0" cy="0"/>
+        </a:xfrm>
+      </p:grpSpPr>
+      <p:sp>
+        <p:nvSpPr>
+          <p:cNvPr id="2" name="Titre 1">
+            <a:extLst>
+              <a:ext uri="{FF2B5EF4-FFF2-40B4-BE49-F238E27FC236}">
+                <a16:creationId xmlns:a16="http://schemas.microsoft.com/office/drawing/2014/main" xmlns="" id="{6AB1F110-FE64-49CD-8296-498E286E15CC}"/>
+              </a:ext>
+            </a:extLst>
+          </p:cNvPr>
+          <p:cNvSpPr>
+            <a:spLocks noGrp="1"/>
+          </p:cNvSpPr>
+          <p:nvPr>
+            <p:ph type="title"/>
+          </p:nvPr>
+        </p:nvSpPr>
+        <p:spPr>
+          <a:xfrm>
+            <a:off x="611560" y="411512"/>
+            <a:ext cx="8126040" cy="396001"/>
+          </a:xfrm>
+        </p:spPr>
+        <p:txBody>
+          <a:bodyPr/>
+          <a:lstStyle/>
+          <a:p>
+            <a:r>
+              <a:rPr lang="fr-FR" sz="1800">
+                <a:solidFill>
+                  <a:prstClr val="black"/>
+                </a:solidFill>
+              </a:rPr>
+              <a:t>SOMMAIRE</a:t>
+            </a:r>
+            <a:endParaRPr lang="fr-FR"/>
+          </a:p>
+        </p:txBody>
+      </p:sp>
+      <p:sp>
+        <p:nvSpPr>
+          <p:cNvPr id="3" name="Rectangle 2">
+            <a:extLst>
+              <a:ext uri="{FF2B5EF4-FFF2-40B4-BE49-F238E27FC236}">
+                <a16:creationId xmlns:a16="http://schemas.microsoft.com/office/drawing/2014/main" xmlns="" id="{70A39CEC-99B5-C7B5-B91D-4963573D9744}"/>
+              </a:ext>
+            </a:extLst>
+          </p:cNvPr>
+          <p:cNvSpPr/>
+          <p:nvPr/>
+        </p:nvSpPr>
+        <p:spPr>
+          <a:xfrm>
+            <a:off x="611560" y="979145"/>
+            <a:ext cx="6648615" cy="333976"/>
+          </a:xfrm>
+          <a:prstGeom prst="rect">
+            <a:avLst/>
+          </a:prstGeom>
+          <a:noFill/>
+          <a:ln w="19050">
+            <a:solidFill>
+              <a:srgbClr val="009597"/>
+            </a:solidFill>
+          </a:ln>
+          <a:effectLst/>
+        </p:spPr>
+        <p:style>
+          <a:lnRef idx="2">
+            <a:schemeClr val="accent1">
+              <a:shade val="50000"/>
+            </a:schemeClr>
+          </a:lnRef>
+          <a:fillRef idx="1">
+            <a:schemeClr val="accent1"/>
+          </a:fillRef>
+          <a:effectRef idx="0">
+            <a:schemeClr val="accent1"/>
+          </a:effectRef>
+          <a:fontRef idx="minor">
+            <a:schemeClr val="lt1"/>
+          </a:fontRef>
+        </p:style>
+        <p:txBody>
+          <a:bodyPr rtlCol="0" anchor="ctr"/>
+          <a:lstStyle/>
+          <a:p>
+            <a:pPr defTabSz="685688"/>
+            <a:r>
+              <a:rPr lang="fr-FR" sz="1200" dirty="0">
+                <a:solidFill>
+                  <a:prstClr val="black"/>
+                </a:solidFill>
+                <a:latin typeface="Arial"/>
+              </a:rPr>
+              <a:t>Introduction générale</a:t>
+            </a:r>
+          </a:p>
+        </p:txBody>
+      </p:sp>
+      <p:sp>
+        <p:nvSpPr>
+          <p:cNvPr id="12" name="Rectangle 11">
+            <a:extLst>
+              <a:ext uri="{FF2B5EF4-FFF2-40B4-BE49-F238E27FC236}">
+                <a16:creationId xmlns:a16="http://schemas.microsoft.com/office/drawing/2014/main" xmlns="" id="{FD98A81F-A23A-429E-0187-6FED333327F7}"/>
+              </a:ext>
+            </a:extLst>
+          </p:cNvPr>
+          <p:cNvSpPr/>
+          <p:nvPr/>
+        </p:nvSpPr>
+        <p:spPr>
+          <a:xfrm>
+            <a:off x="611559" y="1317765"/>
+            <a:ext cx="6648615" cy="333976"/>
+          </a:xfrm>
+          <a:prstGeom prst="rect">
+            <a:avLst/>
+          </a:prstGeom>
+          <a:noFill/>
+          <a:ln w="19050">
+            <a:solidFill>
+              <a:srgbClr val="009597"/>
+            </a:solidFill>
+          </a:ln>
+          <a:effectLst/>
+        </p:spPr>
+        <p:style>
+          <a:lnRef idx="2">
+            <a:schemeClr val="accent1">
+              <a:shade val="50000"/>
+            </a:schemeClr>
+          </a:lnRef>
+          <a:fillRef idx="1">
+            <a:schemeClr val="accent1"/>
+          </a:fillRef>
+          <a:effectRef idx="0">
+            <a:schemeClr val="accent1"/>
+          </a:effectRef>
+          <a:fontRef idx="minor">
+            <a:schemeClr val="lt1"/>
+          </a:fontRef>
+        </p:style>
+        <p:txBody>
+          <a:bodyPr rtlCol="0" anchor="ctr"/>
+          <a:lstStyle/>
+          <a:p>
+            <a:pPr defTabSz="685688"/>
+            <a:r>
+              <a:rPr lang="fr-FR" sz="1200" dirty="0" err="1" smtClean="0">
+                <a:solidFill>
+                  <a:prstClr val="black"/>
+                </a:solidFill>
+                <a:latin typeface="Arial"/>
+              </a:rPr>
+              <a:t>Devcontainers</a:t>
+            </a:r>
+            <a:endParaRPr lang="fr-FR" sz="1200" dirty="0">
+              <a:solidFill>
+                <a:prstClr val="black"/>
+              </a:solidFill>
+              <a:latin typeface="Arial"/>
+            </a:endParaRPr>
+          </a:p>
+        </p:txBody>
+      </p:sp>
+      <p:sp>
+        <p:nvSpPr>
+          <p:cNvPr id="13" name="Rectangle 12">
+            <a:extLst>
+              <a:ext uri="{FF2B5EF4-FFF2-40B4-BE49-F238E27FC236}">
+                <a16:creationId xmlns:a16="http://schemas.microsoft.com/office/drawing/2014/main" xmlns="" id="{89F38DEE-C0D1-C5B5-9CC8-3A2E72374D2B}"/>
+              </a:ext>
+            </a:extLst>
+          </p:cNvPr>
+          <p:cNvSpPr/>
+          <p:nvPr/>
+        </p:nvSpPr>
+        <p:spPr>
+          <a:xfrm>
+            <a:off x="611560" y="1656385"/>
+            <a:ext cx="6648615" cy="333976"/>
+          </a:xfrm>
+          <a:prstGeom prst="rect">
+            <a:avLst/>
+          </a:prstGeom>
+          <a:noFill/>
+          <a:ln w="19050">
+            <a:solidFill>
+              <a:srgbClr val="009597"/>
+            </a:solidFill>
+          </a:ln>
+          <a:effectLst/>
+        </p:spPr>
+        <p:style>
+          <a:lnRef idx="2">
+            <a:schemeClr val="accent1">
+              <a:shade val="50000"/>
+            </a:schemeClr>
+          </a:lnRef>
+          <a:fillRef idx="1">
+            <a:schemeClr val="accent1"/>
+          </a:fillRef>
+          <a:effectRef idx="0">
+            <a:schemeClr val="accent1"/>
+          </a:effectRef>
+          <a:fontRef idx="minor">
+            <a:schemeClr val="lt1"/>
+          </a:fontRef>
+        </p:style>
+        <p:txBody>
+          <a:bodyPr rtlCol="0" anchor="ctr"/>
+          <a:lstStyle/>
+          <a:p>
+            <a:pPr defTabSz="685688"/>
+            <a:r>
+              <a:rPr lang="fr-FR" sz="1200" dirty="0" smtClean="0">
+                <a:solidFill>
+                  <a:prstClr val="black"/>
+                </a:solidFill>
+                <a:latin typeface="Arial"/>
+              </a:rPr>
+              <a:t>Infrastructure as code - </a:t>
+            </a:r>
+            <a:r>
+              <a:rPr lang="fr-FR" sz="1200" dirty="0" err="1" smtClean="0">
+                <a:solidFill>
+                  <a:prstClr val="black"/>
+                </a:solidFill>
+                <a:latin typeface="Arial"/>
+              </a:rPr>
+              <a:t>Terraform</a:t>
+            </a:r>
+            <a:endParaRPr lang="fr-FR" sz="1200" dirty="0">
+              <a:solidFill>
+                <a:prstClr val="black"/>
+              </a:solidFill>
+              <a:latin typeface="Arial"/>
+            </a:endParaRPr>
+          </a:p>
+        </p:txBody>
+      </p:sp>
+      <p:sp>
+        <p:nvSpPr>
+          <p:cNvPr id="14" name="Rectangle 13">
+            <a:extLst>
+              <a:ext uri="{FF2B5EF4-FFF2-40B4-BE49-F238E27FC236}">
+                <a16:creationId xmlns:a16="http://schemas.microsoft.com/office/drawing/2014/main" xmlns="" id="{8B8EA3F1-0CA6-FFC7-7762-86C299DA319D}"/>
+              </a:ext>
+            </a:extLst>
+          </p:cNvPr>
+          <p:cNvSpPr/>
+          <p:nvPr/>
+        </p:nvSpPr>
+        <p:spPr>
+          <a:xfrm>
+            <a:off x="611559" y="1995005"/>
+            <a:ext cx="6648615" cy="333976"/>
+          </a:xfrm>
+          <a:prstGeom prst="rect">
+            <a:avLst/>
+          </a:prstGeom>
+          <a:noFill/>
+          <a:ln w="19050">
+            <a:solidFill>
+              <a:srgbClr val="009597"/>
+            </a:solidFill>
+          </a:ln>
+          <a:effectLst/>
+        </p:spPr>
+        <p:style>
+          <a:lnRef idx="2">
+            <a:schemeClr val="accent1">
+              <a:shade val="50000"/>
+            </a:schemeClr>
+          </a:lnRef>
+          <a:fillRef idx="1">
+            <a:schemeClr val="accent1"/>
+          </a:fillRef>
+          <a:effectRef idx="0">
+            <a:schemeClr val="accent1"/>
+          </a:effectRef>
+          <a:fontRef idx="minor">
+            <a:schemeClr val="lt1"/>
+          </a:fontRef>
+        </p:style>
+        <p:txBody>
+          <a:bodyPr rtlCol="0" anchor="ctr"/>
+          <a:lstStyle/>
+          <a:p>
+            <a:pPr defTabSz="685688"/>
+            <a:r>
+              <a:rPr lang="fr-FR" sz="1200" dirty="0" smtClean="0">
+                <a:solidFill>
+                  <a:prstClr val="black"/>
+                </a:solidFill>
+                <a:latin typeface="Arial"/>
+              </a:rPr>
+              <a:t>Pipeline CI/CD et sécurité</a:t>
+            </a:r>
+            <a:endParaRPr lang="fr-FR" sz="1200" dirty="0">
+              <a:solidFill>
+                <a:prstClr val="black"/>
+              </a:solidFill>
+              <a:latin typeface="Arial"/>
+            </a:endParaRPr>
+          </a:p>
+        </p:txBody>
+      </p:sp>
+      <p:sp>
+        <p:nvSpPr>
+          <p:cNvPr id="15" name="Rectangle 14">
+            <a:extLst>
+              <a:ext uri="{FF2B5EF4-FFF2-40B4-BE49-F238E27FC236}">
+                <a16:creationId xmlns:a16="http://schemas.microsoft.com/office/drawing/2014/main" xmlns="" id="{8334A4F0-30FE-B2EF-E9FE-BBAC3F2B00BC}"/>
+              </a:ext>
+            </a:extLst>
+          </p:cNvPr>
+          <p:cNvSpPr/>
+          <p:nvPr/>
+        </p:nvSpPr>
+        <p:spPr>
+          <a:xfrm>
+            <a:off x="611560" y="2328981"/>
+            <a:ext cx="6648615" cy="333976"/>
+          </a:xfrm>
+          <a:prstGeom prst="rect">
+            <a:avLst/>
+          </a:prstGeom>
+          <a:noFill/>
+          <a:ln w="19050">
+            <a:solidFill>
+              <a:srgbClr val="009597"/>
+            </a:solidFill>
+          </a:ln>
+          <a:effectLst/>
+        </p:spPr>
+        <p:style>
+          <a:lnRef idx="2">
+            <a:schemeClr val="accent1">
+              <a:shade val="50000"/>
+            </a:schemeClr>
+          </a:lnRef>
+          <a:fillRef idx="1">
+            <a:schemeClr val="accent1"/>
+          </a:fillRef>
+          <a:effectRef idx="0">
+            <a:schemeClr val="accent1"/>
+          </a:effectRef>
+          <a:fontRef idx="minor">
+            <a:schemeClr val="lt1"/>
+          </a:fontRef>
+        </p:style>
+        <p:txBody>
+          <a:bodyPr rtlCol="0" anchor="ctr"/>
+          <a:lstStyle/>
+          <a:p>
+            <a:pPr defTabSz="685688"/>
+            <a:r>
+              <a:rPr lang="fr-FR" sz="1200" dirty="0" smtClean="0">
+                <a:solidFill>
+                  <a:prstClr val="black"/>
+                </a:solidFill>
+                <a:latin typeface="Arial"/>
+              </a:rPr>
+              <a:t>CD VM en mode push - </a:t>
+            </a:r>
+            <a:r>
+              <a:rPr lang="fr-FR" sz="1200" dirty="0" err="1" smtClean="0">
+                <a:solidFill>
+                  <a:prstClr val="black"/>
+                </a:solidFill>
+                <a:latin typeface="Arial"/>
+              </a:rPr>
+              <a:t>Ansible</a:t>
+            </a:r>
+            <a:endParaRPr lang="fr-FR" sz="1200" dirty="0">
+              <a:solidFill>
+                <a:prstClr val="black"/>
+              </a:solidFill>
+              <a:latin typeface="Arial"/>
+            </a:endParaRPr>
+          </a:p>
+        </p:txBody>
+      </p:sp>
+      <p:sp>
+        <p:nvSpPr>
+          <p:cNvPr id="16" name="Rectangle 15">
+            <a:extLst>
+              <a:ext uri="{FF2B5EF4-FFF2-40B4-BE49-F238E27FC236}">
+                <a16:creationId xmlns:a16="http://schemas.microsoft.com/office/drawing/2014/main" xmlns="" id="{31EC0D59-0F42-7CAC-BE8A-DAB3BAC88F68}"/>
+              </a:ext>
+            </a:extLst>
+          </p:cNvPr>
+          <p:cNvSpPr/>
+          <p:nvPr/>
+        </p:nvSpPr>
+        <p:spPr>
+          <a:xfrm>
+            <a:off x="611559" y="2667601"/>
+            <a:ext cx="6648615" cy="333976"/>
+          </a:xfrm>
+          <a:prstGeom prst="rect">
+            <a:avLst/>
+          </a:prstGeom>
+          <a:noFill/>
+          <a:ln w="19050">
+            <a:solidFill>
+              <a:srgbClr val="009597"/>
+            </a:solidFill>
+          </a:ln>
+          <a:effectLst/>
+        </p:spPr>
+        <p:style>
+          <a:lnRef idx="2">
+            <a:schemeClr val="accent1">
+              <a:shade val="50000"/>
+            </a:schemeClr>
+          </a:lnRef>
+          <a:fillRef idx="1">
+            <a:schemeClr val="accent1"/>
+          </a:fillRef>
+          <a:effectRef idx="0">
+            <a:schemeClr val="accent1"/>
+          </a:effectRef>
+          <a:fontRef idx="minor">
+            <a:schemeClr val="lt1"/>
+          </a:fontRef>
+        </p:style>
+        <p:txBody>
+          <a:bodyPr rtlCol="0" anchor="ctr"/>
+          <a:lstStyle/>
+          <a:p>
+            <a:pPr defTabSz="685688"/>
+            <a:r>
+              <a:rPr lang="fr-FR" sz="1200" dirty="0" smtClean="0">
+                <a:solidFill>
+                  <a:prstClr val="black"/>
+                </a:solidFill>
+                <a:latin typeface="Arial"/>
+              </a:rPr>
+              <a:t>CD </a:t>
+            </a:r>
+            <a:r>
+              <a:rPr lang="fr-FR" sz="1200" dirty="0" err="1" smtClean="0">
+                <a:solidFill>
+                  <a:prstClr val="black"/>
+                </a:solidFill>
+                <a:latin typeface="Arial"/>
+              </a:rPr>
+              <a:t>Gitops</a:t>
+            </a:r>
+            <a:r>
+              <a:rPr lang="fr-FR" sz="1200" dirty="0" smtClean="0">
+                <a:solidFill>
+                  <a:prstClr val="black"/>
+                </a:solidFill>
+                <a:latin typeface="Arial"/>
+              </a:rPr>
+              <a:t> an mode pull - </a:t>
+            </a:r>
+            <a:r>
+              <a:rPr lang="fr-FR" sz="1200" dirty="0" err="1" smtClean="0">
+                <a:solidFill>
+                  <a:prstClr val="black"/>
+                </a:solidFill>
+                <a:latin typeface="Arial"/>
+              </a:rPr>
+              <a:t>ArgoCD</a:t>
+            </a:r>
+            <a:endParaRPr lang="fr-FR" sz="1200" dirty="0">
+              <a:solidFill>
+                <a:prstClr val="black"/>
+              </a:solidFill>
+              <a:latin typeface="Arial"/>
+            </a:endParaRPr>
+          </a:p>
+        </p:txBody>
+      </p:sp>
+      <p:sp>
+        <p:nvSpPr>
+          <p:cNvPr id="17" name="Rectangle 16">
+            <a:extLst>
+              <a:ext uri="{FF2B5EF4-FFF2-40B4-BE49-F238E27FC236}">
+                <a16:creationId xmlns:a16="http://schemas.microsoft.com/office/drawing/2014/main" xmlns="" id="{A7771E4C-E8F9-B4FE-32D9-7BBC82F8777B}"/>
+              </a:ext>
+            </a:extLst>
+          </p:cNvPr>
+          <p:cNvSpPr/>
+          <p:nvPr/>
+        </p:nvSpPr>
+        <p:spPr>
+          <a:xfrm>
+            <a:off x="611560" y="3006221"/>
+            <a:ext cx="6648615" cy="333976"/>
+          </a:xfrm>
+          <a:prstGeom prst="rect">
+            <a:avLst/>
+          </a:prstGeom>
+          <a:noFill/>
+          <a:ln w="19050">
+            <a:solidFill>
+              <a:srgbClr val="009597"/>
+            </a:solidFill>
+          </a:ln>
+          <a:effectLst/>
+        </p:spPr>
+        <p:style>
+          <a:lnRef idx="2">
+            <a:schemeClr val="accent1">
+              <a:shade val="50000"/>
+            </a:schemeClr>
+          </a:lnRef>
+          <a:fillRef idx="1">
+            <a:schemeClr val="accent1"/>
+          </a:fillRef>
+          <a:effectRef idx="0">
+            <a:schemeClr val="accent1"/>
+          </a:effectRef>
+          <a:fontRef idx="minor">
+            <a:schemeClr val="lt1"/>
+          </a:fontRef>
+        </p:style>
+        <p:txBody>
+          <a:bodyPr rtlCol="0" anchor="ctr"/>
+          <a:lstStyle/>
+          <a:p>
+            <a:pPr defTabSz="685688"/>
+            <a:r>
+              <a:rPr lang="fr-FR" sz="1200" dirty="0" smtClean="0">
+                <a:solidFill>
+                  <a:prstClr val="black"/>
+                </a:solidFill>
+                <a:latin typeface="Arial"/>
+              </a:rPr>
+              <a:t>Le </a:t>
+            </a:r>
+            <a:r>
+              <a:rPr lang="fr-FR" sz="1200" dirty="0" err="1" smtClean="0">
+                <a:solidFill>
+                  <a:prstClr val="black"/>
+                </a:solidFill>
+                <a:latin typeface="Arial"/>
+              </a:rPr>
+              <a:t>zero</a:t>
+            </a:r>
+            <a:r>
+              <a:rPr lang="fr-FR" sz="1200" dirty="0" smtClean="0">
+                <a:solidFill>
+                  <a:prstClr val="black"/>
+                </a:solidFill>
+                <a:latin typeface="Arial"/>
+              </a:rPr>
+              <a:t> down time - la </a:t>
+            </a:r>
+            <a:r>
+              <a:rPr lang="fr-FR" sz="1200" dirty="0" err="1" smtClean="0">
+                <a:solidFill>
+                  <a:prstClr val="black"/>
+                </a:solidFill>
+                <a:latin typeface="Arial"/>
+              </a:rPr>
+              <a:t>scalabilité</a:t>
+            </a:r>
+            <a:endParaRPr lang="fr-FR" sz="1200" dirty="0">
+              <a:solidFill>
+                <a:prstClr val="black"/>
+              </a:solidFill>
+              <a:latin typeface="Arial"/>
+            </a:endParaRPr>
+          </a:p>
+        </p:txBody>
+      </p:sp>
+      <p:sp>
+        <p:nvSpPr>
+          <p:cNvPr id="18" name="Rectangle 17">
+            <a:extLst>
+              <a:ext uri="{FF2B5EF4-FFF2-40B4-BE49-F238E27FC236}">
+                <a16:creationId xmlns:a16="http://schemas.microsoft.com/office/drawing/2014/main" xmlns="" id="{222A0EE3-5405-3631-A456-96007F33153A}"/>
+              </a:ext>
+            </a:extLst>
+          </p:cNvPr>
+          <p:cNvSpPr/>
+          <p:nvPr/>
+        </p:nvSpPr>
+        <p:spPr>
+          <a:xfrm>
+            <a:off x="611558" y="4016044"/>
+            <a:ext cx="6648615" cy="333976"/>
+          </a:xfrm>
+          <a:prstGeom prst="rect">
+            <a:avLst/>
+          </a:prstGeom>
+          <a:noFill/>
+          <a:ln w="19050">
+            <a:solidFill>
+              <a:srgbClr val="009597"/>
+            </a:solidFill>
+          </a:ln>
+          <a:effectLst/>
+        </p:spPr>
+        <p:style>
+          <a:lnRef idx="2">
+            <a:schemeClr val="accent1">
+              <a:shade val="50000"/>
+            </a:schemeClr>
+          </a:lnRef>
+          <a:fillRef idx="1">
+            <a:schemeClr val="accent1"/>
+          </a:fillRef>
+          <a:effectRef idx="0">
+            <a:schemeClr val="accent1"/>
+          </a:effectRef>
+          <a:fontRef idx="minor">
+            <a:schemeClr val="lt1"/>
+          </a:fontRef>
+        </p:style>
+        <p:txBody>
+          <a:bodyPr rtlCol="0" anchor="ctr"/>
+          <a:lstStyle/>
+          <a:p>
+            <a:pPr defTabSz="685688"/>
+            <a:endParaRPr lang="fr-FR" sz="1200" dirty="0">
+              <a:solidFill>
+                <a:prstClr val="black"/>
+              </a:solidFill>
+              <a:latin typeface="Arial"/>
+            </a:endParaRPr>
+          </a:p>
+        </p:txBody>
+      </p:sp>
+      <p:sp>
+        <p:nvSpPr>
+          <p:cNvPr id="19" name="Rectangle 18">
+            <a:extLst>
+              <a:ext uri="{FF2B5EF4-FFF2-40B4-BE49-F238E27FC236}">
+                <a16:creationId xmlns:a16="http://schemas.microsoft.com/office/drawing/2014/main" xmlns="" id="{432BE386-F984-6382-FF17-8EC3F97F3DCD}"/>
+              </a:ext>
+            </a:extLst>
+          </p:cNvPr>
+          <p:cNvSpPr/>
+          <p:nvPr/>
+        </p:nvSpPr>
+        <p:spPr>
+          <a:xfrm>
+            <a:off x="611558" y="3338804"/>
+            <a:ext cx="6648615" cy="333976"/>
+          </a:xfrm>
+          <a:prstGeom prst="rect">
+            <a:avLst/>
+          </a:prstGeom>
+          <a:noFill/>
+          <a:ln w="19050">
+            <a:solidFill>
+              <a:srgbClr val="009597"/>
+            </a:solidFill>
+          </a:ln>
+          <a:effectLst/>
+        </p:spPr>
+        <p:style>
+          <a:lnRef idx="2">
+            <a:schemeClr val="accent1">
+              <a:shade val="50000"/>
+            </a:schemeClr>
+          </a:lnRef>
+          <a:fillRef idx="1">
+            <a:schemeClr val="accent1"/>
+          </a:fillRef>
+          <a:effectRef idx="0">
+            <a:schemeClr val="accent1"/>
+          </a:effectRef>
+          <a:fontRef idx="minor">
+            <a:schemeClr val="lt1"/>
+          </a:fontRef>
+        </p:style>
+        <p:txBody>
+          <a:bodyPr rtlCol="0" anchor="ctr"/>
+          <a:lstStyle/>
+          <a:p>
+            <a:pPr defTabSz="685688"/>
+            <a:r>
+              <a:rPr lang="fr-FR" sz="1200" dirty="0" smtClean="0">
+                <a:solidFill>
+                  <a:prstClr val="black"/>
+                </a:solidFill>
+                <a:latin typeface="Arial"/>
+              </a:rPr>
+              <a:t>Observabilité - Monitoring </a:t>
+            </a:r>
+            <a:r>
+              <a:rPr lang="fr-FR" sz="1200" dirty="0" err="1" smtClean="0">
+                <a:solidFill>
+                  <a:prstClr val="black"/>
+                </a:solidFill>
+                <a:latin typeface="Arial"/>
+              </a:rPr>
+              <a:t>alerting</a:t>
+            </a:r>
+            <a:r>
+              <a:rPr lang="fr-FR" sz="1200" dirty="0" smtClean="0">
+                <a:solidFill>
+                  <a:prstClr val="black"/>
+                </a:solidFill>
+                <a:latin typeface="Arial"/>
+              </a:rPr>
+              <a:t> - </a:t>
+            </a:r>
+            <a:r>
+              <a:rPr lang="fr-FR" sz="1200" dirty="0" err="1" smtClean="0">
+                <a:solidFill>
+                  <a:prstClr val="black"/>
+                </a:solidFill>
+                <a:latin typeface="Arial"/>
+              </a:rPr>
+              <a:t>Promethéuse</a:t>
+            </a:r>
+            <a:r>
+              <a:rPr lang="fr-FR" sz="1200" dirty="0" smtClean="0">
+                <a:solidFill>
+                  <a:prstClr val="black"/>
+                </a:solidFill>
+                <a:latin typeface="Arial"/>
+              </a:rPr>
+              <a:t> </a:t>
+            </a:r>
+            <a:r>
+              <a:rPr lang="fr-FR" sz="1200" dirty="0" err="1" smtClean="0">
+                <a:solidFill>
+                  <a:prstClr val="black"/>
+                </a:solidFill>
+                <a:latin typeface="Arial"/>
+              </a:rPr>
+              <a:t>Grafana</a:t>
+            </a:r>
+            <a:r>
+              <a:rPr lang="fr-FR" sz="1200" dirty="0" smtClean="0">
+                <a:solidFill>
+                  <a:prstClr val="black"/>
+                </a:solidFill>
+                <a:latin typeface="Arial"/>
+              </a:rPr>
+              <a:t> </a:t>
+            </a:r>
+            <a:r>
+              <a:rPr lang="fr-FR" sz="1200" dirty="0" err="1" smtClean="0">
+                <a:solidFill>
+                  <a:prstClr val="black"/>
+                </a:solidFill>
+                <a:latin typeface="Arial"/>
+              </a:rPr>
+              <a:t>Loki</a:t>
+            </a:r>
+            <a:endParaRPr lang="fr-FR" sz="1200" dirty="0">
+              <a:solidFill>
+                <a:prstClr val="black"/>
+              </a:solidFill>
+              <a:latin typeface="Arial"/>
+            </a:endParaRPr>
+          </a:p>
+        </p:txBody>
+      </p:sp>
+      <p:sp>
+        <p:nvSpPr>
+          <p:cNvPr id="20" name="Rectangle 19">
+            <a:extLst>
+              <a:ext uri="{FF2B5EF4-FFF2-40B4-BE49-F238E27FC236}">
+                <a16:creationId xmlns:a16="http://schemas.microsoft.com/office/drawing/2014/main" xmlns="" id="{4DAFCC9B-58C0-BEB0-C3FC-20C3364925F4}"/>
+              </a:ext>
+            </a:extLst>
+          </p:cNvPr>
+          <p:cNvSpPr/>
+          <p:nvPr/>
+        </p:nvSpPr>
+        <p:spPr>
+          <a:xfrm>
+            <a:off x="611556" y="3677424"/>
+            <a:ext cx="6648615" cy="333976"/>
+          </a:xfrm>
+          <a:prstGeom prst="rect">
+            <a:avLst/>
+          </a:prstGeom>
+          <a:noFill/>
+          <a:ln w="19050">
+            <a:solidFill>
+              <a:srgbClr val="009597"/>
+            </a:solidFill>
+          </a:ln>
+          <a:effectLst/>
+        </p:spPr>
+        <p:style>
+          <a:lnRef idx="2">
+            <a:schemeClr val="accent1">
+              <a:shade val="50000"/>
+            </a:schemeClr>
+          </a:lnRef>
+          <a:fillRef idx="1">
+            <a:schemeClr val="accent1"/>
+          </a:fillRef>
+          <a:effectRef idx="0">
+            <a:schemeClr val="accent1"/>
+          </a:effectRef>
+          <a:fontRef idx="minor">
+            <a:schemeClr val="lt1"/>
+          </a:fontRef>
+        </p:style>
+        <p:txBody>
+          <a:bodyPr rtlCol="0" anchor="ctr"/>
+          <a:lstStyle/>
+          <a:p>
+            <a:pPr defTabSz="685688"/>
+            <a:endParaRPr lang="fr-FR" sz="1200" dirty="0">
+              <a:solidFill>
+                <a:prstClr val="black"/>
+              </a:solidFill>
+              <a:latin typeface="Arial"/>
+            </a:endParaRPr>
+          </a:p>
+        </p:txBody>
+      </p:sp>
+    </p:spTree>
+    <p:extLst>
+      <p:ext uri="{BB962C8B-B14F-4D97-AF65-F5344CB8AC3E}">
+        <p14:creationId xmlns:p14="http://schemas.microsoft.com/office/powerpoint/2010/main" val="2783188770"/>
+      </p:ext>
+    </p:extLst>
+  </p:cSld>
+  <p:clrMapOvr>
+    <a:masterClrMapping/>
+  </p:clrMapOvr>
+</p:sld>
+</file>
+
+<file path=ppt/slides/slide20.xml><?xml version="1.0" encoding="utf-8"?>
 <p:sld xmlns:a="http://schemas.openxmlformats.org/drawingml/2006/main" xmlns:r="http://schemas.openxmlformats.org/officeDocument/2006/relationships" xmlns:p="http://schemas.openxmlformats.org/presentationml/2006/main">
   <p:cSld>
     <p:spTree>
@@ -9125,7 +10549,7 @@
 </p:sld>
 </file>
 
-<file path=ppt/slides/slide18.xml><?xml version="1.0" encoding="utf-8"?>
+<file path=ppt/slides/slide21.xml><?xml version="1.0" encoding="utf-8"?>
 <p:sld xmlns:a="http://schemas.openxmlformats.org/drawingml/2006/main" xmlns:r="http://schemas.openxmlformats.org/officeDocument/2006/relationships" xmlns:p="http://schemas.openxmlformats.org/presentationml/2006/main">
   <p:cSld>
     <p:spTree>
@@ -9338,7 +10762,7 @@
 </p:sld>
 </file>
 
-<file path=ppt/slides/slide19.xml><?xml version="1.0" encoding="utf-8"?>
+<file path=ppt/slides/slide22.xml><?xml version="1.0" encoding="utf-8"?>
 <p:sld xmlns:a="http://schemas.openxmlformats.org/drawingml/2006/main" xmlns:r="http://schemas.openxmlformats.org/officeDocument/2006/relationships" xmlns:p="http://schemas.openxmlformats.org/presentationml/2006/main">
   <p:cSld>
     <p:spTree>
@@ -9907,658 +11331,7 @@
 </p:sld>
 </file>
 
-<file path=ppt/slides/slide2.xml><?xml version="1.0" encoding="utf-8"?>
-<p:sld xmlns:a="http://schemas.openxmlformats.org/drawingml/2006/main" xmlns:r="http://schemas.openxmlformats.org/officeDocument/2006/relationships" xmlns:p="http://schemas.openxmlformats.org/presentationml/2006/main">
-  <p:cSld>
-    <p:spTree>
-      <p:nvGrpSpPr>
-        <p:cNvPr id="1" name=""/>
-        <p:cNvGrpSpPr/>
-        <p:nvPr/>
-      </p:nvGrpSpPr>
-      <p:grpSpPr>
-        <a:xfrm>
-          <a:off x="0" y="0"/>
-          <a:ext cx="0" cy="0"/>
-          <a:chOff x="0" y="0"/>
-          <a:chExt cx="0" cy="0"/>
-        </a:xfrm>
-      </p:grpSpPr>
-      <p:sp>
-        <p:nvSpPr>
-          <p:cNvPr id="2" name="Titre 1">
-            <a:extLst>
-              <a:ext uri="{FF2B5EF4-FFF2-40B4-BE49-F238E27FC236}">
-                <a16:creationId xmlns:a16="http://schemas.microsoft.com/office/drawing/2014/main" xmlns="" id="{6AB1F110-FE64-49CD-8296-498E286E15CC}"/>
-              </a:ext>
-            </a:extLst>
-          </p:cNvPr>
-          <p:cNvSpPr>
-            <a:spLocks noGrp="1"/>
-          </p:cNvSpPr>
-          <p:nvPr>
-            <p:ph type="title"/>
-          </p:nvPr>
-        </p:nvSpPr>
-        <p:spPr>
-          <a:xfrm>
-            <a:off x="611560" y="411512"/>
-            <a:ext cx="8126040" cy="396001"/>
-          </a:xfrm>
-        </p:spPr>
-        <p:txBody>
-          <a:bodyPr/>
-          <a:lstStyle/>
-          <a:p>
-            <a:r>
-              <a:rPr lang="fr-FR" sz="1800">
-                <a:solidFill>
-                  <a:prstClr val="black"/>
-                </a:solidFill>
-              </a:rPr>
-              <a:t>SOMMAIRE</a:t>
-            </a:r>
-            <a:endParaRPr lang="fr-FR"/>
-          </a:p>
-        </p:txBody>
-      </p:sp>
-      <p:sp>
-        <p:nvSpPr>
-          <p:cNvPr id="3" name="Rectangle 2">
-            <a:extLst>
-              <a:ext uri="{FF2B5EF4-FFF2-40B4-BE49-F238E27FC236}">
-                <a16:creationId xmlns:a16="http://schemas.microsoft.com/office/drawing/2014/main" xmlns="" id="{70A39CEC-99B5-C7B5-B91D-4963573D9744}"/>
-              </a:ext>
-            </a:extLst>
-          </p:cNvPr>
-          <p:cNvSpPr/>
-          <p:nvPr/>
-        </p:nvSpPr>
-        <p:spPr>
-          <a:xfrm>
-            <a:off x="611560" y="979145"/>
-            <a:ext cx="6648615" cy="333976"/>
-          </a:xfrm>
-          <a:prstGeom prst="rect">
-            <a:avLst/>
-          </a:prstGeom>
-          <a:noFill/>
-          <a:ln w="19050">
-            <a:solidFill>
-              <a:srgbClr val="009597"/>
-            </a:solidFill>
-          </a:ln>
-          <a:effectLst/>
-        </p:spPr>
-        <p:style>
-          <a:lnRef idx="2">
-            <a:schemeClr val="accent1">
-              <a:shade val="50000"/>
-            </a:schemeClr>
-          </a:lnRef>
-          <a:fillRef idx="1">
-            <a:schemeClr val="accent1"/>
-          </a:fillRef>
-          <a:effectRef idx="0">
-            <a:schemeClr val="accent1"/>
-          </a:effectRef>
-          <a:fontRef idx="minor">
-            <a:schemeClr val="lt1"/>
-          </a:fontRef>
-        </p:style>
-        <p:txBody>
-          <a:bodyPr rtlCol="0" anchor="ctr"/>
-          <a:lstStyle/>
-          <a:p>
-            <a:pPr defTabSz="685688"/>
-            <a:r>
-              <a:rPr lang="fr-FR" sz="1200" dirty="0">
-                <a:solidFill>
-                  <a:prstClr val="black"/>
-                </a:solidFill>
-                <a:latin typeface="Arial"/>
-              </a:rPr>
-              <a:t>Introduction générale</a:t>
-            </a:r>
-          </a:p>
-        </p:txBody>
-      </p:sp>
-      <p:sp>
-        <p:nvSpPr>
-          <p:cNvPr id="12" name="Rectangle 11">
-            <a:extLst>
-              <a:ext uri="{FF2B5EF4-FFF2-40B4-BE49-F238E27FC236}">
-                <a16:creationId xmlns:a16="http://schemas.microsoft.com/office/drawing/2014/main" xmlns="" id="{FD98A81F-A23A-429E-0187-6FED333327F7}"/>
-              </a:ext>
-            </a:extLst>
-          </p:cNvPr>
-          <p:cNvSpPr/>
-          <p:nvPr/>
-        </p:nvSpPr>
-        <p:spPr>
-          <a:xfrm>
-            <a:off x="611559" y="1317765"/>
-            <a:ext cx="6648615" cy="333976"/>
-          </a:xfrm>
-          <a:prstGeom prst="rect">
-            <a:avLst/>
-          </a:prstGeom>
-          <a:noFill/>
-          <a:ln w="19050">
-            <a:solidFill>
-              <a:srgbClr val="009597"/>
-            </a:solidFill>
-          </a:ln>
-          <a:effectLst/>
-        </p:spPr>
-        <p:style>
-          <a:lnRef idx="2">
-            <a:schemeClr val="accent1">
-              <a:shade val="50000"/>
-            </a:schemeClr>
-          </a:lnRef>
-          <a:fillRef idx="1">
-            <a:schemeClr val="accent1"/>
-          </a:fillRef>
-          <a:effectRef idx="0">
-            <a:schemeClr val="accent1"/>
-          </a:effectRef>
-          <a:fontRef idx="minor">
-            <a:schemeClr val="lt1"/>
-          </a:fontRef>
-        </p:style>
-        <p:txBody>
-          <a:bodyPr rtlCol="0" anchor="ctr"/>
-          <a:lstStyle/>
-          <a:p>
-            <a:pPr defTabSz="685688"/>
-            <a:endParaRPr lang="fr-FR" sz="1200" dirty="0">
-              <a:solidFill>
-                <a:prstClr val="black"/>
-              </a:solidFill>
-              <a:latin typeface="Arial"/>
-            </a:endParaRPr>
-          </a:p>
-        </p:txBody>
-      </p:sp>
-      <p:sp>
-        <p:nvSpPr>
-          <p:cNvPr id="13" name="Rectangle 12">
-            <a:extLst>
-              <a:ext uri="{FF2B5EF4-FFF2-40B4-BE49-F238E27FC236}">
-                <a16:creationId xmlns:a16="http://schemas.microsoft.com/office/drawing/2014/main" xmlns="" id="{89F38DEE-C0D1-C5B5-9CC8-3A2E72374D2B}"/>
-              </a:ext>
-            </a:extLst>
-          </p:cNvPr>
-          <p:cNvSpPr/>
-          <p:nvPr/>
-        </p:nvSpPr>
-        <p:spPr>
-          <a:xfrm>
-            <a:off x="611560" y="1656385"/>
-            <a:ext cx="6648615" cy="333976"/>
-          </a:xfrm>
-          <a:prstGeom prst="rect">
-            <a:avLst/>
-          </a:prstGeom>
-          <a:noFill/>
-          <a:ln w="19050">
-            <a:solidFill>
-              <a:srgbClr val="009597"/>
-            </a:solidFill>
-          </a:ln>
-          <a:effectLst/>
-        </p:spPr>
-        <p:style>
-          <a:lnRef idx="2">
-            <a:schemeClr val="accent1">
-              <a:shade val="50000"/>
-            </a:schemeClr>
-          </a:lnRef>
-          <a:fillRef idx="1">
-            <a:schemeClr val="accent1"/>
-          </a:fillRef>
-          <a:effectRef idx="0">
-            <a:schemeClr val="accent1"/>
-          </a:effectRef>
-          <a:fontRef idx="minor">
-            <a:schemeClr val="lt1"/>
-          </a:fontRef>
-        </p:style>
-        <p:txBody>
-          <a:bodyPr rtlCol="0" anchor="ctr"/>
-          <a:lstStyle/>
-          <a:p>
-            <a:pPr defTabSz="685688"/>
-            <a:endParaRPr lang="fr-FR" sz="1200" dirty="0">
-              <a:solidFill>
-                <a:prstClr val="black"/>
-              </a:solidFill>
-              <a:latin typeface="Arial"/>
-            </a:endParaRPr>
-          </a:p>
-        </p:txBody>
-      </p:sp>
-      <p:sp>
-        <p:nvSpPr>
-          <p:cNvPr id="14" name="Rectangle 13">
-            <a:extLst>
-              <a:ext uri="{FF2B5EF4-FFF2-40B4-BE49-F238E27FC236}">
-                <a16:creationId xmlns:a16="http://schemas.microsoft.com/office/drawing/2014/main" xmlns="" id="{8B8EA3F1-0CA6-FFC7-7762-86C299DA319D}"/>
-              </a:ext>
-            </a:extLst>
-          </p:cNvPr>
-          <p:cNvSpPr/>
-          <p:nvPr/>
-        </p:nvSpPr>
-        <p:spPr>
-          <a:xfrm>
-            <a:off x="611559" y="1995005"/>
-            <a:ext cx="6648615" cy="333976"/>
-          </a:xfrm>
-          <a:prstGeom prst="rect">
-            <a:avLst/>
-          </a:prstGeom>
-          <a:noFill/>
-          <a:ln w="19050">
-            <a:solidFill>
-              <a:srgbClr val="009597"/>
-            </a:solidFill>
-          </a:ln>
-          <a:effectLst/>
-        </p:spPr>
-        <p:style>
-          <a:lnRef idx="2">
-            <a:schemeClr val="accent1">
-              <a:shade val="50000"/>
-            </a:schemeClr>
-          </a:lnRef>
-          <a:fillRef idx="1">
-            <a:schemeClr val="accent1"/>
-          </a:fillRef>
-          <a:effectRef idx="0">
-            <a:schemeClr val="accent1"/>
-          </a:effectRef>
-          <a:fontRef idx="minor">
-            <a:schemeClr val="lt1"/>
-          </a:fontRef>
-        </p:style>
-        <p:txBody>
-          <a:bodyPr rtlCol="0" anchor="ctr"/>
-          <a:lstStyle/>
-          <a:p>
-            <a:pPr defTabSz="685688"/>
-            <a:endParaRPr lang="fr-FR" sz="1200" dirty="0">
-              <a:solidFill>
-                <a:prstClr val="black"/>
-              </a:solidFill>
-              <a:latin typeface="Arial"/>
-            </a:endParaRPr>
-          </a:p>
-        </p:txBody>
-      </p:sp>
-      <p:sp>
-        <p:nvSpPr>
-          <p:cNvPr id="15" name="Rectangle 14">
-            <a:extLst>
-              <a:ext uri="{FF2B5EF4-FFF2-40B4-BE49-F238E27FC236}">
-                <a16:creationId xmlns:a16="http://schemas.microsoft.com/office/drawing/2014/main" xmlns="" id="{8334A4F0-30FE-B2EF-E9FE-BBAC3F2B00BC}"/>
-              </a:ext>
-            </a:extLst>
-          </p:cNvPr>
-          <p:cNvSpPr/>
-          <p:nvPr/>
-        </p:nvSpPr>
-        <p:spPr>
-          <a:xfrm>
-            <a:off x="611560" y="2328981"/>
-            <a:ext cx="6648615" cy="333976"/>
-          </a:xfrm>
-          <a:prstGeom prst="rect">
-            <a:avLst/>
-          </a:prstGeom>
-          <a:noFill/>
-          <a:ln w="19050">
-            <a:solidFill>
-              <a:srgbClr val="009597"/>
-            </a:solidFill>
-          </a:ln>
-          <a:effectLst/>
-        </p:spPr>
-        <p:style>
-          <a:lnRef idx="2">
-            <a:schemeClr val="accent1">
-              <a:shade val="50000"/>
-            </a:schemeClr>
-          </a:lnRef>
-          <a:fillRef idx="1">
-            <a:schemeClr val="accent1"/>
-          </a:fillRef>
-          <a:effectRef idx="0">
-            <a:schemeClr val="accent1"/>
-          </a:effectRef>
-          <a:fontRef idx="minor">
-            <a:schemeClr val="lt1"/>
-          </a:fontRef>
-        </p:style>
-        <p:txBody>
-          <a:bodyPr rtlCol="0" anchor="ctr"/>
-          <a:lstStyle/>
-          <a:p>
-            <a:pPr defTabSz="685688"/>
-            <a:endParaRPr lang="fr-FR" sz="1200" dirty="0">
-              <a:solidFill>
-                <a:prstClr val="black"/>
-              </a:solidFill>
-              <a:latin typeface="Arial"/>
-            </a:endParaRPr>
-          </a:p>
-        </p:txBody>
-      </p:sp>
-      <p:sp>
-        <p:nvSpPr>
-          <p:cNvPr id="16" name="Rectangle 15">
-            <a:extLst>
-              <a:ext uri="{FF2B5EF4-FFF2-40B4-BE49-F238E27FC236}">
-                <a16:creationId xmlns:a16="http://schemas.microsoft.com/office/drawing/2014/main" xmlns="" id="{31EC0D59-0F42-7CAC-BE8A-DAB3BAC88F68}"/>
-              </a:ext>
-            </a:extLst>
-          </p:cNvPr>
-          <p:cNvSpPr/>
-          <p:nvPr/>
-        </p:nvSpPr>
-        <p:spPr>
-          <a:xfrm>
-            <a:off x="611559" y="2667601"/>
-            <a:ext cx="6648615" cy="333976"/>
-          </a:xfrm>
-          <a:prstGeom prst="rect">
-            <a:avLst/>
-          </a:prstGeom>
-          <a:noFill/>
-          <a:ln w="19050">
-            <a:solidFill>
-              <a:srgbClr val="009597"/>
-            </a:solidFill>
-          </a:ln>
-          <a:effectLst/>
-        </p:spPr>
-        <p:style>
-          <a:lnRef idx="2">
-            <a:schemeClr val="accent1">
-              <a:shade val="50000"/>
-            </a:schemeClr>
-          </a:lnRef>
-          <a:fillRef idx="1">
-            <a:schemeClr val="accent1"/>
-          </a:fillRef>
-          <a:effectRef idx="0">
-            <a:schemeClr val="accent1"/>
-          </a:effectRef>
-          <a:fontRef idx="minor">
-            <a:schemeClr val="lt1"/>
-          </a:fontRef>
-        </p:style>
-        <p:txBody>
-          <a:bodyPr rtlCol="0" anchor="ctr"/>
-          <a:lstStyle/>
-          <a:p>
-            <a:pPr defTabSz="685688"/>
-            <a:endParaRPr lang="fr-FR" sz="1200" dirty="0">
-              <a:solidFill>
-                <a:prstClr val="black"/>
-              </a:solidFill>
-              <a:latin typeface="Arial"/>
-            </a:endParaRPr>
-          </a:p>
-        </p:txBody>
-      </p:sp>
-      <p:sp>
-        <p:nvSpPr>
-          <p:cNvPr id="17" name="Rectangle 16">
-            <a:extLst>
-              <a:ext uri="{FF2B5EF4-FFF2-40B4-BE49-F238E27FC236}">
-                <a16:creationId xmlns:a16="http://schemas.microsoft.com/office/drawing/2014/main" xmlns="" id="{A7771E4C-E8F9-B4FE-32D9-7BBC82F8777B}"/>
-              </a:ext>
-            </a:extLst>
-          </p:cNvPr>
-          <p:cNvSpPr/>
-          <p:nvPr/>
-        </p:nvSpPr>
-        <p:spPr>
-          <a:xfrm>
-            <a:off x="611560" y="3006221"/>
-            <a:ext cx="6648615" cy="333976"/>
-          </a:xfrm>
-          <a:prstGeom prst="rect">
-            <a:avLst/>
-          </a:prstGeom>
-          <a:noFill/>
-          <a:ln w="19050">
-            <a:solidFill>
-              <a:srgbClr val="009597"/>
-            </a:solidFill>
-          </a:ln>
-          <a:effectLst/>
-        </p:spPr>
-        <p:style>
-          <a:lnRef idx="2">
-            <a:schemeClr val="accent1">
-              <a:shade val="50000"/>
-            </a:schemeClr>
-          </a:lnRef>
-          <a:fillRef idx="1">
-            <a:schemeClr val="accent1"/>
-          </a:fillRef>
-          <a:effectRef idx="0">
-            <a:schemeClr val="accent1"/>
-          </a:effectRef>
-          <a:fontRef idx="minor">
-            <a:schemeClr val="lt1"/>
-          </a:fontRef>
-        </p:style>
-        <p:txBody>
-          <a:bodyPr rtlCol="0" anchor="ctr"/>
-          <a:lstStyle/>
-          <a:p>
-            <a:pPr defTabSz="685688"/>
-            <a:endParaRPr lang="fr-FR" sz="1200" dirty="0">
-              <a:solidFill>
-                <a:prstClr val="black"/>
-              </a:solidFill>
-              <a:latin typeface="Arial"/>
-            </a:endParaRPr>
-          </a:p>
-        </p:txBody>
-      </p:sp>
-      <p:sp>
-        <p:nvSpPr>
-          <p:cNvPr id="18" name="Rectangle 17">
-            <a:extLst>
-              <a:ext uri="{FF2B5EF4-FFF2-40B4-BE49-F238E27FC236}">
-                <a16:creationId xmlns:a16="http://schemas.microsoft.com/office/drawing/2014/main" xmlns="" id="{222A0EE3-5405-3631-A456-96007F33153A}"/>
-              </a:ext>
-            </a:extLst>
-          </p:cNvPr>
-          <p:cNvSpPr/>
-          <p:nvPr/>
-        </p:nvSpPr>
-        <p:spPr>
-          <a:xfrm>
-            <a:off x="611558" y="4016044"/>
-            <a:ext cx="6648615" cy="333976"/>
-          </a:xfrm>
-          <a:prstGeom prst="rect">
-            <a:avLst/>
-          </a:prstGeom>
-          <a:noFill/>
-          <a:ln w="19050">
-            <a:solidFill>
-              <a:srgbClr val="009597"/>
-            </a:solidFill>
-          </a:ln>
-          <a:effectLst/>
-        </p:spPr>
-        <p:style>
-          <a:lnRef idx="2">
-            <a:schemeClr val="accent1">
-              <a:shade val="50000"/>
-            </a:schemeClr>
-          </a:lnRef>
-          <a:fillRef idx="1">
-            <a:schemeClr val="accent1"/>
-          </a:fillRef>
-          <a:effectRef idx="0">
-            <a:schemeClr val="accent1"/>
-          </a:effectRef>
-          <a:fontRef idx="minor">
-            <a:schemeClr val="lt1"/>
-          </a:fontRef>
-        </p:style>
-        <p:txBody>
-          <a:bodyPr rtlCol="0" anchor="ctr"/>
-          <a:lstStyle/>
-          <a:p>
-            <a:pPr defTabSz="685688"/>
-            <a:endParaRPr lang="fr-FR" sz="1200" dirty="0">
-              <a:solidFill>
-                <a:prstClr val="black"/>
-              </a:solidFill>
-              <a:latin typeface="Arial"/>
-            </a:endParaRPr>
-          </a:p>
-        </p:txBody>
-      </p:sp>
-      <p:sp>
-        <p:nvSpPr>
-          <p:cNvPr id="19" name="Rectangle 18">
-            <a:extLst>
-              <a:ext uri="{FF2B5EF4-FFF2-40B4-BE49-F238E27FC236}">
-                <a16:creationId xmlns:a16="http://schemas.microsoft.com/office/drawing/2014/main" xmlns="" id="{432BE386-F984-6382-FF17-8EC3F97F3DCD}"/>
-              </a:ext>
-            </a:extLst>
-          </p:cNvPr>
-          <p:cNvSpPr/>
-          <p:nvPr/>
-        </p:nvSpPr>
-        <p:spPr>
-          <a:xfrm>
-            <a:off x="611558" y="3338804"/>
-            <a:ext cx="6648615" cy="333976"/>
-          </a:xfrm>
-          <a:prstGeom prst="rect">
-            <a:avLst/>
-          </a:prstGeom>
-          <a:noFill/>
-          <a:ln w="19050">
-            <a:solidFill>
-              <a:srgbClr val="009597"/>
-            </a:solidFill>
-          </a:ln>
-          <a:effectLst/>
-        </p:spPr>
-        <p:style>
-          <a:lnRef idx="2">
-            <a:schemeClr val="accent1">
-              <a:shade val="50000"/>
-            </a:schemeClr>
-          </a:lnRef>
-          <a:fillRef idx="1">
-            <a:schemeClr val="accent1"/>
-          </a:fillRef>
-          <a:effectRef idx="0">
-            <a:schemeClr val="accent1"/>
-          </a:effectRef>
-          <a:fontRef idx="minor">
-            <a:schemeClr val="lt1"/>
-          </a:fontRef>
-        </p:style>
-        <p:txBody>
-          <a:bodyPr rtlCol="0" anchor="ctr"/>
-          <a:lstStyle/>
-          <a:p>
-            <a:pPr defTabSz="685688"/>
-            <a:endParaRPr lang="fr-FR" sz="1200" dirty="0">
-              <a:solidFill>
-                <a:prstClr val="black"/>
-              </a:solidFill>
-              <a:latin typeface="Arial"/>
-            </a:endParaRPr>
-          </a:p>
-        </p:txBody>
-      </p:sp>
-      <p:sp>
-        <p:nvSpPr>
-          <p:cNvPr id="20" name="Rectangle 19">
-            <a:extLst>
-              <a:ext uri="{FF2B5EF4-FFF2-40B4-BE49-F238E27FC236}">
-                <a16:creationId xmlns:a16="http://schemas.microsoft.com/office/drawing/2014/main" xmlns="" id="{4DAFCC9B-58C0-BEB0-C3FC-20C3364925F4}"/>
-              </a:ext>
-            </a:extLst>
-          </p:cNvPr>
-          <p:cNvSpPr/>
-          <p:nvPr/>
-        </p:nvSpPr>
-        <p:spPr>
-          <a:xfrm>
-            <a:off x="611556" y="3677424"/>
-            <a:ext cx="6648615" cy="333976"/>
-          </a:xfrm>
-          <a:prstGeom prst="rect">
-            <a:avLst/>
-          </a:prstGeom>
-          <a:noFill/>
-          <a:ln w="19050">
-            <a:solidFill>
-              <a:srgbClr val="009597"/>
-            </a:solidFill>
-          </a:ln>
-          <a:effectLst/>
-        </p:spPr>
-        <p:style>
-          <a:lnRef idx="2">
-            <a:schemeClr val="accent1">
-              <a:shade val="50000"/>
-            </a:schemeClr>
-          </a:lnRef>
-          <a:fillRef idx="1">
-            <a:schemeClr val="accent1"/>
-          </a:fillRef>
-          <a:effectRef idx="0">
-            <a:schemeClr val="accent1"/>
-          </a:effectRef>
-          <a:fontRef idx="minor">
-            <a:schemeClr val="lt1"/>
-          </a:fontRef>
-        </p:style>
-        <p:txBody>
-          <a:bodyPr rtlCol="0" anchor="ctr"/>
-          <a:lstStyle/>
-          <a:p>
-            <a:pPr defTabSz="685688"/>
-            <a:endParaRPr lang="fr-FR" sz="1200" dirty="0">
-              <a:solidFill>
-                <a:prstClr val="black"/>
-              </a:solidFill>
-              <a:latin typeface="Arial"/>
-            </a:endParaRPr>
-          </a:p>
-        </p:txBody>
-      </p:sp>
-    </p:spTree>
-    <p:extLst>
-      <p:ext uri="{BB962C8B-B14F-4D97-AF65-F5344CB8AC3E}">
-        <p14:creationId xmlns:p14="http://schemas.microsoft.com/office/powerpoint/2010/main" val="2783188770"/>
-      </p:ext>
-    </p:extLst>
-  </p:cSld>
-  <p:clrMapOvr>
-    <a:masterClrMapping/>
-  </p:clrMapOvr>
-</p:sld>
-</file>
-
-<file path=ppt/slides/slide20.xml><?xml version="1.0" encoding="utf-8"?>
+<file path=ppt/slides/slide23.xml><?xml version="1.0" encoding="utf-8"?>
 <p:sld xmlns:a="http://schemas.openxmlformats.org/drawingml/2006/main" xmlns:r="http://schemas.openxmlformats.org/officeDocument/2006/relationships" xmlns:p="http://schemas.openxmlformats.org/presentationml/2006/main">
   <p:cSld>
     <p:spTree>
@@ -10817,7 +11590,7 @@
 </p:sld>
 </file>
 
-<file path=ppt/slides/slide21.xml><?xml version="1.0" encoding="utf-8"?>
+<file path=ppt/slides/slide24.xml><?xml version="1.0" encoding="utf-8"?>
 <p:sld xmlns:a="http://schemas.openxmlformats.org/drawingml/2006/main" xmlns:r="http://schemas.openxmlformats.org/officeDocument/2006/relationships" xmlns:p="http://schemas.openxmlformats.org/presentationml/2006/main">
   <p:cSld>
     <p:spTree>
@@ -11979,865 +12752,6 @@
 </p:sld>
 </file>
 
-<file path=ppt/slides/slide22.xml><?xml version="1.0" encoding="utf-8"?>
-<p:sld xmlns:a="http://schemas.openxmlformats.org/drawingml/2006/main" xmlns:r="http://schemas.openxmlformats.org/officeDocument/2006/relationships" xmlns:p="http://schemas.openxmlformats.org/presentationml/2006/main">
-  <p:cSld>
-    <p:spTree>
-      <p:nvGrpSpPr>
-        <p:cNvPr id="1" name=""/>
-        <p:cNvGrpSpPr/>
-        <p:nvPr/>
-      </p:nvGrpSpPr>
-      <p:grpSpPr>
-        <a:xfrm>
-          <a:off x="0" y="0"/>
-          <a:ext cx="0" cy="0"/>
-          <a:chOff x="0" y="0"/>
-          <a:chExt cx="0" cy="0"/>
-        </a:xfrm>
-      </p:grpSpPr>
-      <p:sp>
-        <p:nvSpPr>
-          <p:cNvPr id="2" name="Titre 1"/>
-          <p:cNvSpPr>
-            <a:spLocks noGrp="1"/>
-          </p:cNvSpPr>
-          <p:nvPr>
-            <p:ph type="title"/>
-          </p:nvPr>
-        </p:nvSpPr>
-        <p:spPr/>
-        <p:txBody>
-          <a:bodyPr/>
-          <a:lstStyle/>
-          <a:p>
-            <a:r>
-              <a:rPr lang="fr-FR" sz="2400" dirty="0"/>
-              <a:t>Sécurité dans la CD et le </a:t>
-            </a:r>
-            <a:r>
-              <a:rPr lang="fr-FR" sz="2400" dirty="0" err="1"/>
-              <a:t>GitOps</a:t>
-            </a:r>
-            <a:r>
-              <a:rPr lang="fr-FR" sz="2400" dirty="0"/>
-              <a:t>.</a:t>
-            </a:r>
-            <a:br>
-              <a:rPr lang="fr-FR" sz="2400" dirty="0"/>
-            </a:br>
-            <a:r>
-              <a:rPr lang="fr-FR" sz="1800" dirty="0"/>
-              <a:t>Sécurisation des </a:t>
-            </a:r>
-            <a:r>
-              <a:rPr lang="fr-FR" sz="1800" dirty="0" err="1"/>
-              <a:t>manifests</a:t>
-            </a:r>
-            <a:r>
-              <a:rPr lang="fr-FR" sz="1800" dirty="0"/>
-              <a:t> et configurations</a:t>
-            </a:r>
-          </a:p>
-        </p:txBody>
-      </p:sp>
-      <p:sp>
-        <p:nvSpPr>
-          <p:cNvPr id="3" name="Espace réservé du contenu 2"/>
-          <p:cNvSpPr>
-            <a:spLocks noGrp="1"/>
-          </p:cNvSpPr>
-          <p:nvPr>
-            <p:ph idx="1"/>
-          </p:nvPr>
-        </p:nvSpPr>
-        <p:spPr>
-          <a:xfrm>
-            <a:off x="421900" y="1143000"/>
-            <a:ext cx="8569700" cy="3357232"/>
-          </a:xfrm>
-        </p:spPr>
-        <p:txBody>
-          <a:bodyPr>
-            <a:noAutofit/>
-          </a:bodyPr>
-          <a:lstStyle/>
-          <a:p>
-            <a:r>
-              <a:rPr lang="fr-FR" sz="1200" b="1" dirty="0"/>
-              <a:t>Risques liés aux </a:t>
-            </a:r>
-            <a:r>
-              <a:rPr lang="fr-FR" sz="1200" b="1" dirty="0" err="1"/>
-              <a:t>manifests</a:t>
-            </a:r>
-            <a:endParaRPr lang="fr-FR" sz="1200" b="1" dirty="0"/>
-          </a:p>
-          <a:p>
-            <a:pPr lvl="1">
-              <a:buFont typeface="Arial" pitchFamily="34" charset="0"/>
-              <a:buChar char="•"/>
-            </a:pPr>
-            <a:r>
-              <a:rPr lang="fr-FR" sz="1200" dirty="0"/>
-              <a:t>Conteneur en </a:t>
-            </a:r>
-            <a:r>
-              <a:rPr lang="fr-FR" sz="1200" dirty="0" err="1"/>
-              <a:t>root</a:t>
-            </a:r>
-            <a:r>
-              <a:rPr lang="fr-FR" sz="1200" dirty="0"/>
-              <a:t>.</a:t>
-            </a:r>
-          </a:p>
-          <a:p>
-            <a:pPr lvl="1">
-              <a:buFont typeface="Arial" pitchFamily="34" charset="0"/>
-              <a:buChar char="•"/>
-            </a:pPr>
-            <a:r>
-              <a:rPr lang="fr-FR" sz="1200" dirty="0"/>
-              <a:t>Ressources illimitées.</a:t>
-            </a:r>
-          </a:p>
-          <a:p>
-            <a:pPr lvl="1">
-              <a:buFont typeface="Arial" pitchFamily="34" charset="0"/>
-              <a:buChar char="•"/>
-            </a:pPr>
-            <a:r>
-              <a:rPr lang="fr-FR" sz="1200" dirty="0"/>
-              <a:t>Volumes ou privilèges excessifs.</a:t>
-            </a:r>
-          </a:p>
-          <a:p>
-            <a:pPr lvl="1">
-              <a:buFont typeface="Arial" pitchFamily="34" charset="0"/>
-              <a:buChar char="•"/>
-            </a:pPr>
-            <a:r>
-              <a:rPr lang="fr-FR" sz="1200" dirty="0"/>
-              <a:t>Secrets en clair.</a:t>
-            </a:r>
-          </a:p>
-          <a:p>
-            <a:r>
-              <a:rPr lang="fr-FR" sz="1200" b="1" dirty="0"/>
-              <a:t>Bonnes pratiques</a:t>
-            </a:r>
-          </a:p>
-          <a:p>
-            <a:pPr lvl="1">
-              <a:buFont typeface="Arial" pitchFamily="34" charset="0"/>
-              <a:buChar char="•"/>
-            </a:pPr>
-            <a:r>
-              <a:rPr lang="fr-FR" sz="1200" dirty="0"/>
-              <a:t>Configuration déclarative </a:t>
-            </a:r>
-            <a:r>
-              <a:rPr lang="fr-FR" sz="1200" dirty="0" err="1"/>
-              <a:t>versionnée</a:t>
-            </a:r>
-            <a:r>
-              <a:rPr lang="fr-FR" sz="1200" dirty="0"/>
-              <a:t>.</a:t>
-            </a:r>
-          </a:p>
-          <a:p>
-            <a:pPr lvl="1">
-              <a:buFont typeface="Arial" pitchFamily="34" charset="0"/>
-              <a:buChar char="•"/>
-            </a:pPr>
-            <a:r>
-              <a:rPr lang="fr-FR" sz="1200" dirty="0"/>
-              <a:t>Séparation :</a:t>
-            </a:r>
-          </a:p>
-          <a:p>
-            <a:pPr lvl="2">
-              <a:buFont typeface="Arial" pitchFamily="34" charset="0"/>
-              <a:buChar char="•"/>
-            </a:pPr>
-            <a:r>
-              <a:rPr lang="fr-FR" sz="1200" dirty="0" err="1"/>
-              <a:t>manifests</a:t>
-            </a:r>
-            <a:r>
-              <a:rPr lang="fr-FR" sz="1200" dirty="0"/>
-              <a:t> applicatifs,</a:t>
-            </a:r>
-          </a:p>
-          <a:p>
-            <a:pPr lvl="2">
-              <a:buFont typeface="Arial" pitchFamily="34" charset="0"/>
-              <a:buChar char="•"/>
-            </a:pPr>
-            <a:r>
-              <a:rPr lang="fr-FR" sz="1200" dirty="0"/>
-              <a:t>secrets.</a:t>
-            </a:r>
-          </a:p>
-          <a:p>
-            <a:pPr lvl="1">
-              <a:buFont typeface="Arial" pitchFamily="34" charset="0"/>
-              <a:buChar char="•"/>
-            </a:pPr>
-            <a:r>
-              <a:rPr lang="fr-FR" sz="1200" dirty="0"/>
-              <a:t>Utilisation de :</a:t>
-            </a:r>
-          </a:p>
-          <a:p>
-            <a:pPr lvl="2">
-              <a:buFont typeface="Arial" pitchFamily="34" charset="0"/>
-              <a:buChar char="•"/>
-            </a:pPr>
-            <a:r>
-              <a:rPr lang="fr-FR" sz="1200" dirty="0"/>
-              <a:t>Secrets </a:t>
-            </a:r>
-            <a:r>
-              <a:rPr lang="fr-FR" sz="1200" dirty="0" err="1"/>
-              <a:t>Kubernetes</a:t>
-            </a:r>
-            <a:r>
-              <a:rPr lang="fr-FR" sz="1200" dirty="0"/>
-              <a:t>,</a:t>
-            </a:r>
-          </a:p>
-          <a:p>
-            <a:pPr lvl="2">
-              <a:buFont typeface="Arial" pitchFamily="34" charset="0"/>
-              <a:buChar char="•"/>
-            </a:pPr>
-            <a:r>
-              <a:rPr lang="fr-FR" sz="1200" dirty="0" err="1"/>
-              <a:t>Vault</a:t>
-            </a:r>
-            <a:r>
-              <a:rPr lang="fr-FR" sz="1200" dirty="0"/>
-              <a:t>,</a:t>
-            </a:r>
-          </a:p>
-          <a:p>
-            <a:pPr lvl="2">
-              <a:buFont typeface="Arial" pitchFamily="34" charset="0"/>
-              <a:buChar char="•"/>
-            </a:pPr>
-            <a:r>
-              <a:rPr lang="fr-FR" sz="1200" dirty="0" err="1"/>
-              <a:t>Sealed</a:t>
-            </a:r>
-            <a:r>
-              <a:rPr lang="fr-FR" sz="1200" dirty="0"/>
-              <a:t> Secrets.</a:t>
-            </a:r>
-          </a:p>
-          <a:p>
-            <a:pPr marL="0" indent="0">
-              <a:buNone/>
-            </a:pPr>
-            <a:r>
-              <a:rPr lang="fr-FR" sz="1200" dirty="0"/>
-              <a:t>👉 Un YAML est du </a:t>
-            </a:r>
-            <a:r>
-              <a:rPr lang="fr-FR" sz="1200" b="1" dirty="0"/>
-              <a:t>code exécutable</a:t>
-            </a:r>
-            <a:r>
-              <a:rPr lang="fr-FR" sz="1200" dirty="0"/>
-              <a:t> : il doit être sécurisé comme tel, un mauvais </a:t>
-            </a:r>
-            <a:r>
-              <a:rPr lang="fr-FR" sz="1200" dirty="0" err="1"/>
-              <a:t>manifest</a:t>
-            </a:r>
-            <a:r>
-              <a:rPr lang="fr-FR" sz="1200" dirty="0"/>
-              <a:t> peut être aussi dangereux qu’un mauvais code.</a:t>
-            </a:r>
-          </a:p>
-        </p:txBody>
-      </p:sp>
-    </p:spTree>
-    <p:extLst>
-      <p:ext uri="{BB962C8B-B14F-4D97-AF65-F5344CB8AC3E}">
-        <p14:creationId xmlns:p14="http://schemas.microsoft.com/office/powerpoint/2010/main" val="2398981835"/>
-      </p:ext>
-    </p:extLst>
-  </p:cSld>
-  <p:clrMapOvr>
-    <a:masterClrMapping/>
-  </p:clrMapOvr>
-</p:sld>
-</file>
-
-<file path=ppt/slides/slide23.xml><?xml version="1.0" encoding="utf-8"?>
-<p:sld xmlns:a="http://schemas.openxmlformats.org/drawingml/2006/main" xmlns:r="http://schemas.openxmlformats.org/officeDocument/2006/relationships" xmlns:p="http://schemas.openxmlformats.org/presentationml/2006/main">
-  <p:cSld>
-    <p:spTree>
-      <p:nvGrpSpPr>
-        <p:cNvPr id="1" name=""/>
-        <p:cNvGrpSpPr/>
-        <p:nvPr/>
-      </p:nvGrpSpPr>
-      <p:grpSpPr>
-        <a:xfrm>
-          <a:off x="0" y="0"/>
-          <a:ext cx="0" cy="0"/>
-          <a:chOff x="0" y="0"/>
-          <a:chExt cx="0" cy="0"/>
-        </a:xfrm>
-      </p:grpSpPr>
-      <p:sp>
-        <p:nvSpPr>
-          <p:cNvPr id="2" name="Titre 1"/>
-          <p:cNvSpPr>
-            <a:spLocks noGrp="1"/>
-          </p:cNvSpPr>
-          <p:nvPr>
-            <p:ph type="title"/>
-          </p:nvPr>
-        </p:nvSpPr>
-        <p:spPr/>
-        <p:txBody>
-          <a:bodyPr/>
-          <a:lstStyle/>
-          <a:p>
-            <a:r>
-              <a:rPr lang="fr-FR" sz="2400" dirty="0"/>
-              <a:t>Sécurité dans la CD et le </a:t>
-            </a:r>
-            <a:r>
-              <a:rPr lang="fr-FR" sz="2400" dirty="0" err="1"/>
-              <a:t>GitOps</a:t>
-            </a:r>
-            <a:r>
-              <a:rPr lang="fr-FR" sz="2400" dirty="0"/>
-              <a:t>.</a:t>
-            </a:r>
-            <a:br>
-              <a:rPr lang="fr-FR" sz="2400" dirty="0"/>
-            </a:br>
-            <a:r>
-              <a:rPr lang="fr-FR" sz="1800" dirty="0"/>
-              <a:t>Policy as Code dans la CD</a:t>
-            </a:r>
-          </a:p>
-        </p:txBody>
-      </p:sp>
-      <p:sp>
-        <p:nvSpPr>
-          <p:cNvPr id="3" name="Espace réservé du contenu 2"/>
-          <p:cNvSpPr>
-            <a:spLocks noGrp="1"/>
-          </p:cNvSpPr>
-          <p:nvPr>
-            <p:ph idx="1"/>
-          </p:nvPr>
-        </p:nvSpPr>
-        <p:spPr>
-          <a:xfrm>
-            <a:off x="406660" y="899160"/>
-            <a:ext cx="8569700" cy="3357232"/>
-          </a:xfrm>
-        </p:spPr>
-        <p:txBody>
-          <a:bodyPr>
-            <a:noAutofit/>
-          </a:bodyPr>
-          <a:lstStyle/>
-          <a:p>
-            <a:r>
-              <a:rPr lang="fr-FR" sz="1150" b="1" dirty="0"/>
-              <a:t>Qu’est-ce que le Policy as Code ?</a:t>
-            </a:r>
-          </a:p>
-          <a:p>
-            <a:pPr lvl="1">
-              <a:buFont typeface="Arial" pitchFamily="34" charset="0"/>
-              <a:buChar char="•"/>
-            </a:pPr>
-            <a:r>
-              <a:rPr lang="fr-FR" sz="1150" dirty="0"/>
-              <a:t>Des règles de sécurité exprimées :</a:t>
-            </a:r>
-          </a:p>
-          <a:p>
-            <a:pPr lvl="2">
-              <a:buFont typeface="Arial" pitchFamily="34" charset="0"/>
-              <a:buChar char="•"/>
-            </a:pPr>
-            <a:r>
-              <a:rPr lang="fr-FR" sz="1150" dirty="0"/>
-              <a:t>en code,</a:t>
-            </a:r>
-          </a:p>
-          <a:p>
-            <a:pPr lvl="2">
-              <a:buFont typeface="Arial" pitchFamily="34" charset="0"/>
-              <a:buChar char="•"/>
-            </a:pPr>
-            <a:r>
-              <a:rPr lang="fr-FR" sz="1150" dirty="0" err="1"/>
-              <a:t>versionnées</a:t>
-            </a:r>
-            <a:r>
-              <a:rPr lang="fr-FR" sz="1150" dirty="0"/>
-              <a:t>,</a:t>
-            </a:r>
-          </a:p>
-          <a:p>
-            <a:pPr lvl="2">
-              <a:buFont typeface="Arial" pitchFamily="34" charset="0"/>
-              <a:buChar char="•"/>
-            </a:pPr>
-            <a:r>
-              <a:rPr lang="fr-FR" sz="1150" dirty="0"/>
-              <a:t>exécutées automatiquement.</a:t>
-            </a:r>
-          </a:p>
-          <a:p>
-            <a:r>
-              <a:rPr lang="fr-FR" sz="1150" b="1" dirty="0"/>
-              <a:t>Outils principaux</a:t>
-            </a:r>
-          </a:p>
-          <a:p>
-            <a:pPr lvl="1">
-              <a:buFont typeface="Arial" pitchFamily="34" charset="0"/>
-              <a:buChar char="•"/>
-            </a:pPr>
-            <a:r>
-              <a:rPr lang="fr-FR" sz="1150" b="1" dirty="0"/>
-              <a:t>OPA (Open Policy Agent)</a:t>
-            </a:r>
-            <a:endParaRPr lang="fr-FR" sz="1150" dirty="0"/>
-          </a:p>
-          <a:p>
-            <a:pPr lvl="2">
-              <a:buFont typeface="Arial" pitchFamily="34" charset="0"/>
-              <a:buChar char="•"/>
-            </a:pPr>
-            <a:r>
-              <a:rPr lang="fr-FR" sz="1150" dirty="0"/>
-              <a:t>langage </a:t>
-            </a:r>
-            <a:r>
-              <a:rPr lang="fr-FR" sz="1150" dirty="0" err="1"/>
-              <a:t>Rego</a:t>
-            </a:r>
-            <a:r>
-              <a:rPr lang="fr-FR" sz="1150" dirty="0"/>
-              <a:t>,</a:t>
-            </a:r>
-          </a:p>
-          <a:p>
-            <a:pPr lvl="2">
-              <a:buFont typeface="Arial" pitchFamily="34" charset="0"/>
-              <a:buChar char="•"/>
-            </a:pPr>
-            <a:r>
-              <a:rPr lang="fr-FR" sz="1150" dirty="0"/>
-              <a:t>politiques transverses.</a:t>
-            </a:r>
-          </a:p>
-          <a:p>
-            <a:pPr lvl="1">
-              <a:buFont typeface="Arial" pitchFamily="34" charset="0"/>
-              <a:buChar char="•"/>
-            </a:pPr>
-            <a:r>
-              <a:rPr lang="fr-FR" sz="1150" b="1" dirty="0" err="1"/>
-              <a:t>Kyverno</a:t>
-            </a:r>
-            <a:endParaRPr lang="fr-FR" sz="1150" dirty="0"/>
-          </a:p>
-          <a:p>
-            <a:pPr lvl="2">
-              <a:buFont typeface="Arial" pitchFamily="34" charset="0"/>
-              <a:buChar char="•"/>
-            </a:pPr>
-            <a:r>
-              <a:rPr lang="fr-FR" sz="1150" dirty="0" err="1"/>
-              <a:t>policies</a:t>
-            </a:r>
-            <a:r>
-              <a:rPr lang="fr-FR" sz="1150" dirty="0"/>
-              <a:t> </a:t>
-            </a:r>
-            <a:r>
-              <a:rPr lang="fr-FR" sz="1150" dirty="0" err="1"/>
-              <a:t>Kubernetes</a:t>
-            </a:r>
-            <a:r>
-              <a:rPr lang="fr-FR" sz="1150" dirty="0"/>
-              <a:t> en YAML,</a:t>
-            </a:r>
-          </a:p>
-          <a:p>
-            <a:pPr lvl="2">
-              <a:buFont typeface="Arial" pitchFamily="34" charset="0"/>
-              <a:buChar char="•"/>
-            </a:pPr>
-            <a:r>
-              <a:rPr lang="fr-FR" sz="1150" dirty="0"/>
-              <a:t>lisibles par les équipes </a:t>
-            </a:r>
-            <a:r>
-              <a:rPr lang="fr-FR" sz="1150" dirty="0" err="1"/>
-              <a:t>Ops</a:t>
-            </a:r>
-            <a:r>
-              <a:rPr lang="fr-FR" sz="1150" dirty="0"/>
-              <a:t> &amp; Sec.</a:t>
-            </a:r>
-          </a:p>
-          <a:p>
-            <a:r>
-              <a:rPr lang="fr-FR" sz="1150" b="1" dirty="0"/>
-              <a:t>Exemples de politiques</a:t>
-            </a:r>
-          </a:p>
-          <a:p>
-            <a:pPr lvl="1">
-              <a:buFont typeface="Arial" pitchFamily="34" charset="0"/>
-              <a:buChar char="•"/>
-            </a:pPr>
-            <a:r>
-              <a:rPr lang="fr-FR" sz="1150" dirty="0"/>
-              <a:t>Images signées obligatoires.</a:t>
-            </a:r>
-          </a:p>
-          <a:p>
-            <a:pPr lvl="1">
-              <a:buFont typeface="Arial" pitchFamily="34" charset="0"/>
-              <a:buChar char="•"/>
-            </a:pPr>
-            <a:r>
-              <a:rPr lang="fr-FR" sz="1150" dirty="0"/>
-              <a:t>Interdiction du </a:t>
-            </a:r>
-            <a:r>
-              <a:rPr lang="fr-FR" sz="1150" dirty="0" err="1"/>
-              <a:t>root</a:t>
-            </a:r>
-            <a:r>
-              <a:rPr lang="fr-FR" sz="1150" dirty="0"/>
-              <a:t>.</a:t>
-            </a:r>
-          </a:p>
-          <a:p>
-            <a:pPr lvl="1">
-              <a:buFont typeface="Arial" pitchFamily="34" charset="0"/>
-              <a:buChar char="•"/>
-            </a:pPr>
-            <a:r>
-              <a:rPr lang="fr-FR" sz="1150" dirty="0"/>
-              <a:t>Limites CPU/mémoire requises.</a:t>
-            </a:r>
-          </a:p>
-          <a:p>
-            <a:pPr lvl="1">
-              <a:buFont typeface="Arial" pitchFamily="34" charset="0"/>
-              <a:buChar char="•"/>
-            </a:pPr>
-            <a:r>
-              <a:rPr lang="fr-FR" sz="1150" dirty="0" err="1"/>
-              <a:t>Namespaces</a:t>
-            </a:r>
-            <a:r>
-              <a:rPr lang="fr-FR" sz="1150" dirty="0"/>
-              <a:t> autorisés uniquement.</a:t>
-            </a:r>
-          </a:p>
-          <a:p>
-            <a:pPr marL="0" indent="0">
-              <a:buNone/>
-            </a:pPr>
-            <a:r>
-              <a:rPr lang="fr-FR" sz="1150" b="1" dirty="0"/>
-              <a:t> </a:t>
-            </a:r>
-            <a:r>
-              <a:rPr lang="fr-FR" sz="1150" dirty="0"/>
-              <a:t>Le Policy as Code remplace les contrôles humains par des garde-fous automatiques.</a:t>
-            </a:r>
-          </a:p>
-        </p:txBody>
-      </p:sp>
-    </p:spTree>
-    <p:extLst>
-      <p:ext uri="{BB962C8B-B14F-4D97-AF65-F5344CB8AC3E}">
-        <p14:creationId xmlns:p14="http://schemas.microsoft.com/office/powerpoint/2010/main" val="3468660499"/>
-      </p:ext>
-    </p:extLst>
-  </p:cSld>
-  <p:clrMapOvr>
-    <a:masterClrMapping/>
-  </p:clrMapOvr>
-</p:sld>
-</file>
-
-<file path=ppt/slides/slide24.xml><?xml version="1.0" encoding="utf-8"?>
-<p:sld xmlns:a="http://schemas.openxmlformats.org/drawingml/2006/main" xmlns:r="http://schemas.openxmlformats.org/officeDocument/2006/relationships" xmlns:p="http://schemas.openxmlformats.org/presentationml/2006/main">
-  <p:cSld>
-    <p:spTree>
-      <p:nvGrpSpPr>
-        <p:cNvPr id="1" name=""/>
-        <p:cNvGrpSpPr/>
-        <p:nvPr/>
-      </p:nvGrpSpPr>
-      <p:grpSpPr>
-        <a:xfrm>
-          <a:off x="0" y="0"/>
-          <a:ext cx="0" cy="0"/>
-          <a:chOff x="0" y="0"/>
-          <a:chExt cx="0" cy="0"/>
-        </a:xfrm>
-      </p:grpSpPr>
-      <p:sp>
-        <p:nvSpPr>
-          <p:cNvPr id="2" name="Titre 1"/>
-          <p:cNvSpPr>
-            <a:spLocks noGrp="1"/>
-          </p:cNvSpPr>
-          <p:nvPr>
-            <p:ph type="title"/>
-          </p:nvPr>
-        </p:nvSpPr>
-        <p:spPr/>
-        <p:txBody>
-          <a:bodyPr/>
-          <a:lstStyle/>
-          <a:p>
-            <a:r>
-              <a:rPr lang="fr-FR" sz="2400" dirty="0"/>
-              <a:t>Sécurité dans la CD et le </a:t>
-            </a:r>
-            <a:r>
-              <a:rPr lang="fr-FR" sz="2400" dirty="0" err="1"/>
-              <a:t>GitOps</a:t>
-            </a:r>
-            <a:r>
-              <a:rPr lang="fr-FR" sz="2400" dirty="0"/>
-              <a:t>.</a:t>
-            </a:r>
-            <a:r>
-              <a:rPr lang="fr-FR" sz="3600" dirty="0"/>
-              <a:t/>
-            </a:r>
-            <a:br>
-              <a:rPr lang="fr-FR" sz="3600" dirty="0"/>
-            </a:br>
-            <a:r>
-              <a:rPr lang="fr-FR" sz="1800" dirty="0"/>
-              <a:t>Sécurité des environnements et des accès</a:t>
-            </a:r>
-          </a:p>
-        </p:txBody>
-      </p:sp>
-      <p:sp>
-        <p:nvSpPr>
-          <p:cNvPr id="3" name="Espace réservé du contenu 2"/>
-          <p:cNvSpPr>
-            <a:spLocks noGrp="1"/>
-          </p:cNvSpPr>
-          <p:nvPr>
-            <p:ph idx="1"/>
-          </p:nvPr>
-        </p:nvSpPr>
-        <p:spPr>
-          <a:xfrm>
-            <a:off x="673360" y="1043940"/>
-            <a:ext cx="8047211" cy="3632738"/>
-          </a:xfrm>
-        </p:spPr>
-        <p:txBody>
-          <a:bodyPr/>
-          <a:lstStyle/>
-          <a:p>
-            <a:r>
-              <a:rPr lang="fr-FR" b="1" dirty="0"/>
-              <a:t>Contrôle des accès</a:t>
-            </a:r>
-          </a:p>
-          <a:p>
-            <a:pPr lvl="1"/>
-            <a:r>
-              <a:rPr lang="fr-FR" dirty="0"/>
-              <a:t>Git :</a:t>
-            </a:r>
-          </a:p>
-          <a:p>
-            <a:pPr lvl="2"/>
-            <a:r>
-              <a:rPr lang="fr-FR" dirty="0"/>
-              <a:t>branches protégées,</a:t>
-            </a:r>
-          </a:p>
-          <a:p>
-            <a:pPr lvl="2"/>
-            <a:r>
-              <a:rPr lang="fr-FR" dirty="0" err="1"/>
-              <a:t>Merge</a:t>
-            </a:r>
-            <a:r>
-              <a:rPr lang="fr-FR" dirty="0"/>
-              <a:t> </a:t>
-            </a:r>
-            <a:r>
-              <a:rPr lang="fr-FR" dirty="0" err="1"/>
-              <a:t>Requests</a:t>
-            </a:r>
-            <a:r>
-              <a:rPr lang="fr-FR" dirty="0"/>
-              <a:t>,</a:t>
-            </a:r>
-          </a:p>
-          <a:p>
-            <a:pPr lvl="2"/>
-            <a:r>
-              <a:rPr lang="fr-FR" dirty="0"/>
-              <a:t>approbations obligatoires.</a:t>
-            </a:r>
-          </a:p>
-          <a:p>
-            <a:pPr lvl="1"/>
-            <a:r>
-              <a:rPr lang="fr-FR" dirty="0"/>
-              <a:t>Plateforme :</a:t>
-            </a:r>
-          </a:p>
-          <a:p>
-            <a:pPr lvl="2"/>
-            <a:r>
-              <a:rPr lang="fr-FR" dirty="0"/>
-              <a:t>RBAC </a:t>
-            </a:r>
-            <a:r>
-              <a:rPr lang="fr-FR" dirty="0" err="1"/>
-              <a:t>Kubernetes</a:t>
-            </a:r>
-            <a:r>
-              <a:rPr lang="fr-FR" dirty="0"/>
-              <a:t>,</a:t>
-            </a:r>
-          </a:p>
-          <a:p>
-            <a:pPr lvl="2"/>
-            <a:r>
-              <a:rPr lang="fr-FR" dirty="0"/>
-              <a:t>rôles </a:t>
-            </a:r>
-            <a:r>
-              <a:rPr lang="fr-FR" dirty="0" err="1"/>
-              <a:t>ArgoCD</a:t>
-            </a:r>
-            <a:r>
-              <a:rPr lang="fr-FR" dirty="0"/>
-              <a:t>,</a:t>
-            </a:r>
-          </a:p>
-          <a:p>
-            <a:pPr lvl="2"/>
-            <a:r>
-              <a:rPr lang="fr-FR" dirty="0"/>
-              <a:t>séparation des environnements.</a:t>
-            </a:r>
-          </a:p>
-          <a:p>
-            <a:r>
-              <a:rPr lang="fr-FR" b="1" dirty="0"/>
-              <a:t>Séparation des responsabilités</a:t>
-            </a:r>
-          </a:p>
-          <a:p>
-            <a:pPr lvl="1"/>
-            <a:r>
-              <a:rPr lang="fr-FR" dirty="0" err="1"/>
-              <a:t>Dev</a:t>
-            </a:r>
-            <a:r>
-              <a:rPr lang="fr-FR" dirty="0"/>
-              <a:t> : code applicatif.</a:t>
-            </a:r>
-          </a:p>
-          <a:p>
-            <a:pPr lvl="1"/>
-            <a:r>
-              <a:rPr lang="fr-FR" dirty="0" err="1"/>
-              <a:t>Ops</a:t>
-            </a:r>
-            <a:r>
-              <a:rPr lang="fr-FR" dirty="0"/>
-              <a:t> : plateforme.</a:t>
-            </a:r>
-          </a:p>
-          <a:p>
-            <a:pPr lvl="1"/>
-            <a:r>
-              <a:rPr lang="fr-FR" dirty="0"/>
-              <a:t>Sec : règles et contrôles.</a:t>
-            </a:r>
-          </a:p>
-          <a:p>
-            <a:pPr lvl="1"/>
-            <a:endParaRPr lang="fr-FR" dirty="0"/>
-          </a:p>
-          <a:p>
-            <a:pPr marL="0" indent="0">
-              <a:buNone/>
-            </a:pPr>
-            <a:r>
-              <a:rPr lang="fr-FR" dirty="0"/>
-              <a:t>👉 Mise en œuvre du </a:t>
-            </a:r>
-            <a:r>
-              <a:rPr lang="fr-FR" b="1" dirty="0"/>
-              <a:t>least </a:t>
-            </a:r>
-            <a:r>
-              <a:rPr lang="fr-FR" b="1" dirty="0" err="1"/>
-              <a:t>privilege</a:t>
-            </a:r>
-            <a:r>
-              <a:rPr lang="fr-FR" dirty="0"/>
-              <a:t>.</a:t>
-            </a:r>
-          </a:p>
-          <a:p>
-            <a:pPr marL="0" indent="0">
-              <a:buNone/>
-            </a:pPr>
-            <a:r>
-              <a:rPr lang="fr-FR" dirty="0"/>
-              <a:t>👉 La sécurité de la CD est autant </a:t>
-            </a:r>
-            <a:r>
-              <a:rPr lang="fr-FR" b="1" dirty="0"/>
-              <a:t>organisationnelle que technique</a:t>
-            </a:r>
-            <a:endParaRPr lang="fr-FR" dirty="0"/>
-          </a:p>
-        </p:txBody>
-      </p:sp>
-    </p:spTree>
-    <p:extLst>
-      <p:ext uri="{BB962C8B-B14F-4D97-AF65-F5344CB8AC3E}">
-        <p14:creationId xmlns:p14="http://schemas.microsoft.com/office/powerpoint/2010/main" val="3472233323"/>
-      </p:ext>
-    </p:extLst>
-  </p:cSld>
-  <p:clrMapOvr>
-    <a:masterClrMapping/>
-  </p:clrMapOvr>
-</p:sld>
-</file>
-
 <file path=ppt/slides/slide25.xml><?xml version="1.0" encoding="utf-8"?>
 <p:sld xmlns:a="http://schemas.openxmlformats.org/drawingml/2006/main" xmlns:r="http://schemas.openxmlformats.org/officeDocument/2006/relationships" xmlns:p="http://schemas.openxmlformats.org/presentationml/2006/main">
   <p:cSld>
@@ -12882,6 +12796,865 @@
               <a:rPr lang="fr-FR" sz="2400" dirty="0"/>
               <a:t>.</a:t>
             </a:r>
+            <a:br>
+              <a:rPr lang="fr-FR" sz="2400" dirty="0"/>
+            </a:br>
+            <a:r>
+              <a:rPr lang="fr-FR" sz="1800" dirty="0"/>
+              <a:t>Sécurisation des </a:t>
+            </a:r>
+            <a:r>
+              <a:rPr lang="fr-FR" sz="1800" dirty="0" err="1"/>
+              <a:t>manifests</a:t>
+            </a:r>
+            <a:r>
+              <a:rPr lang="fr-FR" sz="1800" dirty="0"/>
+              <a:t> et configurations</a:t>
+            </a:r>
+          </a:p>
+        </p:txBody>
+      </p:sp>
+      <p:sp>
+        <p:nvSpPr>
+          <p:cNvPr id="3" name="Espace réservé du contenu 2"/>
+          <p:cNvSpPr>
+            <a:spLocks noGrp="1"/>
+          </p:cNvSpPr>
+          <p:nvPr>
+            <p:ph idx="1"/>
+          </p:nvPr>
+        </p:nvSpPr>
+        <p:spPr>
+          <a:xfrm>
+            <a:off x="421900" y="1143000"/>
+            <a:ext cx="8569700" cy="3357232"/>
+          </a:xfrm>
+        </p:spPr>
+        <p:txBody>
+          <a:bodyPr>
+            <a:noAutofit/>
+          </a:bodyPr>
+          <a:lstStyle/>
+          <a:p>
+            <a:r>
+              <a:rPr lang="fr-FR" sz="1200" b="1" dirty="0"/>
+              <a:t>Risques liés aux </a:t>
+            </a:r>
+            <a:r>
+              <a:rPr lang="fr-FR" sz="1200" b="1" dirty="0" err="1"/>
+              <a:t>manifests</a:t>
+            </a:r>
+            <a:endParaRPr lang="fr-FR" sz="1200" b="1" dirty="0"/>
+          </a:p>
+          <a:p>
+            <a:pPr lvl="1">
+              <a:buFont typeface="Arial" pitchFamily="34" charset="0"/>
+              <a:buChar char="•"/>
+            </a:pPr>
+            <a:r>
+              <a:rPr lang="fr-FR" sz="1200" dirty="0"/>
+              <a:t>Conteneur en </a:t>
+            </a:r>
+            <a:r>
+              <a:rPr lang="fr-FR" sz="1200" dirty="0" err="1"/>
+              <a:t>root</a:t>
+            </a:r>
+            <a:r>
+              <a:rPr lang="fr-FR" sz="1200" dirty="0"/>
+              <a:t>.</a:t>
+            </a:r>
+          </a:p>
+          <a:p>
+            <a:pPr lvl="1">
+              <a:buFont typeface="Arial" pitchFamily="34" charset="0"/>
+              <a:buChar char="•"/>
+            </a:pPr>
+            <a:r>
+              <a:rPr lang="fr-FR" sz="1200" dirty="0"/>
+              <a:t>Ressources illimitées.</a:t>
+            </a:r>
+          </a:p>
+          <a:p>
+            <a:pPr lvl="1">
+              <a:buFont typeface="Arial" pitchFamily="34" charset="0"/>
+              <a:buChar char="•"/>
+            </a:pPr>
+            <a:r>
+              <a:rPr lang="fr-FR" sz="1200" dirty="0"/>
+              <a:t>Volumes ou privilèges excessifs.</a:t>
+            </a:r>
+          </a:p>
+          <a:p>
+            <a:pPr lvl="1">
+              <a:buFont typeface="Arial" pitchFamily="34" charset="0"/>
+              <a:buChar char="•"/>
+            </a:pPr>
+            <a:r>
+              <a:rPr lang="fr-FR" sz="1200" dirty="0"/>
+              <a:t>Secrets en clair.</a:t>
+            </a:r>
+          </a:p>
+          <a:p>
+            <a:r>
+              <a:rPr lang="fr-FR" sz="1200" b="1" dirty="0"/>
+              <a:t>Bonnes pratiques</a:t>
+            </a:r>
+          </a:p>
+          <a:p>
+            <a:pPr lvl="1">
+              <a:buFont typeface="Arial" pitchFamily="34" charset="0"/>
+              <a:buChar char="•"/>
+            </a:pPr>
+            <a:r>
+              <a:rPr lang="fr-FR" sz="1200" dirty="0"/>
+              <a:t>Configuration déclarative </a:t>
+            </a:r>
+            <a:r>
+              <a:rPr lang="fr-FR" sz="1200" dirty="0" err="1"/>
+              <a:t>versionnée</a:t>
+            </a:r>
+            <a:r>
+              <a:rPr lang="fr-FR" sz="1200" dirty="0"/>
+              <a:t>.</a:t>
+            </a:r>
+          </a:p>
+          <a:p>
+            <a:pPr lvl="1">
+              <a:buFont typeface="Arial" pitchFamily="34" charset="0"/>
+              <a:buChar char="•"/>
+            </a:pPr>
+            <a:r>
+              <a:rPr lang="fr-FR" sz="1200" dirty="0"/>
+              <a:t>Séparation :</a:t>
+            </a:r>
+          </a:p>
+          <a:p>
+            <a:pPr lvl="2">
+              <a:buFont typeface="Arial" pitchFamily="34" charset="0"/>
+              <a:buChar char="•"/>
+            </a:pPr>
+            <a:r>
+              <a:rPr lang="fr-FR" sz="1200" dirty="0" err="1"/>
+              <a:t>manifests</a:t>
+            </a:r>
+            <a:r>
+              <a:rPr lang="fr-FR" sz="1200" dirty="0"/>
+              <a:t> applicatifs,</a:t>
+            </a:r>
+          </a:p>
+          <a:p>
+            <a:pPr lvl="2">
+              <a:buFont typeface="Arial" pitchFamily="34" charset="0"/>
+              <a:buChar char="•"/>
+            </a:pPr>
+            <a:r>
+              <a:rPr lang="fr-FR" sz="1200" dirty="0"/>
+              <a:t>secrets.</a:t>
+            </a:r>
+          </a:p>
+          <a:p>
+            <a:pPr lvl="1">
+              <a:buFont typeface="Arial" pitchFamily="34" charset="0"/>
+              <a:buChar char="•"/>
+            </a:pPr>
+            <a:r>
+              <a:rPr lang="fr-FR" sz="1200" dirty="0"/>
+              <a:t>Utilisation de :</a:t>
+            </a:r>
+          </a:p>
+          <a:p>
+            <a:pPr lvl="2">
+              <a:buFont typeface="Arial" pitchFamily="34" charset="0"/>
+              <a:buChar char="•"/>
+            </a:pPr>
+            <a:r>
+              <a:rPr lang="fr-FR" sz="1200" dirty="0"/>
+              <a:t>Secrets </a:t>
+            </a:r>
+            <a:r>
+              <a:rPr lang="fr-FR" sz="1200" dirty="0" err="1"/>
+              <a:t>Kubernetes</a:t>
+            </a:r>
+            <a:r>
+              <a:rPr lang="fr-FR" sz="1200" dirty="0"/>
+              <a:t>,</a:t>
+            </a:r>
+          </a:p>
+          <a:p>
+            <a:pPr lvl="2">
+              <a:buFont typeface="Arial" pitchFamily="34" charset="0"/>
+              <a:buChar char="•"/>
+            </a:pPr>
+            <a:r>
+              <a:rPr lang="fr-FR" sz="1200" dirty="0" err="1"/>
+              <a:t>Vault</a:t>
+            </a:r>
+            <a:r>
+              <a:rPr lang="fr-FR" sz="1200" dirty="0"/>
+              <a:t>,</a:t>
+            </a:r>
+          </a:p>
+          <a:p>
+            <a:pPr lvl="2">
+              <a:buFont typeface="Arial" pitchFamily="34" charset="0"/>
+              <a:buChar char="•"/>
+            </a:pPr>
+            <a:r>
+              <a:rPr lang="fr-FR" sz="1200" dirty="0" err="1"/>
+              <a:t>Sealed</a:t>
+            </a:r>
+            <a:r>
+              <a:rPr lang="fr-FR" sz="1200" dirty="0"/>
+              <a:t> Secrets.</a:t>
+            </a:r>
+          </a:p>
+          <a:p>
+            <a:pPr marL="0" indent="0">
+              <a:buNone/>
+            </a:pPr>
+            <a:r>
+              <a:rPr lang="fr-FR" sz="1200" dirty="0"/>
+              <a:t>👉 Un YAML est du </a:t>
+            </a:r>
+            <a:r>
+              <a:rPr lang="fr-FR" sz="1200" b="1" dirty="0"/>
+              <a:t>code exécutable</a:t>
+            </a:r>
+            <a:r>
+              <a:rPr lang="fr-FR" sz="1200" dirty="0"/>
+              <a:t> : il doit être sécurisé comme tel, un mauvais </a:t>
+            </a:r>
+            <a:r>
+              <a:rPr lang="fr-FR" sz="1200" dirty="0" err="1"/>
+              <a:t>manifest</a:t>
+            </a:r>
+            <a:r>
+              <a:rPr lang="fr-FR" sz="1200" dirty="0"/>
+              <a:t> peut être aussi dangereux qu’un mauvais code.</a:t>
+            </a:r>
+          </a:p>
+        </p:txBody>
+      </p:sp>
+    </p:spTree>
+    <p:extLst>
+      <p:ext uri="{BB962C8B-B14F-4D97-AF65-F5344CB8AC3E}">
+        <p14:creationId xmlns:p14="http://schemas.microsoft.com/office/powerpoint/2010/main" val="2398981835"/>
+      </p:ext>
+    </p:extLst>
+  </p:cSld>
+  <p:clrMapOvr>
+    <a:masterClrMapping/>
+  </p:clrMapOvr>
+</p:sld>
+</file>
+
+<file path=ppt/slides/slide26.xml><?xml version="1.0" encoding="utf-8"?>
+<p:sld xmlns:a="http://schemas.openxmlformats.org/drawingml/2006/main" xmlns:r="http://schemas.openxmlformats.org/officeDocument/2006/relationships" xmlns:p="http://schemas.openxmlformats.org/presentationml/2006/main">
+  <p:cSld>
+    <p:spTree>
+      <p:nvGrpSpPr>
+        <p:cNvPr id="1" name=""/>
+        <p:cNvGrpSpPr/>
+        <p:nvPr/>
+      </p:nvGrpSpPr>
+      <p:grpSpPr>
+        <a:xfrm>
+          <a:off x="0" y="0"/>
+          <a:ext cx="0" cy="0"/>
+          <a:chOff x="0" y="0"/>
+          <a:chExt cx="0" cy="0"/>
+        </a:xfrm>
+      </p:grpSpPr>
+      <p:sp>
+        <p:nvSpPr>
+          <p:cNvPr id="2" name="Titre 1"/>
+          <p:cNvSpPr>
+            <a:spLocks noGrp="1"/>
+          </p:cNvSpPr>
+          <p:nvPr>
+            <p:ph type="title"/>
+          </p:nvPr>
+        </p:nvSpPr>
+        <p:spPr/>
+        <p:txBody>
+          <a:bodyPr/>
+          <a:lstStyle/>
+          <a:p>
+            <a:r>
+              <a:rPr lang="fr-FR" sz="2400" dirty="0"/>
+              <a:t>Sécurité dans la CD et le </a:t>
+            </a:r>
+            <a:r>
+              <a:rPr lang="fr-FR" sz="2400" dirty="0" err="1"/>
+              <a:t>GitOps</a:t>
+            </a:r>
+            <a:r>
+              <a:rPr lang="fr-FR" sz="2400" dirty="0"/>
+              <a:t>.</a:t>
+            </a:r>
+            <a:br>
+              <a:rPr lang="fr-FR" sz="2400" dirty="0"/>
+            </a:br>
+            <a:r>
+              <a:rPr lang="fr-FR" sz="1800" dirty="0"/>
+              <a:t>Policy as Code dans la CD</a:t>
+            </a:r>
+          </a:p>
+        </p:txBody>
+      </p:sp>
+      <p:sp>
+        <p:nvSpPr>
+          <p:cNvPr id="3" name="Espace réservé du contenu 2"/>
+          <p:cNvSpPr>
+            <a:spLocks noGrp="1"/>
+          </p:cNvSpPr>
+          <p:nvPr>
+            <p:ph idx="1"/>
+          </p:nvPr>
+        </p:nvSpPr>
+        <p:spPr>
+          <a:xfrm>
+            <a:off x="406660" y="899160"/>
+            <a:ext cx="8569700" cy="3357232"/>
+          </a:xfrm>
+        </p:spPr>
+        <p:txBody>
+          <a:bodyPr>
+            <a:noAutofit/>
+          </a:bodyPr>
+          <a:lstStyle/>
+          <a:p>
+            <a:r>
+              <a:rPr lang="fr-FR" sz="1150" b="1" dirty="0"/>
+              <a:t>Qu’est-ce que le Policy as Code ?</a:t>
+            </a:r>
+          </a:p>
+          <a:p>
+            <a:pPr lvl="1">
+              <a:buFont typeface="Arial" pitchFamily="34" charset="0"/>
+              <a:buChar char="•"/>
+            </a:pPr>
+            <a:r>
+              <a:rPr lang="fr-FR" sz="1150" dirty="0"/>
+              <a:t>Des règles de sécurité exprimées :</a:t>
+            </a:r>
+          </a:p>
+          <a:p>
+            <a:pPr lvl="2">
+              <a:buFont typeface="Arial" pitchFamily="34" charset="0"/>
+              <a:buChar char="•"/>
+            </a:pPr>
+            <a:r>
+              <a:rPr lang="fr-FR" sz="1150" dirty="0"/>
+              <a:t>en code,</a:t>
+            </a:r>
+          </a:p>
+          <a:p>
+            <a:pPr lvl="2">
+              <a:buFont typeface="Arial" pitchFamily="34" charset="0"/>
+              <a:buChar char="•"/>
+            </a:pPr>
+            <a:r>
+              <a:rPr lang="fr-FR" sz="1150" dirty="0" err="1"/>
+              <a:t>versionnées</a:t>
+            </a:r>
+            <a:r>
+              <a:rPr lang="fr-FR" sz="1150" dirty="0"/>
+              <a:t>,</a:t>
+            </a:r>
+          </a:p>
+          <a:p>
+            <a:pPr lvl="2">
+              <a:buFont typeface="Arial" pitchFamily="34" charset="0"/>
+              <a:buChar char="•"/>
+            </a:pPr>
+            <a:r>
+              <a:rPr lang="fr-FR" sz="1150" dirty="0"/>
+              <a:t>exécutées automatiquement.</a:t>
+            </a:r>
+          </a:p>
+          <a:p>
+            <a:r>
+              <a:rPr lang="fr-FR" sz="1150" b="1" dirty="0"/>
+              <a:t>Outils principaux</a:t>
+            </a:r>
+          </a:p>
+          <a:p>
+            <a:pPr lvl="1">
+              <a:buFont typeface="Arial" pitchFamily="34" charset="0"/>
+              <a:buChar char="•"/>
+            </a:pPr>
+            <a:r>
+              <a:rPr lang="fr-FR" sz="1150" b="1" dirty="0"/>
+              <a:t>OPA (Open Policy Agent)</a:t>
+            </a:r>
+            <a:endParaRPr lang="fr-FR" sz="1150" dirty="0"/>
+          </a:p>
+          <a:p>
+            <a:pPr lvl="2">
+              <a:buFont typeface="Arial" pitchFamily="34" charset="0"/>
+              <a:buChar char="•"/>
+            </a:pPr>
+            <a:r>
+              <a:rPr lang="fr-FR" sz="1150" dirty="0"/>
+              <a:t>langage </a:t>
+            </a:r>
+            <a:r>
+              <a:rPr lang="fr-FR" sz="1150" dirty="0" err="1"/>
+              <a:t>Rego</a:t>
+            </a:r>
+            <a:r>
+              <a:rPr lang="fr-FR" sz="1150" dirty="0"/>
+              <a:t>,</a:t>
+            </a:r>
+          </a:p>
+          <a:p>
+            <a:pPr lvl="2">
+              <a:buFont typeface="Arial" pitchFamily="34" charset="0"/>
+              <a:buChar char="•"/>
+            </a:pPr>
+            <a:r>
+              <a:rPr lang="fr-FR" sz="1150" dirty="0"/>
+              <a:t>politiques transverses.</a:t>
+            </a:r>
+          </a:p>
+          <a:p>
+            <a:pPr lvl="1">
+              <a:buFont typeface="Arial" pitchFamily="34" charset="0"/>
+              <a:buChar char="•"/>
+            </a:pPr>
+            <a:r>
+              <a:rPr lang="fr-FR" sz="1150" b="1" dirty="0" err="1"/>
+              <a:t>Kyverno</a:t>
+            </a:r>
+            <a:endParaRPr lang="fr-FR" sz="1150" dirty="0"/>
+          </a:p>
+          <a:p>
+            <a:pPr lvl="2">
+              <a:buFont typeface="Arial" pitchFamily="34" charset="0"/>
+              <a:buChar char="•"/>
+            </a:pPr>
+            <a:r>
+              <a:rPr lang="fr-FR" sz="1150" dirty="0" err="1"/>
+              <a:t>policies</a:t>
+            </a:r>
+            <a:r>
+              <a:rPr lang="fr-FR" sz="1150" dirty="0"/>
+              <a:t> </a:t>
+            </a:r>
+            <a:r>
+              <a:rPr lang="fr-FR" sz="1150" dirty="0" err="1"/>
+              <a:t>Kubernetes</a:t>
+            </a:r>
+            <a:r>
+              <a:rPr lang="fr-FR" sz="1150" dirty="0"/>
+              <a:t> en YAML,</a:t>
+            </a:r>
+          </a:p>
+          <a:p>
+            <a:pPr lvl="2">
+              <a:buFont typeface="Arial" pitchFamily="34" charset="0"/>
+              <a:buChar char="•"/>
+            </a:pPr>
+            <a:r>
+              <a:rPr lang="fr-FR" sz="1150" dirty="0"/>
+              <a:t>lisibles par les équipes </a:t>
+            </a:r>
+            <a:r>
+              <a:rPr lang="fr-FR" sz="1150" dirty="0" err="1"/>
+              <a:t>Ops</a:t>
+            </a:r>
+            <a:r>
+              <a:rPr lang="fr-FR" sz="1150" dirty="0"/>
+              <a:t> &amp; Sec.</a:t>
+            </a:r>
+          </a:p>
+          <a:p>
+            <a:r>
+              <a:rPr lang="fr-FR" sz="1150" b="1" dirty="0"/>
+              <a:t>Exemples de politiques</a:t>
+            </a:r>
+          </a:p>
+          <a:p>
+            <a:pPr lvl="1">
+              <a:buFont typeface="Arial" pitchFamily="34" charset="0"/>
+              <a:buChar char="•"/>
+            </a:pPr>
+            <a:r>
+              <a:rPr lang="fr-FR" sz="1150" dirty="0"/>
+              <a:t>Images signées obligatoires.</a:t>
+            </a:r>
+          </a:p>
+          <a:p>
+            <a:pPr lvl="1">
+              <a:buFont typeface="Arial" pitchFamily="34" charset="0"/>
+              <a:buChar char="•"/>
+            </a:pPr>
+            <a:r>
+              <a:rPr lang="fr-FR" sz="1150" dirty="0"/>
+              <a:t>Interdiction du </a:t>
+            </a:r>
+            <a:r>
+              <a:rPr lang="fr-FR" sz="1150" dirty="0" err="1"/>
+              <a:t>root</a:t>
+            </a:r>
+            <a:r>
+              <a:rPr lang="fr-FR" sz="1150" dirty="0"/>
+              <a:t>.</a:t>
+            </a:r>
+          </a:p>
+          <a:p>
+            <a:pPr lvl="1">
+              <a:buFont typeface="Arial" pitchFamily="34" charset="0"/>
+              <a:buChar char="•"/>
+            </a:pPr>
+            <a:r>
+              <a:rPr lang="fr-FR" sz="1150" dirty="0"/>
+              <a:t>Limites CPU/mémoire requises.</a:t>
+            </a:r>
+          </a:p>
+          <a:p>
+            <a:pPr lvl="1">
+              <a:buFont typeface="Arial" pitchFamily="34" charset="0"/>
+              <a:buChar char="•"/>
+            </a:pPr>
+            <a:r>
+              <a:rPr lang="fr-FR" sz="1150" dirty="0" err="1"/>
+              <a:t>Namespaces</a:t>
+            </a:r>
+            <a:r>
+              <a:rPr lang="fr-FR" sz="1150" dirty="0"/>
+              <a:t> autorisés uniquement.</a:t>
+            </a:r>
+          </a:p>
+          <a:p>
+            <a:pPr marL="0" indent="0">
+              <a:buNone/>
+            </a:pPr>
+            <a:r>
+              <a:rPr lang="fr-FR" sz="1150" b="1" dirty="0"/>
+              <a:t> </a:t>
+            </a:r>
+            <a:r>
+              <a:rPr lang="fr-FR" sz="1150" dirty="0"/>
+              <a:t>Le Policy as Code remplace les contrôles humains par des garde-fous automatiques.</a:t>
+            </a:r>
+          </a:p>
+        </p:txBody>
+      </p:sp>
+    </p:spTree>
+    <p:extLst>
+      <p:ext uri="{BB962C8B-B14F-4D97-AF65-F5344CB8AC3E}">
+        <p14:creationId xmlns:p14="http://schemas.microsoft.com/office/powerpoint/2010/main" val="3468660499"/>
+      </p:ext>
+    </p:extLst>
+  </p:cSld>
+  <p:clrMapOvr>
+    <a:masterClrMapping/>
+  </p:clrMapOvr>
+</p:sld>
+</file>
+
+<file path=ppt/slides/slide27.xml><?xml version="1.0" encoding="utf-8"?>
+<p:sld xmlns:a="http://schemas.openxmlformats.org/drawingml/2006/main" xmlns:r="http://schemas.openxmlformats.org/officeDocument/2006/relationships" xmlns:p="http://schemas.openxmlformats.org/presentationml/2006/main">
+  <p:cSld>
+    <p:spTree>
+      <p:nvGrpSpPr>
+        <p:cNvPr id="1" name=""/>
+        <p:cNvGrpSpPr/>
+        <p:nvPr/>
+      </p:nvGrpSpPr>
+      <p:grpSpPr>
+        <a:xfrm>
+          <a:off x="0" y="0"/>
+          <a:ext cx="0" cy="0"/>
+          <a:chOff x="0" y="0"/>
+          <a:chExt cx="0" cy="0"/>
+        </a:xfrm>
+      </p:grpSpPr>
+      <p:sp>
+        <p:nvSpPr>
+          <p:cNvPr id="2" name="Titre 1"/>
+          <p:cNvSpPr>
+            <a:spLocks noGrp="1"/>
+          </p:cNvSpPr>
+          <p:nvPr>
+            <p:ph type="title"/>
+          </p:nvPr>
+        </p:nvSpPr>
+        <p:spPr/>
+        <p:txBody>
+          <a:bodyPr/>
+          <a:lstStyle/>
+          <a:p>
+            <a:r>
+              <a:rPr lang="fr-FR" sz="2400" dirty="0"/>
+              <a:t>Sécurité dans la CD et le </a:t>
+            </a:r>
+            <a:r>
+              <a:rPr lang="fr-FR" sz="2400" dirty="0" err="1"/>
+              <a:t>GitOps</a:t>
+            </a:r>
+            <a:r>
+              <a:rPr lang="fr-FR" sz="2400" dirty="0"/>
+              <a:t>.</a:t>
+            </a:r>
+            <a:r>
+              <a:rPr lang="fr-FR" sz="3600" dirty="0"/>
+              <a:t/>
+            </a:r>
+            <a:br>
+              <a:rPr lang="fr-FR" sz="3600" dirty="0"/>
+            </a:br>
+            <a:r>
+              <a:rPr lang="fr-FR" sz="1800" dirty="0"/>
+              <a:t>Sécurité des environnements et des accès</a:t>
+            </a:r>
+          </a:p>
+        </p:txBody>
+      </p:sp>
+      <p:sp>
+        <p:nvSpPr>
+          <p:cNvPr id="3" name="Espace réservé du contenu 2"/>
+          <p:cNvSpPr>
+            <a:spLocks noGrp="1"/>
+          </p:cNvSpPr>
+          <p:nvPr>
+            <p:ph idx="1"/>
+          </p:nvPr>
+        </p:nvSpPr>
+        <p:spPr>
+          <a:xfrm>
+            <a:off x="673360" y="1043940"/>
+            <a:ext cx="8047211" cy="3632738"/>
+          </a:xfrm>
+        </p:spPr>
+        <p:txBody>
+          <a:bodyPr/>
+          <a:lstStyle/>
+          <a:p>
+            <a:r>
+              <a:rPr lang="fr-FR" b="1" dirty="0"/>
+              <a:t>Contrôle des accès</a:t>
+            </a:r>
+          </a:p>
+          <a:p>
+            <a:pPr lvl="1"/>
+            <a:r>
+              <a:rPr lang="fr-FR" dirty="0"/>
+              <a:t>Git :</a:t>
+            </a:r>
+          </a:p>
+          <a:p>
+            <a:pPr lvl="2"/>
+            <a:r>
+              <a:rPr lang="fr-FR" dirty="0"/>
+              <a:t>branches protégées,</a:t>
+            </a:r>
+          </a:p>
+          <a:p>
+            <a:pPr lvl="2"/>
+            <a:r>
+              <a:rPr lang="fr-FR" dirty="0" err="1"/>
+              <a:t>Merge</a:t>
+            </a:r>
+            <a:r>
+              <a:rPr lang="fr-FR" dirty="0"/>
+              <a:t> </a:t>
+            </a:r>
+            <a:r>
+              <a:rPr lang="fr-FR" dirty="0" err="1"/>
+              <a:t>Requests</a:t>
+            </a:r>
+            <a:r>
+              <a:rPr lang="fr-FR" dirty="0"/>
+              <a:t>,</a:t>
+            </a:r>
+          </a:p>
+          <a:p>
+            <a:pPr lvl="2"/>
+            <a:r>
+              <a:rPr lang="fr-FR" dirty="0"/>
+              <a:t>approbations obligatoires.</a:t>
+            </a:r>
+          </a:p>
+          <a:p>
+            <a:pPr lvl="1"/>
+            <a:r>
+              <a:rPr lang="fr-FR" dirty="0"/>
+              <a:t>Plateforme :</a:t>
+            </a:r>
+          </a:p>
+          <a:p>
+            <a:pPr lvl="2"/>
+            <a:r>
+              <a:rPr lang="fr-FR" dirty="0"/>
+              <a:t>RBAC </a:t>
+            </a:r>
+            <a:r>
+              <a:rPr lang="fr-FR" dirty="0" err="1"/>
+              <a:t>Kubernetes</a:t>
+            </a:r>
+            <a:r>
+              <a:rPr lang="fr-FR" dirty="0"/>
+              <a:t>,</a:t>
+            </a:r>
+          </a:p>
+          <a:p>
+            <a:pPr lvl="2"/>
+            <a:r>
+              <a:rPr lang="fr-FR" dirty="0"/>
+              <a:t>rôles </a:t>
+            </a:r>
+            <a:r>
+              <a:rPr lang="fr-FR" dirty="0" err="1"/>
+              <a:t>ArgoCD</a:t>
+            </a:r>
+            <a:r>
+              <a:rPr lang="fr-FR" dirty="0"/>
+              <a:t>,</a:t>
+            </a:r>
+          </a:p>
+          <a:p>
+            <a:pPr lvl="2"/>
+            <a:r>
+              <a:rPr lang="fr-FR" dirty="0"/>
+              <a:t>séparation des environnements.</a:t>
+            </a:r>
+          </a:p>
+          <a:p>
+            <a:r>
+              <a:rPr lang="fr-FR" b="1" dirty="0"/>
+              <a:t>Séparation des responsabilités</a:t>
+            </a:r>
+          </a:p>
+          <a:p>
+            <a:pPr lvl="1"/>
+            <a:r>
+              <a:rPr lang="fr-FR" dirty="0" err="1"/>
+              <a:t>Dev</a:t>
+            </a:r>
+            <a:r>
+              <a:rPr lang="fr-FR" dirty="0"/>
+              <a:t> : code applicatif.</a:t>
+            </a:r>
+          </a:p>
+          <a:p>
+            <a:pPr lvl="1"/>
+            <a:r>
+              <a:rPr lang="fr-FR" dirty="0" err="1"/>
+              <a:t>Ops</a:t>
+            </a:r>
+            <a:r>
+              <a:rPr lang="fr-FR" dirty="0"/>
+              <a:t> : plateforme.</a:t>
+            </a:r>
+          </a:p>
+          <a:p>
+            <a:pPr lvl="1"/>
+            <a:r>
+              <a:rPr lang="fr-FR" dirty="0"/>
+              <a:t>Sec : règles et contrôles.</a:t>
+            </a:r>
+          </a:p>
+          <a:p>
+            <a:pPr lvl="1"/>
+            <a:endParaRPr lang="fr-FR" dirty="0"/>
+          </a:p>
+          <a:p>
+            <a:pPr marL="0" indent="0">
+              <a:buNone/>
+            </a:pPr>
+            <a:r>
+              <a:rPr lang="fr-FR" dirty="0"/>
+              <a:t>👉 Mise en œuvre du </a:t>
+            </a:r>
+            <a:r>
+              <a:rPr lang="fr-FR" b="1" dirty="0"/>
+              <a:t>least </a:t>
+            </a:r>
+            <a:r>
+              <a:rPr lang="fr-FR" b="1" dirty="0" err="1"/>
+              <a:t>privilege</a:t>
+            </a:r>
+            <a:r>
+              <a:rPr lang="fr-FR" dirty="0"/>
+              <a:t>.</a:t>
+            </a:r>
+          </a:p>
+          <a:p>
+            <a:pPr marL="0" indent="0">
+              <a:buNone/>
+            </a:pPr>
+            <a:r>
+              <a:rPr lang="fr-FR" dirty="0"/>
+              <a:t>👉 La sécurité de la CD est autant </a:t>
+            </a:r>
+            <a:r>
+              <a:rPr lang="fr-FR" b="1" dirty="0"/>
+              <a:t>organisationnelle que technique</a:t>
+            </a:r>
+            <a:endParaRPr lang="fr-FR" dirty="0"/>
+          </a:p>
+        </p:txBody>
+      </p:sp>
+    </p:spTree>
+    <p:extLst>
+      <p:ext uri="{BB962C8B-B14F-4D97-AF65-F5344CB8AC3E}">
+        <p14:creationId xmlns:p14="http://schemas.microsoft.com/office/powerpoint/2010/main" val="3472233323"/>
+      </p:ext>
+    </p:extLst>
+  </p:cSld>
+  <p:clrMapOvr>
+    <a:masterClrMapping/>
+  </p:clrMapOvr>
+</p:sld>
+</file>
+
+<file path=ppt/slides/slide28.xml><?xml version="1.0" encoding="utf-8"?>
+<p:sld xmlns:a="http://schemas.openxmlformats.org/drawingml/2006/main" xmlns:r="http://schemas.openxmlformats.org/officeDocument/2006/relationships" xmlns:p="http://schemas.openxmlformats.org/presentationml/2006/main">
+  <p:cSld>
+    <p:spTree>
+      <p:nvGrpSpPr>
+        <p:cNvPr id="1" name=""/>
+        <p:cNvGrpSpPr/>
+        <p:nvPr/>
+      </p:nvGrpSpPr>
+      <p:grpSpPr>
+        <a:xfrm>
+          <a:off x="0" y="0"/>
+          <a:ext cx="0" cy="0"/>
+          <a:chOff x="0" y="0"/>
+          <a:chExt cx="0" cy="0"/>
+        </a:xfrm>
+      </p:grpSpPr>
+      <p:sp>
+        <p:nvSpPr>
+          <p:cNvPr id="2" name="Titre 1"/>
+          <p:cNvSpPr>
+            <a:spLocks noGrp="1"/>
+          </p:cNvSpPr>
+          <p:nvPr>
+            <p:ph type="title"/>
+          </p:nvPr>
+        </p:nvSpPr>
+        <p:spPr/>
+        <p:txBody>
+          <a:bodyPr/>
+          <a:lstStyle/>
+          <a:p>
+            <a:r>
+              <a:rPr lang="fr-FR" sz="2400" dirty="0"/>
+              <a:t>Sécurité dans la CD et le </a:t>
+            </a:r>
+            <a:r>
+              <a:rPr lang="fr-FR" sz="2400" dirty="0" err="1"/>
+              <a:t>GitOps</a:t>
+            </a:r>
+            <a:r>
+              <a:rPr lang="fr-FR" sz="2400" dirty="0"/>
+              <a:t>.</a:t>
+            </a:r>
             <a:r>
               <a:rPr lang="fr-FR" sz="3600" dirty="0"/>
               <a:t/>
@@ -13000,7 +13773,7 @@
 </p:sld>
 </file>
 
-<file path=ppt/slides/slide26.xml><?xml version="1.0" encoding="utf-8"?>
+<file path=ppt/slides/slide29.xml><?xml version="1.0" encoding="utf-8"?>
 <p:sld xmlns:a="http://schemas.openxmlformats.org/drawingml/2006/main" xmlns:r="http://schemas.openxmlformats.org/officeDocument/2006/relationships" xmlns:p="http://schemas.openxmlformats.org/presentationml/2006/main">
   <p:cSld>
     <p:spTree>
@@ -13519,7 +14292,7 @@
 </p:sld>
 </file>
 
-<file path=ppt/slides/slide27.xml><?xml version="1.0" encoding="utf-8"?>
+<file path=ppt/slides/slide3.xml><?xml version="1.0" encoding="utf-8"?>
 <p:sld xmlns:a="http://schemas.openxmlformats.org/drawingml/2006/main" xmlns:r="http://schemas.openxmlformats.org/officeDocument/2006/relationships" xmlns:p="http://schemas.openxmlformats.org/presentationml/2006/main">
   <p:cSld>
     <p:spTree>
@@ -13552,6 +14325,209 @@
           <a:lstStyle/>
           <a:p>
             <a:r>
+              <a:rPr lang="fr-FR" sz="2400" dirty="0" smtClean="0"/>
+              <a:t>Kit de démarrage</a:t>
+            </a:r>
+            <a:endParaRPr lang="fr-FR" sz="2400" dirty="0"/>
+          </a:p>
+        </p:txBody>
+      </p:sp>
+      <p:sp>
+        <p:nvSpPr>
+          <p:cNvPr id="3" name="Espace réservé du contenu 2"/>
+          <p:cNvSpPr>
+            <a:spLocks noGrp="1"/>
+          </p:cNvSpPr>
+          <p:nvPr>
+            <p:ph idx="1"/>
+          </p:nvPr>
+        </p:nvSpPr>
+        <p:spPr>
+          <a:xfrm>
+            <a:off x="177451" y="993643"/>
+            <a:ext cx="8047211" cy="3568458"/>
+          </a:xfrm>
+        </p:spPr>
+        <p:txBody>
+          <a:bodyPr>
+            <a:normAutofit/>
+          </a:bodyPr>
+          <a:lstStyle/>
+          <a:p>
+            <a:pPr marL="0" indent="0">
+              <a:buNone/>
+            </a:pPr>
+            <a:r>
+              <a:rPr lang="fr-FR" dirty="0" smtClean="0"/>
+              <a:t>GITLAB </a:t>
+            </a:r>
+            <a:r>
+              <a:rPr lang="fr-FR" dirty="0"/>
+              <a:t>: https://dvp-srv-gitlab.campus12avenue.fr/ </a:t>
+            </a:r>
+            <a:r>
+              <a:rPr lang="fr-FR" dirty="0" smtClean="0"/>
+              <a:t> 172.16.21.16</a:t>
+            </a:r>
+            <a:r>
+              <a:rPr lang="fr-FR" dirty="0"/>
+              <a:t> </a:t>
+            </a:r>
+            <a:endParaRPr lang="fr-FR" dirty="0" smtClean="0"/>
+          </a:p>
+          <a:p>
+            <a:pPr marL="0" indent="0">
+              <a:buNone/>
+            </a:pPr>
+            <a:endParaRPr lang="fr-FR" dirty="0" smtClean="0"/>
+          </a:p>
+          <a:p>
+            <a:pPr marL="0" indent="0">
+              <a:buNone/>
+            </a:pPr>
+            <a:r>
+              <a:rPr lang="fr-FR" dirty="0" smtClean="0"/>
+              <a:t>Chaque étudiant est identifié par un indice</a:t>
+            </a:r>
+          </a:p>
+          <a:p>
+            <a:pPr marL="0" indent="0">
+              <a:buNone/>
+            </a:pPr>
+            <a:r>
+              <a:rPr lang="fr-FR" dirty="0" smtClean="0"/>
+              <a:t>s01…s07 et le mot de passe bienvenue</a:t>
+            </a:r>
+          </a:p>
+          <a:p>
+            <a:pPr marL="0" indent="0">
+              <a:buNone/>
+            </a:pPr>
+            <a:endParaRPr lang="fr-FR" dirty="0"/>
+          </a:p>
+          <a:p>
+            <a:pPr marL="0" indent="0">
+              <a:buNone/>
+            </a:pPr>
+            <a:r>
+              <a:rPr lang="fr-FR" dirty="0" smtClean="0"/>
+              <a:t>Chaque étudiant </a:t>
+            </a:r>
+          </a:p>
+          <a:p>
+            <a:r>
+              <a:rPr lang="fr-FR" dirty="0" smtClean="0"/>
+              <a:t>Groupe </a:t>
+            </a:r>
+            <a:r>
+              <a:rPr lang="fr-FR" dirty="0"/>
+              <a:t>: tp-devops-2526/</a:t>
+            </a:r>
+            <a:r>
+              <a:rPr lang="fr-FR" dirty="0" err="1"/>
+              <a:t>sXX</a:t>
+            </a:r>
+            <a:endParaRPr lang="fr-FR" dirty="0"/>
+          </a:p>
+          <a:p>
+            <a:r>
+              <a:rPr lang="fr-FR" dirty="0" smtClean="0"/>
+              <a:t>3 Repos </a:t>
+            </a:r>
+            <a:r>
+              <a:rPr lang="fr-FR" dirty="0"/>
+              <a:t>:</a:t>
+            </a:r>
+          </a:p>
+          <a:p>
+            <a:pPr lvl="1"/>
+            <a:r>
+              <a:rPr lang="fr-FR" dirty="0"/>
+              <a:t>infra: https://dvp-srv-gitlab.campus12avenue.fr/tp-devops-2526/sXX/infra.git</a:t>
+            </a:r>
+          </a:p>
+          <a:p>
+            <a:pPr lvl="1"/>
+            <a:r>
+              <a:rPr lang="fr-FR" dirty="0"/>
+              <a:t>api: https://dvp-srv-gitlab.campus12avenue.fr/tp-devops-2526/sXX/api.git</a:t>
+            </a:r>
+          </a:p>
+          <a:p>
+            <a:pPr lvl="1"/>
+            <a:r>
+              <a:rPr lang="fr-FR" dirty="0" err="1"/>
+              <a:t>gitops</a:t>
+            </a:r>
+            <a:r>
+              <a:rPr lang="fr-FR" dirty="0"/>
+              <a:t>: https://dvp-srv-gitlab.campus12avenue.fr/tp-devops-2526/sXX/gitops.git</a:t>
+            </a:r>
+          </a:p>
+          <a:p>
+            <a:pPr marL="0" indent="0">
+              <a:buNone/>
+            </a:pPr>
+            <a:r>
+              <a:rPr lang="fr-FR" sz="1200" dirty="0" smtClean="0"/>
+              <a:t>Où XX est votre indice</a:t>
+            </a:r>
+            <a:endParaRPr lang="fr-FR" sz="1200" dirty="0"/>
+          </a:p>
+          <a:p>
+            <a:pPr marL="0" indent="0">
+              <a:buNone/>
+            </a:pPr>
+            <a:endParaRPr lang="fr-FR" sz="1200" dirty="0"/>
+          </a:p>
+        </p:txBody>
+      </p:sp>
+    </p:spTree>
+    <p:extLst>
+      <p:ext uri="{BB962C8B-B14F-4D97-AF65-F5344CB8AC3E}">
+        <p14:creationId xmlns:p14="http://schemas.microsoft.com/office/powerpoint/2010/main" val="382485659"/>
+      </p:ext>
+    </p:extLst>
+  </p:cSld>
+  <p:clrMapOvr>
+    <a:masterClrMapping/>
+  </p:clrMapOvr>
+</p:sld>
+</file>
+
+<file path=ppt/slides/slide30.xml><?xml version="1.0" encoding="utf-8"?>
+<p:sld xmlns:a="http://schemas.openxmlformats.org/drawingml/2006/main" xmlns:r="http://schemas.openxmlformats.org/officeDocument/2006/relationships" xmlns:p="http://schemas.openxmlformats.org/presentationml/2006/main">
+  <p:cSld>
+    <p:spTree>
+      <p:nvGrpSpPr>
+        <p:cNvPr id="1" name=""/>
+        <p:cNvGrpSpPr/>
+        <p:nvPr/>
+      </p:nvGrpSpPr>
+      <p:grpSpPr>
+        <a:xfrm>
+          <a:off x="0" y="0"/>
+          <a:ext cx="0" cy="0"/>
+          <a:chOff x="0" y="0"/>
+          <a:chExt cx="0" cy="0"/>
+        </a:xfrm>
+      </p:grpSpPr>
+      <p:sp>
+        <p:nvSpPr>
+          <p:cNvPr id="2" name="Titre 1"/>
+          <p:cNvSpPr>
+            <a:spLocks noGrp="1"/>
+          </p:cNvSpPr>
+          <p:nvPr>
+            <p:ph type="title"/>
+          </p:nvPr>
+        </p:nvSpPr>
+        <p:spPr/>
+        <p:txBody>
+          <a:bodyPr/>
+          <a:lstStyle/>
+          <a:p>
+            <a:r>
               <a:rPr lang="fr-FR" sz="2400" dirty="0"/>
               <a:t>Policy as Code et gouvernance sécurité</a:t>
             </a:r>
@@ -13748,7 +14724,7 @@
 </p:sld>
 </file>
 
-<file path=ppt/slides/slide28.xml><?xml version="1.0" encoding="utf-8"?>
+<file path=ppt/slides/slide31.xml><?xml version="1.0" encoding="utf-8"?>
 <p:sld xmlns:a="http://schemas.openxmlformats.org/drawingml/2006/main" xmlns:r="http://schemas.openxmlformats.org/officeDocument/2006/relationships" xmlns:p="http://schemas.openxmlformats.org/presentationml/2006/main">
   <p:cSld>
     <p:spTree>
@@ -14616,7 +15592,7 @@
 </p:sld>
 </file>
 
-<file path=ppt/slides/slide29.xml><?xml version="1.0" encoding="utf-8"?>
+<file path=ppt/slides/slide32.xml><?xml version="1.0" encoding="utf-8"?>
 <p:sld xmlns:a="http://schemas.openxmlformats.org/drawingml/2006/main" xmlns:r="http://schemas.openxmlformats.org/officeDocument/2006/relationships" xmlns:p="http://schemas.openxmlformats.org/presentationml/2006/main">
   <p:cSld>
     <p:spTree>
@@ -15137,360 +16113,7 @@
 </p:sld>
 </file>
 
-<file path=ppt/slides/slide3.xml><?xml version="1.0" encoding="utf-8"?>
-<p:sld xmlns:a="http://schemas.openxmlformats.org/drawingml/2006/main" xmlns:r="http://schemas.openxmlformats.org/officeDocument/2006/relationships" xmlns:p="http://schemas.openxmlformats.org/presentationml/2006/main">
-  <p:cSld>
-    <p:spTree>
-      <p:nvGrpSpPr>
-        <p:cNvPr id="1" name="">
-          <a:extLst>
-            <a:ext uri="{FF2B5EF4-FFF2-40B4-BE49-F238E27FC236}">
-              <a16:creationId xmlns:a16="http://schemas.microsoft.com/office/drawing/2014/main" xmlns="" id="{B76BA7DE-BB05-FCFB-8BE3-1F275946A4D0}"/>
-            </a:ext>
-          </a:extLst>
-        </p:cNvPr>
-        <p:cNvGrpSpPr/>
-        <p:nvPr/>
-      </p:nvGrpSpPr>
-      <p:grpSpPr>
-        <a:xfrm>
-          <a:off x="0" y="0"/>
-          <a:ext cx="0" cy="0"/>
-          <a:chOff x="0" y="0"/>
-          <a:chExt cx="0" cy="0"/>
-        </a:xfrm>
-      </p:grpSpPr>
-      <p:pic>
-        <p:nvPicPr>
-          <p:cNvPr id="8" name="Image 7">
-            <a:extLst>
-              <a:ext uri="{FF2B5EF4-FFF2-40B4-BE49-F238E27FC236}">
-                <a16:creationId xmlns:a16="http://schemas.microsoft.com/office/drawing/2014/main" xmlns="" id="{31E49E5F-DC39-3C89-E7AD-EFD0932F1FA7}"/>
-              </a:ext>
-            </a:extLst>
-          </p:cNvPr>
-          <p:cNvPicPr>
-            <a:picLocks noChangeAspect="1"/>
-          </p:cNvPicPr>
-          <p:nvPr/>
-        </p:nvPicPr>
-        <p:blipFill>
-          <a:blip r:embed="rId2" cstate="screen">
-            <a:extLst>
-              <a:ext uri="{28A0092B-C50C-407E-A947-70E740481C1C}">
-                <a14:useLocalDpi xmlns:a14="http://schemas.microsoft.com/office/drawing/2010/main"/>
-              </a:ext>
-            </a:extLst>
-          </a:blip>
-          <a:stretch>
-            <a:fillRect/>
-          </a:stretch>
-        </p:blipFill>
-        <p:spPr>
-          <a:xfrm>
-            <a:off x="3520048" y="3995739"/>
-            <a:ext cx="1955045" cy="972878"/>
-          </a:xfrm>
-          <a:prstGeom prst="rect">
-            <a:avLst/>
-          </a:prstGeom>
-        </p:spPr>
-      </p:pic>
-      <p:sp>
-        <p:nvSpPr>
-          <p:cNvPr id="2" name="Title 1">
-            <a:extLst>
-              <a:ext uri="{FF2B5EF4-FFF2-40B4-BE49-F238E27FC236}">
-                <a16:creationId xmlns:a16="http://schemas.microsoft.com/office/drawing/2014/main" xmlns="" id="{4A43E2B5-5BF8-7BAD-FC7B-84A7774212C5}"/>
-              </a:ext>
-            </a:extLst>
-          </p:cNvPr>
-          <p:cNvSpPr txBox="1">
-            <a:spLocks/>
-          </p:cNvSpPr>
-          <p:nvPr/>
-        </p:nvSpPr>
-        <p:spPr>
-          <a:xfrm>
-            <a:off x="611560" y="267494"/>
-            <a:ext cx="8126040" cy="531900"/>
-          </a:xfrm>
-          <a:prstGeom prst="rect">
-            <a:avLst/>
-          </a:prstGeom>
-        </p:spPr>
-        <p:txBody>
-          <a:bodyPr/>
-          <a:lstStyle>
-            <a:lvl1pPr algn="l" defTabSz="685800" rtl="0" eaLnBrk="1" latinLnBrk="0" hangingPunct="1">
-              <a:lnSpc>
-                <a:spcPct val="90000"/>
-              </a:lnSpc>
-              <a:spcBef>
-                <a:spcPct val="0"/>
-              </a:spcBef>
-              <a:buNone/>
-              <a:defRPr sz="3300" kern="1200">
-                <a:solidFill>
-                  <a:schemeClr val="tx1"/>
-                </a:solidFill>
-                <a:latin typeface="+mj-lt"/>
-                <a:ea typeface="+mj-ea"/>
-                <a:cs typeface="+mj-cs"/>
-              </a:defRPr>
-            </a:lvl1pPr>
-          </a:lstStyle>
-          <a:p>
-            <a:pPr fontAlgn="auto">
-              <a:spcAft>
-                <a:spcPts val="0"/>
-              </a:spcAft>
-            </a:pPr>
-            <a:r>
-              <a:rPr lang="fr-FR" sz="2400" dirty="0">
-                <a:solidFill>
-                  <a:schemeClr val="bg1"/>
-                </a:solidFill>
-              </a:rPr>
-              <a:t>Module 6 : Sécurité &amp; </a:t>
-            </a:r>
-            <a:r>
-              <a:rPr lang="fr-FR" sz="2400" dirty="0" err="1">
-                <a:solidFill>
-                  <a:schemeClr val="bg1"/>
-                </a:solidFill>
-              </a:rPr>
-              <a:t>DevSecOps</a:t>
-            </a:r>
-            <a:endParaRPr lang="en-US" sz="2400" dirty="0">
-              <a:solidFill>
-                <a:schemeClr val="bg1"/>
-              </a:solidFill>
-            </a:endParaRPr>
-          </a:p>
-        </p:txBody>
-      </p:sp>
-      <p:sp>
-        <p:nvSpPr>
-          <p:cNvPr id="4" name="ZoneTexte 3">
-            <a:extLst>
-              <a:ext uri="{FF2B5EF4-FFF2-40B4-BE49-F238E27FC236}">
-                <a16:creationId xmlns:a16="http://schemas.microsoft.com/office/drawing/2014/main" xmlns="" id="{86030E76-E1E6-D695-10B4-ED8621A286C5}"/>
-              </a:ext>
-            </a:extLst>
-          </p:cNvPr>
-          <p:cNvSpPr txBox="1"/>
-          <p:nvPr/>
-        </p:nvSpPr>
-        <p:spPr>
-          <a:xfrm>
-            <a:off x="328934" y="831234"/>
-            <a:ext cx="8506721" cy="3600986"/>
-          </a:xfrm>
-          <a:prstGeom prst="rect">
-            <a:avLst/>
-          </a:prstGeom>
-          <a:noFill/>
-        </p:spPr>
-        <p:txBody>
-          <a:bodyPr wrap="square">
-            <a:spAutoFit/>
-          </a:bodyPr>
-          <a:lstStyle/>
-          <a:p>
-            <a:pPr marL="342900" indent="-342900">
-              <a:lnSpc>
-                <a:spcPct val="150000"/>
-              </a:lnSpc>
-              <a:buFont typeface="Arial" panose="020B0604020202020204" pitchFamily="34" charset="0"/>
-              <a:buChar char="•"/>
-            </a:pPr>
-            <a:r>
-              <a:rPr lang="fr-FR" dirty="0">
-                <a:solidFill>
-                  <a:schemeClr val="bg1"/>
-                </a:solidFill>
-              </a:rPr>
-              <a:t>Introduction au </a:t>
-            </a:r>
-            <a:r>
-              <a:rPr lang="fr-FR" dirty="0" err="1">
-                <a:solidFill>
-                  <a:schemeClr val="bg1"/>
-                </a:solidFill>
-              </a:rPr>
-              <a:t>DevSecOps</a:t>
-            </a:r>
-            <a:r>
-              <a:rPr lang="fr-FR" dirty="0">
-                <a:solidFill>
-                  <a:schemeClr val="bg1"/>
-                </a:solidFill>
-              </a:rPr>
-              <a:t> et à la Security by Design</a:t>
-            </a:r>
-          </a:p>
-          <a:p>
-            <a:pPr marL="342900" indent="-342900">
-              <a:lnSpc>
-                <a:spcPct val="150000"/>
-              </a:lnSpc>
-              <a:buFont typeface="Arial" panose="020B0604020202020204" pitchFamily="34" charset="0"/>
-              <a:buChar char="•"/>
-            </a:pPr>
-            <a:r>
-              <a:rPr lang="fr-FR" dirty="0">
-                <a:solidFill>
-                  <a:schemeClr val="bg1"/>
-                </a:solidFill>
-              </a:rPr>
-              <a:t>Sécurité dans la CI (code, dépendances, artefacts)</a:t>
-            </a:r>
-          </a:p>
-          <a:p>
-            <a:pPr marL="342900" indent="-342900">
-              <a:lnSpc>
-                <a:spcPct val="150000"/>
-              </a:lnSpc>
-              <a:buFont typeface="Arial" panose="020B0604020202020204" pitchFamily="34" charset="0"/>
-              <a:buChar char="•"/>
-            </a:pPr>
-            <a:r>
-              <a:rPr lang="fr-FR" dirty="0">
-                <a:solidFill>
-                  <a:schemeClr val="bg1"/>
-                </a:solidFill>
-              </a:rPr>
-              <a:t>Sécurité dans la CD et le </a:t>
-            </a:r>
-            <a:r>
-              <a:rPr lang="fr-FR" dirty="0" err="1">
-                <a:solidFill>
-                  <a:schemeClr val="bg1"/>
-                </a:solidFill>
-              </a:rPr>
-              <a:t>GitOps</a:t>
-            </a:r>
-            <a:endParaRPr lang="fr-FR" dirty="0">
-              <a:solidFill>
-                <a:schemeClr val="bg1"/>
-              </a:solidFill>
-            </a:endParaRPr>
-          </a:p>
-          <a:p>
-            <a:pPr marL="342900" indent="-342900">
-              <a:lnSpc>
-                <a:spcPct val="150000"/>
-              </a:lnSpc>
-              <a:buFont typeface="Arial" panose="020B0604020202020204" pitchFamily="34" charset="0"/>
-              <a:buChar char="•"/>
-            </a:pPr>
-            <a:r>
-              <a:rPr lang="fr-FR" dirty="0">
-                <a:solidFill>
-                  <a:schemeClr val="bg1"/>
-                </a:solidFill>
-              </a:rPr>
-              <a:t>Observabilité des applications et de l’infrastructure</a:t>
-            </a:r>
-          </a:p>
-          <a:p>
-            <a:pPr marL="342900" indent="-342900">
-              <a:lnSpc>
-                <a:spcPct val="150000"/>
-              </a:lnSpc>
-              <a:buFont typeface="Arial" panose="020B0604020202020204" pitchFamily="34" charset="0"/>
-              <a:buChar char="•"/>
-            </a:pPr>
-            <a:r>
-              <a:rPr lang="fr-FR" dirty="0">
-                <a:solidFill>
-                  <a:schemeClr val="bg1"/>
-                </a:solidFill>
-              </a:rPr>
-              <a:t>Policy as Code et gouvernance sécurité</a:t>
-            </a:r>
-          </a:p>
-          <a:p>
-            <a:pPr marL="342900" indent="-342900">
-              <a:lnSpc>
-                <a:spcPct val="150000"/>
-              </a:lnSpc>
-              <a:buFont typeface="Arial" panose="020B0604020202020204" pitchFamily="34" charset="0"/>
-              <a:buChar char="•"/>
-            </a:pPr>
-            <a:r>
-              <a:rPr lang="fr-FR" dirty="0">
-                <a:solidFill>
-                  <a:schemeClr val="bg1"/>
-                </a:solidFill>
-              </a:rPr>
-              <a:t>Sécurité </a:t>
-            </a:r>
-            <a:r>
-              <a:rPr lang="fr-FR" dirty="0" err="1">
-                <a:solidFill>
-                  <a:schemeClr val="bg1"/>
-                </a:solidFill>
-              </a:rPr>
-              <a:t>runtime</a:t>
-            </a:r>
-            <a:r>
-              <a:rPr lang="fr-FR" dirty="0">
-                <a:solidFill>
-                  <a:schemeClr val="bg1"/>
-                </a:solidFill>
-              </a:rPr>
-              <a:t>, observabilité et SIEM</a:t>
-            </a:r>
-          </a:p>
-          <a:p>
-            <a:pPr marL="342900" indent="-342900">
-              <a:lnSpc>
-                <a:spcPct val="150000"/>
-              </a:lnSpc>
-              <a:buFont typeface="Arial" panose="020B0604020202020204" pitchFamily="34" charset="0"/>
-              <a:buChar char="•"/>
-            </a:pPr>
-            <a:r>
-              <a:rPr lang="fr-FR" dirty="0">
-                <a:solidFill>
-                  <a:schemeClr val="bg1"/>
-                </a:solidFill>
-              </a:rPr>
-              <a:t>Étude de cas et synthèse</a:t>
-            </a:r>
-          </a:p>
-          <a:p>
-            <a:pPr marL="342900" indent="-342900">
-              <a:lnSpc>
-                <a:spcPct val="150000"/>
-              </a:lnSpc>
-              <a:buFont typeface="Arial" panose="020B0604020202020204" pitchFamily="34" charset="0"/>
-              <a:buChar char="•"/>
-            </a:pPr>
-            <a:endParaRPr lang="fr-FR" dirty="0">
-              <a:solidFill>
-                <a:schemeClr val="bg1"/>
-              </a:solidFill>
-            </a:endParaRPr>
-          </a:p>
-        </p:txBody>
-      </p:sp>
-    </p:spTree>
-    <p:extLst>
-      <p:ext uri="{BB962C8B-B14F-4D97-AF65-F5344CB8AC3E}">
-        <p14:creationId xmlns:p14="http://schemas.microsoft.com/office/powerpoint/2010/main" val="1422288683"/>
-      </p:ext>
-    </p:extLst>
-  </p:cSld>
-  <p:clrMapOvr>
-    <a:masterClrMapping/>
-  </p:clrMapOvr>
-</p:sld>
-</file>
-
-<file path=ppt/slides/slide30.xml><?xml version="1.0" encoding="utf-8"?>
+<file path=ppt/slides/slide33.xml><?xml version="1.0" encoding="utf-8"?>
 <p:sld xmlns:a="http://schemas.openxmlformats.org/drawingml/2006/main" xmlns:r="http://schemas.openxmlformats.org/officeDocument/2006/relationships" xmlns:p="http://schemas.openxmlformats.org/presentationml/2006/main">
   <p:cSld>
     <p:spTree>
@@ -15968,722 +16591,6 @@
 </p:sld>
 </file>
 
-<file path=ppt/slides/slide31.xml><?xml version="1.0" encoding="utf-8"?>
-<p:sld xmlns:a="http://schemas.openxmlformats.org/drawingml/2006/main" xmlns:r="http://schemas.openxmlformats.org/officeDocument/2006/relationships" xmlns:p="http://schemas.openxmlformats.org/presentationml/2006/main">
-  <p:cSld>
-    <p:spTree>
-      <p:nvGrpSpPr>
-        <p:cNvPr id="1" name=""/>
-        <p:cNvGrpSpPr/>
-        <p:nvPr/>
-      </p:nvGrpSpPr>
-      <p:grpSpPr>
-        <a:xfrm>
-          <a:off x="0" y="0"/>
-          <a:ext cx="0" cy="0"/>
-          <a:chOff x="0" y="0"/>
-          <a:chExt cx="0" cy="0"/>
-        </a:xfrm>
-      </p:grpSpPr>
-      <p:sp>
-        <p:nvSpPr>
-          <p:cNvPr id="2" name="Titre 1"/>
-          <p:cNvSpPr>
-            <a:spLocks noGrp="1"/>
-          </p:cNvSpPr>
-          <p:nvPr>
-            <p:ph type="title"/>
-          </p:nvPr>
-        </p:nvSpPr>
-        <p:spPr/>
-        <p:txBody>
-          <a:bodyPr/>
-          <a:lstStyle/>
-          <a:p>
-            <a:r>
-              <a:rPr lang="fr-FR" sz="2400" dirty="0"/>
-              <a:t>Sécurité </a:t>
-            </a:r>
-            <a:r>
-              <a:rPr lang="fr-FR" sz="2400" dirty="0" err="1"/>
-              <a:t>runtime</a:t>
-            </a:r>
-            <a:r>
-              <a:rPr lang="fr-FR" sz="2400" dirty="0"/>
-              <a:t>, observabilité et SIEM</a:t>
-            </a:r>
-            <a:r>
-              <a:rPr lang="fr-FR" sz="3600" dirty="0"/>
-              <a:t/>
-            </a:r>
-            <a:br>
-              <a:rPr lang="fr-FR" sz="3600" dirty="0"/>
-            </a:br>
-            <a:r>
-              <a:rPr lang="fr-FR" sz="1800" dirty="0"/>
-              <a:t>Pourquoi la sécurité </a:t>
-            </a:r>
-            <a:r>
-              <a:rPr lang="fr-FR" sz="1800" dirty="0" err="1"/>
-              <a:t>runtime</a:t>
-            </a:r>
-            <a:r>
-              <a:rPr lang="fr-FR" sz="1800" dirty="0"/>
-              <a:t> est indispensable</a:t>
-            </a:r>
-          </a:p>
-        </p:txBody>
-      </p:sp>
-      <p:sp>
-        <p:nvSpPr>
-          <p:cNvPr id="3" name="Espace réservé du contenu 2"/>
-          <p:cNvSpPr>
-            <a:spLocks noGrp="1"/>
-          </p:cNvSpPr>
-          <p:nvPr>
-            <p:ph idx="1"/>
-          </p:nvPr>
-        </p:nvSpPr>
-        <p:spPr>
-          <a:xfrm>
-            <a:off x="673360" y="1043940"/>
-            <a:ext cx="8047211" cy="3096232"/>
-          </a:xfrm>
-        </p:spPr>
-        <p:txBody>
-          <a:bodyPr/>
-          <a:lstStyle/>
-          <a:p>
-            <a:r>
-              <a:rPr lang="fr-FR" b="1" dirty="0"/>
-              <a:t>Constat fondamental</a:t>
-            </a:r>
-          </a:p>
-          <a:p>
-            <a:pPr lvl="1"/>
-            <a:r>
-              <a:rPr lang="fr-FR" dirty="0"/>
-              <a:t>Même avec :</a:t>
-            </a:r>
-          </a:p>
-          <a:p>
-            <a:pPr lvl="2"/>
-            <a:r>
-              <a:rPr lang="fr-FR" dirty="0"/>
-              <a:t>code sécurisé,</a:t>
-            </a:r>
-          </a:p>
-          <a:p>
-            <a:pPr lvl="2"/>
-            <a:r>
-              <a:rPr lang="fr-FR" dirty="0"/>
-              <a:t>dépendances contrôlées,</a:t>
-            </a:r>
-          </a:p>
-          <a:p>
-            <a:pPr lvl="2"/>
-            <a:r>
-              <a:rPr lang="fr-FR" dirty="0"/>
-              <a:t>politiques strictes,</a:t>
-            </a:r>
-            <a:br>
-              <a:rPr lang="fr-FR" dirty="0"/>
-            </a:br>
-            <a:r>
-              <a:rPr lang="fr-FR" dirty="0"/>
-              <a:t>👉 </a:t>
-            </a:r>
-            <a:r>
-              <a:rPr lang="fr-FR" b="1" dirty="0"/>
-              <a:t>le risque zéro n’existe pas</a:t>
-            </a:r>
-            <a:r>
-              <a:rPr lang="fr-FR" dirty="0"/>
-              <a:t>.</a:t>
-            </a:r>
-          </a:p>
-          <a:p>
-            <a:pPr lvl="2"/>
-            <a:endParaRPr lang="fr-FR" dirty="0"/>
-          </a:p>
-          <a:p>
-            <a:r>
-              <a:rPr lang="fr-FR" b="1" dirty="0"/>
-              <a:t>Menaces </a:t>
-            </a:r>
-            <a:r>
-              <a:rPr lang="fr-FR" b="1" dirty="0" err="1"/>
-              <a:t>runtime</a:t>
-            </a:r>
-            <a:r>
-              <a:rPr lang="fr-FR" b="1" dirty="0"/>
-              <a:t> typiques</a:t>
-            </a:r>
-          </a:p>
-          <a:p>
-            <a:pPr lvl="1"/>
-            <a:r>
-              <a:rPr lang="fr-FR" dirty="0"/>
-              <a:t>Exploitation de vulnérabilités inconnues (0-day).</a:t>
-            </a:r>
-          </a:p>
-          <a:p>
-            <a:pPr lvl="1"/>
-            <a:r>
-              <a:rPr lang="fr-FR" dirty="0"/>
-              <a:t>Mauvaises configurations en production.</a:t>
-            </a:r>
-          </a:p>
-          <a:p>
-            <a:pPr lvl="1"/>
-            <a:r>
-              <a:rPr lang="fr-FR" dirty="0"/>
-              <a:t>Comportements anormaux ou malveillants.</a:t>
-            </a:r>
-          </a:p>
-          <a:p>
-            <a:pPr lvl="1"/>
-            <a:r>
-              <a:rPr lang="fr-FR" dirty="0"/>
-              <a:t>Attaques ciblant la plateforme (</a:t>
-            </a:r>
-            <a:r>
-              <a:rPr lang="fr-FR" dirty="0" err="1"/>
-              <a:t>Kubernetes</a:t>
-            </a:r>
-            <a:r>
-              <a:rPr lang="fr-FR" dirty="0"/>
-              <a:t>, API).</a:t>
-            </a:r>
-          </a:p>
-          <a:p>
-            <a:endParaRPr lang="fr-FR" b="1" dirty="0"/>
-          </a:p>
-          <a:p>
-            <a:pPr marL="0" indent="0">
-              <a:buNone/>
-            </a:pPr>
-            <a:r>
-              <a:rPr lang="fr-FR" dirty="0"/>
-              <a:t>👉 La sécurité </a:t>
-            </a:r>
-            <a:r>
-              <a:rPr lang="fr-FR" dirty="0" err="1"/>
-              <a:t>runtime</a:t>
-            </a:r>
-            <a:r>
-              <a:rPr lang="fr-FR" dirty="0"/>
-              <a:t> est la </a:t>
-            </a:r>
-            <a:r>
-              <a:rPr lang="fr-FR" b="1" dirty="0"/>
-              <a:t>ceinture de sécurité</a:t>
-            </a:r>
-            <a:r>
-              <a:rPr lang="fr-FR" dirty="0"/>
-              <a:t> du système.</a:t>
-            </a:r>
-          </a:p>
-        </p:txBody>
-      </p:sp>
-    </p:spTree>
-    <p:extLst>
-      <p:ext uri="{BB962C8B-B14F-4D97-AF65-F5344CB8AC3E}">
-        <p14:creationId xmlns:p14="http://schemas.microsoft.com/office/powerpoint/2010/main" val="240355135"/>
-      </p:ext>
-    </p:extLst>
-  </p:cSld>
-  <p:clrMapOvr>
-    <a:masterClrMapping/>
-  </p:clrMapOvr>
-</p:sld>
-</file>
-
-<file path=ppt/slides/slide32.xml><?xml version="1.0" encoding="utf-8"?>
-<p:sld xmlns:a="http://schemas.openxmlformats.org/drawingml/2006/main" xmlns:r="http://schemas.openxmlformats.org/officeDocument/2006/relationships" xmlns:p="http://schemas.openxmlformats.org/presentationml/2006/main">
-  <p:cSld>
-    <p:spTree>
-      <p:nvGrpSpPr>
-        <p:cNvPr id="1" name=""/>
-        <p:cNvGrpSpPr/>
-        <p:nvPr/>
-      </p:nvGrpSpPr>
-      <p:grpSpPr>
-        <a:xfrm>
-          <a:off x="0" y="0"/>
-          <a:ext cx="0" cy="0"/>
-          <a:chOff x="0" y="0"/>
-          <a:chExt cx="0" cy="0"/>
-        </a:xfrm>
-      </p:grpSpPr>
-      <p:sp>
-        <p:nvSpPr>
-          <p:cNvPr id="2" name="Titre 1"/>
-          <p:cNvSpPr>
-            <a:spLocks noGrp="1"/>
-          </p:cNvSpPr>
-          <p:nvPr>
-            <p:ph type="title"/>
-          </p:nvPr>
-        </p:nvSpPr>
-        <p:spPr/>
-        <p:txBody>
-          <a:bodyPr/>
-          <a:lstStyle/>
-          <a:p>
-            <a:r>
-              <a:rPr lang="fr-FR" sz="2400" dirty="0"/>
-              <a:t>Sécurité </a:t>
-            </a:r>
-            <a:r>
-              <a:rPr lang="fr-FR" sz="2400" dirty="0" err="1"/>
-              <a:t>runtime</a:t>
-            </a:r>
-            <a:r>
-              <a:rPr lang="fr-FR" sz="2400" dirty="0"/>
-              <a:t>, observabilité et SIEM</a:t>
-            </a:r>
-            <a:r>
-              <a:rPr lang="fr-FR" sz="3600" dirty="0"/>
-              <a:t/>
-            </a:r>
-            <a:br>
-              <a:rPr lang="fr-FR" sz="3600" dirty="0"/>
-            </a:br>
-            <a:r>
-              <a:rPr lang="fr-FR" sz="1800" dirty="0"/>
-              <a:t>Sécurité </a:t>
-            </a:r>
-            <a:r>
-              <a:rPr lang="fr-FR" sz="1800" dirty="0" err="1"/>
-              <a:t>runtime</a:t>
-            </a:r>
-            <a:r>
-              <a:rPr lang="fr-FR" sz="1800" dirty="0"/>
-              <a:t> : ce que l’on surveille réellement</a:t>
-            </a:r>
-          </a:p>
-        </p:txBody>
-      </p:sp>
-      <p:sp>
-        <p:nvSpPr>
-          <p:cNvPr id="3" name="Espace réservé du contenu 2"/>
-          <p:cNvSpPr>
-            <a:spLocks noGrp="1"/>
-          </p:cNvSpPr>
-          <p:nvPr>
-            <p:ph idx="1"/>
-          </p:nvPr>
-        </p:nvSpPr>
-        <p:spPr>
-          <a:xfrm>
-            <a:off x="673360" y="1043940"/>
-            <a:ext cx="8047211" cy="3633815"/>
-          </a:xfrm>
-        </p:spPr>
-        <p:txBody>
-          <a:bodyPr/>
-          <a:lstStyle/>
-          <a:p>
-            <a:r>
-              <a:rPr lang="fr-FR" b="1" dirty="0"/>
-              <a:t>Comportements applicatifs suspects</a:t>
-            </a:r>
-          </a:p>
-          <a:p>
-            <a:pPr lvl="1"/>
-            <a:r>
-              <a:rPr lang="fr-FR" dirty="0"/>
-              <a:t>Exécutions de commandes inattendues.</a:t>
-            </a:r>
-          </a:p>
-          <a:p>
-            <a:pPr lvl="1"/>
-            <a:r>
-              <a:rPr lang="fr-FR" dirty="0"/>
-              <a:t>Accès à des fichiers sensibles.</a:t>
-            </a:r>
-          </a:p>
-          <a:p>
-            <a:pPr lvl="1"/>
-            <a:r>
-              <a:rPr lang="fr-FR" dirty="0"/>
-              <a:t>Connexions réseau anormales.</a:t>
-            </a:r>
-          </a:p>
-          <a:p>
-            <a:pPr lvl="1"/>
-            <a:r>
-              <a:rPr lang="fr-FR" dirty="0"/>
-              <a:t>Élévation de privilèges.</a:t>
-            </a:r>
-          </a:p>
-          <a:p>
-            <a:r>
-              <a:rPr lang="fr-FR" b="1" dirty="0"/>
-              <a:t>Indicateurs plateforme</a:t>
-            </a:r>
-          </a:p>
-          <a:p>
-            <a:pPr lvl="1"/>
-            <a:r>
-              <a:rPr lang="fr-FR" dirty="0" err="1"/>
-              <a:t>Pods</a:t>
-            </a:r>
-            <a:r>
-              <a:rPr lang="fr-FR" dirty="0"/>
-              <a:t> redémarrés en boucle.</a:t>
-            </a:r>
-          </a:p>
-          <a:p>
-            <a:pPr lvl="1"/>
-            <a:r>
-              <a:rPr lang="fr-FR" dirty="0"/>
-              <a:t>Accès non autorisés à l’API </a:t>
-            </a:r>
-            <a:r>
-              <a:rPr lang="fr-FR" dirty="0" err="1"/>
-              <a:t>Kubernetes</a:t>
-            </a:r>
-            <a:r>
-              <a:rPr lang="fr-FR" dirty="0"/>
-              <a:t>.</a:t>
-            </a:r>
-          </a:p>
-          <a:p>
-            <a:pPr lvl="1"/>
-            <a:r>
-              <a:rPr lang="fr-FR" dirty="0"/>
-              <a:t>Création de ressources non attendues.</a:t>
-            </a:r>
-          </a:p>
-          <a:p>
-            <a:pPr lvl="1"/>
-            <a:r>
-              <a:rPr lang="fr-FR" dirty="0"/>
-              <a:t>Changements manuels hors </a:t>
-            </a:r>
-            <a:r>
-              <a:rPr lang="fr-FR" dirty="0" err="1"/>
-              <a:t>GitOps</a:t>
-            </a:r>
-            <a:r>
-              <a:rPr lang="fr-FR" dirty="0"/>
-              <a:t>.</a:t>
-            </a:r>
-          </a:p>
-          <a:p>
-            <a:r>
-              <a:rPr lang="fr-FR" b="1" dirty="0"/>
-              <a:t> Signaux utilisateurs</a:t>
-            </a:r>
-          </a:p>
-          <a:p>
-            <a:pPr lvl="1"/>
-            <a:r>
-              <a:rPr lang="fr-FR" dirty="0"/>
-              <a:t>Échecs d’authentification répétés.</a:t>
-            </a:r>
-          </a:p>
-          <a:p>
-            <a:pPr lvl="1"/>
-            <a:r>
-              <a:rPr lang="fr-FR" dirty="0"/>
-              <a:t>Accès hors plages habituelles.</a:t>
-            </a:r>
-          </a:p>
-          <a:p>
-            <a:pPr lvl="1"/>
-            <a:r>
-              <a:rPr lang="fr-FR" dirty="0"/>
-              <a:t>Volumes de requêtes anormaux.</a:t>
-            </a:r>
-          </a:p>
-          <a:p>
-            <a:pPr marL="0" indent="0">
-              <a:buNone/>
-            </a:pPr>
-            <a:endParaRPr lang="fr-FR" dirty="0"/>
-          </a:p>
-          <a:p>
-            <a:pPr marL="0" indent="0">
-              <a:buNone/>
-            </a:pPr>
-            <a:r>
-              <a:rPr lang="fr-FR" dirty="0"/>
-              <a:t>👉 En </a:t>
-            </a:r>
-            <a:r>
-              <a:rPr lang="fr-FR" dirty="0" err="1"/>
-              <a:t>runtime</a:t>
-            </a:r>
-            <a:r>
-              <a:rPr lang="fr-FR" dirty="0"/>
-              <a:t>, on surveille des </a:t>
-            </a:r>
-            <a:r>
-              <a:rPr lang="fr-FR" b="1" dirty="0"/>
-              <a:t>comportements</a:t>
-            </a:r>
-            <a:r>
-              <a:rPr lang="fr-FR" dirty="0"/>
-              <a:t>, pas seulement des failles.</a:t>
-            </a:r>
-          </a:p>
-        </p:txBody>
-      </p:sp>
-    </p:spTree>
-    <p:extLst>
-      <p:ext uri="{BB962C8B-B14F-4D97-AF65-F5344CB8AC3E}">
-        <p14:creationId xmlns:p14="http://schemas.microsoft.com/office/powerpoint/2010/main" val="2385262378"/>
-      </p:ext>
-    </p:extLst>
-  </p:cSld>
-  <p:clrMapOvr>
-    <a:masterClrMapping/>
-  </p:clrMapOvr>
-</p:sld>
-</file>
-
-<file path=ppt/slides/slide33.xml><?xml version="1.0" encoding="utf-8"?>
-<p:sld xmlns:a="http://schemas.openxmlformats.org/drawingml/2006/main" xmlns:r="http://schemas.openxmlformats.org/officeDocument/2006/relationships" xmlns:p="http://schemas.openxmlformats.org/presentationml/2006/main">
-  <p:cSld>
-    <p:spTree>
-      <p:nvGrpSpPr>
-        <p:cNvPr id="1" name=""/>
-        <p:cNvGrpSpPr/>
-        <p:nvPr/>
-      </p:nvGrpSpPr>
-      <p:grpSpPr>
-        <a:xfrm>
-          <a:off x="0" y="0"/>
-          <a:ext cx="0" cy="0"/>
-          <a:chOff x="0" y="0"/>
-          <a:chExt cx="0" cy="0"/>
-        </a:xfrm>
-      </p:grpSpPr>
-      <p:sp>
-        <p:nvSpPr>
-          <p:cNvPr id="2" name="Titre 1"/>
-          <p:cNvSpPr>
-            <a:spLocks noGrp="1"/>
-          </p:cNvSpPr>
-          <p:nvPr>
-            <p:ph type="title"/>
-          </p:nvPr>
-        </p:nvSpPr>
-        <p:spPr/>
-        <p:txBody>
-          <a:bodyPr/>
-          <a:lstStyle/>
-          <a:p>
-            <a:r>
-              <a:rPr lang="fr-FR" sz="2400" dirty="0"/>
-              <a:t>Sécurité </a:t>
-            </a:r>
-            <a:r>
-              <a:rPr lang="fr-FR" sz="2400" dirty="0" err="1"/>
-              <a:t>runtime</a:t>
-            </a:r>
-            <a:r>
-              <a:rPr lang="fr-FR" sz="2400" dirty="0"/>
-              <a:t>, observabilité et SIEM</a:t>
-            </a:r>
-            <a:r>
-              <a:rPr lang="fr-FR" sz="3600" dirty="0"/>
-              <a:t/>
-            </a:r>
-            <a:br>
-              <a:rPr lang="fr-FR" sz="3600" dirty="0"/>
-            </a:br>
-            <a:r>
-              <a:rPr lang="fr-FR" sz="1800" dirty="0"/>
-              <a:t>Observabilité au service de la sécurité </a:t>
-            </a:r>
-            <a:r>
-              <a:rPr lang="fr-FR" sz="1800" dirty="0" err="1"/>
-              <a:t>runtime</a:t>
-            </a:r>
-            <a:endParaRPr lang="fr-FR" sz="1800" dirty="0"/>
-          </a:p>
-        </p:txBody>
-      </p:sp>
-      <p:sp>
-        <p:nvSpPr>
-          <p:cNvPr id="3" name="Espace réservé du contenu 2"/>
-          <p:cNvSpPr>
-            <a:spLocks noGrp="1"/>
-          </p:cNvSpPr>
-          <p:nvPr>
-            <p:ph idx="1"/>
-          </p:nvPr>
-        </p:nvSpPr>
-        <p:spPr>
-          <a:xfrm>
-            <a:off x="673360" y="883920"/>
-            <a:ext cx="8047211" cy="3966214"/>
-          </a:xfrm>
-        </p:spPr>
-        <p:txBody>
-          <a:bodyPr/>
-          <a:lstStyle/>
-          <a:p>
-            <a:r>
-              <a:rPr lang="fr-FR" b="1" dirty="0"/>
-              <a:t>Rôle des trois piliers</a:t>
-            </a:r>
-          </a:p>
-          <a:p>
-            <a:pPr lvl="1"/>
-            <a:r>
-              <a:rPr lang="fr-FR" b="1" dirty="0"/>
-              <a:t>Métriques</a:t>
-            </a:r>
-            <a:endParaRPr lang="fr-FR" dirty="0"/>
-          </a:p>
-          <a:p>
-            <a:pPr lvl="2"/>
-            <a:r>
-              <a:rPr lang="fr-FR" dirty="0"/>
-              <a:t>pics de trafic,</a:t>
-            </a:r>
-          </a:p>
-          <a:p>
-            <a:pPr lvl="2"/>
-            <a:r>
-              <a:rPr lang="fr-FR" dirty="0"/>
-              <a:t>saturation suspecte,</a:t>
-            </a:r>
-          </a:p>
-          <a:p>
-            <a:pPr lvl="2"/>
-            <a:r>
-              <a:rPr lang="fr-FR" dirty="0"/>
-              <a:t>erreurs anormales.</a:t>
-            </a:r>
-          </a:p>
-          <a:p>
-            <a:pPr lvl="1"/>
-            <a:r>
-              <a:rPr lang="fr-FR" b="1" dirty="0"/>
-              <a:t>Logs</a:t>
-            </a:r>
-            <a:endParaRPr lang="fr-FR" dirty="0"/>
-          </a:p>
-          <a:p>
-            <a:pPr lvl="2"/>
-            <a:r>
-              <a:rPr lang="fr-FR" dirty="0"/>
-              <a:t>actions sensibles,</a:t>
-            </a:r>
-          </a:p>
-          <a:p>
-            <a:pPr lvl="2"/>
-            <a:r>
-              <a:rPr lang="fr-FR" dirty="0"/>
-              <a:t>erreurs répétées,</a:t>
-            </a:r>
-          </a:p>
-          <a:p>
-            <a:pPr lvl="2"/>
-            <a:r>
-              <a:rPr lang="fr-FR" dirty="0"/>
-              <a:t>événements d’accès.</a:t>
-            </a:r>
-          </a:p>
-          <a:p>
-            <a:pPr lvl="1"/>
-            <a:r>
-              <a:rPr lang="fr-FR" b="1" dirty="0"/>
-              <a:t>Traces</a:t>
-            </a:r>
-            <a:endParaRPr lang="fr-FR" dirty="0"/>
-          </a:p>
-          <a:p>
-            <a:pPr lvl="2"/>
-            <a:r>
-              <a:rPr lang="fr-FR" dirty="0"/>
-              <a:t>parcours anormaux,</a:t>
-            </a:r>
-          </a:p>
-          <a:p>
-            <a:pPr lvl="2"/>
-            <a:r>
-              <a:rPr lang="fr-FR" dirty="0"/>
-              <a:t>dépendances inattendues.</a:t>
-            </a:r>
-          </a:p>
-          <a:p>
-            <a:r>
-              <a:rPr lang="fr-FR" b="1" dirty="0"/>
-              <a:t>Corrélation des signaux</a:t>
-            </a:r>
-          </a:p>
-          <a:p>
-            <a:pPr lvl="1"/>
-            <a:r>
-              <a:rPr lang="fr-FR" dirty="0"/>
-              <a:t>Déploiement récent + hausse d’erreurs.</a:t>
-            </a:r>
-          </a:p>
-          <a:p>
-            <a:pPr lvl="1"/>
-            <a:r>
-              <a:rPr lang="fr-FR" dirty="0"/>
-              <a:t>Accès </a:t>
-            </a:r>
-            <a:r>
-              <a:rPr lang="fr-FR" dirty="0" err="1"/>
-              <a:t>admin</a:t>
-            </a:r>
-            <a:r>
-              <a:rPr lang="fr-FR" dirty="0"/>
-              <a:t> + appel API inhabituel.</a:t>
-            </a:r>
-          </a:p>
-          <a:p>
-            <a:pPr lvl="1"/>
-            <a:r>
-              <a:rPr lang="fr-FR" dirty="0"/>
-              <a:t>Latence + requêtes externes inconnues.</a:t>
-            </a:r>
-          </a:p>
-          <a:p>
-            <a:pPr lvl="1"/>
-            <a:endParaRPr lang="fr-FR" dirty="0"/>
-          </a:p>
-          <a:p>
-            <a:pPr marL="0" indent="0">
-              <a:buNone/>
-            </a:pPr>
-            <a:r>
-              <a:rPr lang="fr-FR" dirty="0"/>
-              <a:t>👉 L’observabilité fournit le </a:t>
-            </a:r>
-            <a:r>
-              <a:rPr lang="fr-FR" b="1" dirty="0"/>
-              <a:t>contexte</a:t>
-            </a:r>
-            <a:r>
-              <a:rPr lang="fr-FR" dirty="0"/>
-              <a:t> indispensable à la sécurité.</a:t>
-            </a:r>
-          </a:p>
-        </p:txBody>
-      </p:sp>
-    </p:spTree>
-    <p:extLst>
-      <p:ext uri="{BB962C8B-B14F-4D97-AF65-F5344CB8AC3E}">
-        <p14:creationId xmlns:p14="http://schemas.microsoft.com/office/powerpoint/2010/main" val="3925921325"/>
-      </p:ext>
-    </p:extLst>
-  </p:cSld>
-  <p:clrMapOvr>
-    <a:masterClrMapping/>
-  </p:clrMapOvr>
-</p:sld>
-</file>
-
 <file path=ppt/slides/slide34.xml><?xml version="1.0" encoding="utf-8"?>
 <p:sld xmlns:a="http://schemas.openxmlformats.org/drawingml/2006/main" xmlns:r="http://schemas.openxmlformats.org/officeDocument/2006/relationships" xmlns:p="http://schemas.openxmlformats.org/presentationml/2006/main">
   <p:cSld>
@@ -16737,6 +16644,722 @@
             </a:br>
             <a:r>
               <a:rPr lang="fr-FR" sz="1800" dirty="0"/>
+              <a:t>Pourquoi la sécurité </a:t>
+            </a:r>
+            <a:r>
+              <a:rPr lang="fr-FR" sz="1800" dirty="0" err="1"/>
+              <a:t>runtime</a:t>
+            </a:r>
+            <a:r>
+              <a:rPr lang="fr-FR" sz="1800" dirty="0"/>
+              <a:t> est indispensable</a:t>
+            </a:r>
+          </a:p>
+        </p:txBody>
+      </p:sp>
+      <p:sp>
+        <p:nvSpPr>
+          <p:cNvPr id="3" name="Espace réservé du contenu 2"/>
+          <p:cNvSpPr>
+            <a:spLocks noGrp="1"/>
+          </p:cNvSpPr>
+          <p:nvPr>
+            <p:ph idx="1"/>
+          </p:nvPr>
+        </p:nvSpPr>
+        <p:spPr>
+          <a:xfrm>
+            <a:off x="673360" y="1043940"/>
+            <a:ext cx="8047211" cy="3096232"/>
+          </a:xfrm>
+        </p:spPr>
+        <p:txBody>
+          <a:bodyPr/>
+          <a:lstStyle/>
+          <a:p>
+            <a:r>
+              <a:rPr lang="fr-FR" b="1" dirty="0"/>
+              <a:t>Constat fondamental</a:t>
+            </a:r>
+          </a:p>
+          <a:p>
+            <a:pPr lvl="1"/>
+            <a:r>
+              <a:rPr lang="fr-FR" dirty="0"/>
+              <a:t>Même avec :</a:t>
+            </a:r>
+          </a:p>
+          <a:p>
+            <a:pPr lvl="2"/>
+            <a:r>
+              <a:rPr lang="fr-FR" dirty="0"/>
+              <a:t>code sécurisé,</a:t>
+            </a:r>
+          </a:p>
+          <a:p>
+            <a:pPr lvl="2"/>
+            <a:r>
+              <a:rPr lang="fr-FR" dirty="0"/>
+              <a:t>dépendances contrôlées,</a:t>
+            </a:r>
+          </a:p>
+          <a:p>
+            <a:pPr lvl="2"/>
+            <a:r>
+              <a:rPr lang="fr-FR" dirty="0"/>
+              <a:t>politiques strictes,</a:t>
+            </a:r>
+            <a:br>
+              <a:rPr lang="fr-FR" dirty="0"/>
+            </a:br>
+            <a:r>
+              <a:rPr lang="fr-FR" dirty="0"/>
+              <a:t>👉 </a:t>
+            </a:r>
+            <a:r>
+              <a:rPr lang="fr-FR" b="1" dirty="0"/>
+              <a:t>le risque zéro n’existe pas</a:t>
+            </a:r>
+            <a:r>
+              <a:rPr lang="fr-FR" dirty="0"/>
+              <a:t>.</a:t>
+            </a:r>
+          </a:p>
+          <a:p>
+            <a:pPr lvl="2"/>
+            <a:endParaRPr lang="fr-FR" dirty="0"/>
+          </a:p>
+          <a:p>
+            <a:r>
+              <a:rPr lang="fr-FR" b="1" dirty="0"/>
+              <a:t>Menaces </a:t>
+            </a:r>
+            <a:r>
+              <a:rPr lang="fr-FR" b="1" dirty="0" err="1"/>
+              <a:t>runtime</a:t>
+            </a:r>
+            <a:r>
+              <a:rPr lang="fr-FR" b="1" dirty="0"/>
+              <a:t> typiques</a:t>
+            </a:r>
+          </a:p>
+          <a:p>
+            <a:pPr lvl="1"/>
+            <a:r>
+              <a:rPr lang="fr-FR" dirty="0"/>
+              <a:t>Exploitation de vulnérabilités inconnues (0-day).</a:t>
+            </a:r>
+          </a:p>
+          <a:p>
+            <a:pPr lvl="1"/>
+            <a:r>
+              <a:rPr lang="fr-FR" dirty="0"/>
+              <a:t>Mauvaises configurations en production.</a:t>
+            </a:r>
+          </a:p>
+          <a:p>
+            <a:pPr lvl="1"/>
+            <a:r>
+              <a:rPr lang="fr-FR" dirty="0"/>
+              <a:t>Comportements anormaux ou malveillants.</a:t>
+            </a:r>
+          </a:p>
+          <a:p>
+            <a:pPr lvl="1"/>
+            <a:r>
+              <a:rPr lang="fr-FR" dirty="0"/>
+              <a:t>Attaques ciblant la plateforme (</a:t>
+            </a:r>
+            <a:r>
+              <a:rPr lang="fr-FR" dirty="0" err="1"/>
+              <a:t>Kubernetes</a:t>
+            </a:r>
+            <a:r>
+              <a:rPr lang="fr-FR" dirty="0"/>
+              <a:t>, API).</a:t>
+            </a:r>
+          </a:p>
+          <a:p>
+            <a:endParaRPr lang="fr-FR" b="1" dirty="0"/>
+          </a:p>
+          <a:p>
+            <a:pPr marL="0" indent="0">
+              <a:buNone/>
+            </a:pPr>
+            <a:r>
+              <a:rPr lang="fr-FR" dirty="0"/>
+              <a:t>👉 La sécurité </a:t>
+            </a:r>
+            <a:r>
+              <a:rPr lang="fr-FR" dirty="0" err="1"/>
+              <a:t>runtime</a:t>
+            </a:r>
+            <a:r>
+              <a:rPr lang="fr-FR" dirty="0"/>
+              <a:t> est la </a:t>
+            </a:r>
+            <a:r>
+              <a:rPr lang="fr-FR" b="1" dirty="0"/>
+              <a:t>ceinture de sécurité</a:t>
+            </a:r>
+            <a:r>
+              <a:rPr lang="fr-FR" dirty="0"/>
+              <a:t> du système.</a:t>
+            </a:r>
+          </a:p>
+        </p:txBody>
+      </p:sp>
+    </p:spTree>
+    <p:extLst>
+      <p:ext uri="{BB962C8B-B14F-4D97-AF65-F5344CB8AC3E}">
+        <p14:creationId xmlns:p14="http://schemas.microsoft.com/office/powerpoint/2010/main" val="240355135"/>
+      </p:ext>
+    </p:extLst>
+  </p:cSld>
+  <p:clrMapOvr>
+    <a:masterClrMapping/>
+  </p:clrMapOvr>
+</p:sld>
+</file>
+
+<file path=ppt/slides/slide35.xml><?xml version="1.0" encoding="utf-8"?>
+<p:sld xmlns:a="http://schemas.openxmlformats.org/drawingml/2006/main" xmlns:r="http://schemas.openxmlformats.org/officeDocument/2006/relationships" xmlns:p="http://schemas.openxmlformats.org/presentationml/2006/main">
+  <p:cSld>
+    <p:spTree>
+      <p:nvGrpSpPr>
+        <p:cNvPr id="1" name=""/>
+        <p:cNvGrpSpPr/>
+        <p:nvPr/>
+      </p:nvGrpSpPr>
+      <p:grpSpPr>
+        <a:xfrm>
+          <a:off x="0" y="0"/>
+          <a:ext cx="0" cy="0"/>
+          <a:chOff x="0" y="0"/>
+          <a:chExt cx="0" cy="0"/>
+        </a:xfrm>
+      </p:grpSpPr>
+      <p:sp>
+        <p:nvSpPr>
+          <p:cNvPr id="2" name="Titre 1"/>
+          <p:cNvSpPr>
+            <a:spLocks noGrp="1"/>
+          </p:cNvSpPr>
+          <p:nvPr>
+            <p:ph type="title"/>
+          </p:nvPr>
+        </p:nvSpPr>
+        <p:spPr/>
+        <p:txBody>
+          <a:bodyPr/>
+          <a:lstStyle/>
+          <a:p>
+            <a:r>
+              <a:rPr lang="fr-FR" sz="2400" dirty="0"/>
+              <a:t>Sécurité </a:t>
+            </a:r>
+            <a:r>
+              <a:rPr lang="fr-FR" sz="2400" dirty="0" err="1"/>
+              <a:t>runtime</a:t>
+            </a:r>
+            <a:r>
+              <a:rPr lang="fr-FR" sz="2400" dirty="0"/>
+              <a:t>, observabilité et SIEM</a:t>
+            </a:r>
+            <a:r>
+              <a:rPr lang="fr-FR" sz="3600" dirty="0"/>
+              <a:t/>
+            </a:r>
+            <a:br>
+              <a:rPr lang="fr-FR" sz="3600" dirty="0"/>
+            </a:br>
+            <a:r>
+              <a:rPr lang="fr-FR" sz="1800" dirty="0"/>
+              <a:t>Sécurité </a:t>
+            </a:r>
+            <a:r>
+              <a:rPr lang="fr-FR" sz="1800" dirty="0" err="1"/>
+              <a:t>runtime</a:t>
+            </a:r>
+            <a:r>
+              <a:rPr lang="fr-FR" sz="1800" dirty="0"/>
+              <a:t> : ce que l’on surveille réellement</a:t>
+            </a:r>
+          </a:p>
+        </p:txBody>
+      </p:sp>
+      <p:sp>
+        <p:nvSpPr>
+          <p:cNvPr id="3" name="Espace réservé du contenu 2"/>
+          <p:cNvSpPr>
+            <a:spLocks noGrp="1"/>
+          </p:cNvSpPr>
+          <p:nvPr>
+            <p:ph idx="1"/>
+          </p:nvPr>
+        </p:nvSpPr>
+        <p:spPr>
+          <a:xfrm>
+            <a:off x="673360" y="1043940"/>
+            <a:ext cx="8047211" cy="3633815"/>
+          </a:xfrm>
+        </p:spPr>
+        <p:txBody>
+          <a:bodyPr/>
+          <a:lstStyle/>
+          <a:p>
+            <a:r>
+              <a:rPr lang="fr-FR" b="1" dirty="0"/>
+              <a:t>Comportements applicatifs suspects</a:t>
+            </a:r>
+          </a:p>
+          <a:p>
+            <a:pPr lvl="1"/>
+            <a:r>
+              <a:rPr lang="fr-FR" dirty="0"/>
+              <a:t>Exécutions de commandes inattendues.</a:t>
+            </a:r>
+          </a:p>
+          <a:p>
+            <a:pPr lvl="1"/>
+            <a:r>
+              <a:rPr lang="fr-FR" dirty="0"/>
+              <a:t>Accès à des fichiers sensibles.</a:t>
+            </a:r>
+          </a:p>
+          <a:p>
+            <a:pPr lvl="1"/>
+            <a:r>
+              <a:rPr lang="fr-FR" dirty="0"/>
+              <a:t>Connexions réseau anormales.</a:t>
+            </a:r>
+          </a:p>
+          <a:p>
+            <a:pPr lvl="1"/>
+            <a:r>
+              <a:rPr lang="fr-FR" dirty="0"/>
+              <a:t>Élévation de privilèges.</a:t>
+            </a:r>
+          </a:p>
+          <a:p>
+            <a:r>
+              <a:rPr lang="fr-FR" b="1" dirty="0"/>
+              <a:t>Indicateurs plateforme</a:t>
+            </a:r>
+          </a:p>
+          <a:p>
+            <a:pPr lvl="1"/>
+            <a:r>
+              <a:rPr lang="fr-FR" dirty="0" err="1"/>
+              <a:t>Pods</a:t>
+            </a:r>
+            <a:r>
+              <a:rPr lang="fr-FR" dirty="0"/>
+              <a:t> redémarrés en boucle.</a:t>
+            </a:r>
+          </a:p>
+          <a:p>
+            <a:pPr lvl="1"/>
+            <a:r>
+              <a:rPr lang="fr-FR" dirty="0"/>
+              <a:t>Accès non autorisés à l’API </a:t>
+            </a:r>
+            <a:r>
+              <a:rPr lang="fr-FR" dirty="0" err="1"/>
+              <a:t>Kubernetes</a:t>
+            </a:r>
+            <a:r>
+              <a:rPr lang="fr-FR" dirty="0"/>
+              <a:t>.</a:t>
+            </a:r>
+          </a:p>
+          <a:p>
+            <a:pPr lvl="1"/>
+            <a:r>
+              <a:rPr lang="fr-FR" dirty="0"/>
+              <a:t>Création de ressources non attendues.</a:t>
+            </a:r>
+          </a:p>
+          <a:p>
+            <a:pPr lvl="1"/>
+            <a:r>
+              <a:rPr lang="fr-FR" dirty="0"/>
+              <a:t>Changements manuels hors </a:t>
+            </a:r>
+            <a:r>
+              <a:rPr lang="fr-FR" dirty="0" err="1"/>
+              <a:t>GitOps</a:t>
+            </a:r>
+            <a:r>
+              <a:rPr lang="fr-FR" dirty="0"/>
+              <a:t>.</a:t>
+            </a:r>
+          </a:p>
+          <a:p>
+            <a:r>
+              <a:rPr lang="fr-FR" b="1" dirty="0"/>
+              <a:t> Signaux utilisateurs</a:t>
+            </a:r>
+          </a:p>
+          <a:p>
+            <a:pPr lvl="1"/>
+            <a:r>
+              <a:rPr lang="fr-FR" dirty="0"/>
+              <a:t>Échecs d’authentification répétés.</a:t>
+            </a:r>
+          </a:p>
+          <a:p>
+            <a:pPr lvl="1"/>
+            <a:r>
+              <a:rPr lang="fr-FR" dirty="0"/>
+              <a:t>Accès hors plages habituelles.</a:t>
+            </a:r>
+          </a:p>
+          <a:p>
+            <a:pPr lvl="1"/>
+            <a:r>
+              <a:rPr lang="fr-FR" dirty="0"/>
+              <a:t>Volumes de requêtes anormaux.</a:t>
+            </a:r>
+          </a:p>
+          <a:p>
+            <a:pPr marL="0" indent="0">
+              <a:buNone/>
+            </a:pPr>
+            <a:endParaRPr lang="fr-FR" dirty="0"/>
+          </a:p>
+          <a:p>
+            <a:pPr marL="0" indent="0">
+              <a:buNone/>
+            </a:pPr>
+            <a:r>
+              <a:rPr lang="fr-FR" dirty="0"/>
+              <a:t>👉 En </a:t>
+            </a:r>
+            <a:r>
+              <a:rPr lang="fr-FR" dirty="0" err="1"/>
+              <a:t>runtime</a:t>
+            </a:r>
+            <a:r>
+              <a:rPr lang="fr-FR" dirty="0"/>
+              <a:t>, on surveille des </a:t>
+            </a:r>
+            <a:r>
+              <a:rPr lang="fr-FR" b="1" dirty="0"/>
+              <a:t>comportements</a:t>
+            </a:r>
+            <a:r>
+              <a:rPr lang="fr-FR" dirty="0"/>
+              <a:t>, pas seulement des failles.</a:t>
+            </a:r>
+          </a:p>
+        </p:txBody>
+      </p:sp>
+    </p:spTree>
+    <p:extLst>
+      <p:ext uri="{BB962C8B-B14F-4D97-AF65-F5344CB8AC3E}">
+        <p14:creationId xmlns:p14="http://schemas.microsoft.com/office/powerpoint/2010/main" val="2385262378"/>
+      </p:ext>
+    </p:extLst>
+  </p:cSld>
+  <p:clrMapOvr>
+    <a:masterClrMapping/>
+  </p:clrMapOvr>
+</p:sld>
+</file>
+
+<file path=ppt/slides/slide36.xml><?xml version="1.0" encoding="utf-8"?>
+<p:sld xmlns:a="http://schemas.openxmlformats.org/drawingml/2006/main" xmlns:r="http://schemas.openxmlformats.org/officeDocument/2006/relationships" xmlns:p="http://schemas.openxmlformats.org/presentationml/2006/main">
+  <p:cSld>
+    <p:spTree>
+      <p:nvGrpSpPr>
+        <p:cNvPr id="1" name=""/>
+        <p:cNvGrpSpPr/>
+        <p:nvPr/>
+      </p:nvGrpSpPr>
+      <p:grpSpPr>
+        <a:xfrm>
+          <a:off x="0" y="0"/>
+          <a:ext cx="0" cy="0"/>
+          <a:chOff x="0" y="0"/>
+          <a:chExt cx="0" cy="0"/>
+        </a:xfrm>
+      </p:grpSpPr>
+      <p:sp>
+        <p:nvSpPr>
+          <p:cNvPr id="2" name="Titre 1"/>
+          <p:cNvSpPr>
+            <a:spLocks noGrp="1"/>
+          </p:cNvSpPr>
+          <p:nvPr>
+            <p:ph type="title"/>
+          </p:nvPr>
+        </p:nvSpPr>
+        <p:spPr/>
+        <p:txBody>
+          <a:bodyPr/>
+          <a:lstStyle/>
+          <a:p>
+            <a:r>
+              <a:rPr lang="fr-FR" sz="2400" dirty="0"/>
+              <a:t>Sécurité </a:t>
+            </a:r>
+            <a:r>
+              <a:rPr lang="fr-FR" sz="2400" dirty="0" err="1"/>
+              <a:t>runtime</a:t>
+            </a:r>
+            <a:r>
+              <a:rPr lang="fr-FR" sz="2400" dirty="0"/>
+              <a:t>, observabilité et SIEM</a:t>
+            </a:r>
+            <a:r>
+              <a:rPr lang="fr-FR" sz="3600" dirty="0"/>
+              <a:t/>
+            </a:r>
+            <a:br>
+              <a:rPr lang="fr-FR" sz="3600" dirty="0"/>
+            </a:br>
+            <a:r>
+              <a:rPr lang="fr-FR" sz="1800" dirty="0"/>
+              <a:t>Observabilité au service de la sécurité </a:t>
+            </a:r>
+            <a:r>
+              <a:rPr lang="fr-FR" sz="1800" dirty="0" err="1"/>
+              <a:t>runtime</a:t>
+            </a:r>
+            <a:endParaRPr lang="fr-FR" sz="1800" dirty="0"/>
+          </a:p>
+        </p:txBody>
+      </p:sp>
+      <p:sp>
+        <p:nvSpPr>
+          <p:cNvPr id="3" name="Espace réservé du contenu 2"/>
+          <p:cNvSpPr>
+            <a:spLocks noGrp="1"/>
+          </p:cNvSpPr>
+          <p:nvPr>
+            <p:ph idx="1"/>
+          </p:nvPr>
+        </p:nvSpPr>
+        <p:spPr>
+          <a:xfrm>
+            <a:off x="673360" y="883920"/>
+            <a:ext cx="8047211" cy="3966214"/>
+          </a:xfrm>
+        </p:spPr>
+        <p:txBody>
+          <a:bodyPr/>
+          <a:lstStyle/>
+          <a:p>
+            <a:r>
+              <a:rPr lang="fr-FR" b="1" dirty="0"/>
+              <a:t>Rôle des trois piliers</a:t>
+            </a:r>
+          </a:p>
+          <a:p>
+            <a:pPr lvl="1"/>
+            <a:r>
+              <a:rPr lang="fr-FR" b="1" dirty="0"/>
+              <a:t>Métriques</a:t>
+            </a:r>
+            <a:endParaRPr lang="fr-FR" dirty="0"/>
+          </a:p>
+          <a:p>
+            <a:pPr lvl="2"/>
+            <a:r>
+              <a:rPr lang="fr-FR" dirty="0"/>
+              <a:t>pics de trafic,</a:t>
+            </a:r>
+          </a:p>
+          <a:p>
+            <a:pPr lvl="2"/>
+            <a:r>
+              <a:rPr lang="fr-FR" dirty="0"/>
+              <a:t>saturation suspecte,</a:t>
+            </a:r>
+          </a:p>
+          <a:p>
+            <a:pPr lvl="2"/>
+            <a:r>
+              <a:rPr lang="fr-FR" dirty="0"/>
+              <a:t>erreurs anormales.</a:t>
+            </a:r>
+          </a:p>
+          <a:p>
+            <a:pPr lvl="1"/>
+            <a:r>
+              <a:rPr lang="fr-FR" b="1" dirty="0"/>
+              <a:t>Logs</a:t>
+            </a:r>
+            <a:endParaRPr lang="fr-FR" dirty="0"/>
+          </a:p>
+          <a:p>
+            <a:pPr lvl="2"/>
+            <a:r>
+              <a:rPr lang="fr-FR" dirty="0"/>
+              <a:t>actions sensibles,</a:t>
+            </a:r>
+          </a:p>
+          <a:p>
+            <a:pPr lvl="2"/>
+            <a:r>
+              <a:rPr lang="fr-FR" dirty="0"/>
+              <a:t>erreurs répétées,</a:t>
+            </a:r>
+          </a:p>
+          <a:p>
+            <a:pPr lvl="2"/>
+            <a:r>
+              <a:rPr lang="fr-FR" dirty="0"/>
+              <a:t>événements d’accès.</a:t>
+            </a:r>
+          </a:p>
+          <a:p>
+            <a:pPr lvl="1"/>
+            <a:r>
+              <a:rPr lang="fr-FR" b="1" dirty="0"/>
+              <a:t>Traces</a:t>
+            </a:r>
+            <a:endParaRPr lang="fr-FR" dirty="0"/>
+          </a:p>
+          <a:p>
+            <a:pPr lvl="2"/>
+            <a:r>
+              <a:rPr lang="fr-FR" dirty="0"/>
+              <a:t>parcours anormaux,</a:t>
+            </a:r>
+          </a:p>
+          <a:p>
+            <a:pPr lvl="2"/>
+            <a:r>
+              <a:rPr lang="fr-FR" dirty="0"/>
+              <a:t>dépendances inattendues.</a:t>
+            </a:r>
+          </a:p>
+          <a:p>
+            <a:r>
+              <a:rPr lang="fr-FR" b="1" dirty="0"/>
+              <a:t>Corrélation des signaux</a:t>
+            </a:r>
+          </a:p>
+          <a:p>
+            <a:pPr lvl="1"/>
+            <a:r>
+              <a:rPr lang="fr-FR" dirty="0"/>
+              <a:t>Déploiement récent + hausse d’erreurs.</a:t>
+            </a:r>
+          </a:p>
+          <a:p>
+            <a:pPr lvl="1"/>
+            <a:r>
+              <a:rPr lang="fr-FR" dirty="0"/>
+              <a:t>Accès </a:t>
+            </a:r>
+            <a:r>
+              <a:rPr lang="fr-FR" dirty="0" err="1"/>
+              <a:t>admin</a:t>
+            </a:r>
+            <a:r>
+              <a:rPr lang="fr-FR" dirty="0"/>
+              <a:t> + appel API inhabituel.</a:t>
+            </a:r>
+          </a:p>
+          <a:p>
+            <a:pPr lvl="1"/>
+            <a:r>
+              <a:rPr lang="fr-FR" dirty="0"/>
+              <a:t>Latence + requêtes externes inconnues.</a:t>
+            </a:r>
+          </a:p>
+          <a:p>
+            <a:pPr lvl="1"/>
+            <a:endParaRPr lang="fr-FR" dirty="0"/>
+          </a:p>
+          <a:p>
+            <a:pPr marL="0" indent="0">
+              <a:buNone/>
+            </a:pPr>
+            <a:r>
+              <a:rPr lang="fr-FR" dirty="0"/>
+              <a:t>👉 L’observabilité fournit le </a:t>
+            </a:r>
+            <a:r>
+              <a:rPr lang="fr-FR" b="1" dirty="0"/>
+              <a:t>contexte</a:t>
+            </a:r>
+            <a:r>
+              <a:rPr lang="fr-FR" dirty="0"/>
+              <a:t> indispensable à la sécurité.</a:t>
+            </a:r>
+          </a:p>
+        </p:txBody>
+      </p:sp>
+    </p:spTree>
+    <p:extLst>
+      <p:ext uri="{BB962C8B-B14F-4D97-AF65-F5344CB8AC3E}">
+        <p14:creationId xmlns:p14="http://schemas.microsoft.com/office/powerpoint/2010/main" val="3925921325"/>
+      </p:ext>
+    </p:extLst>
+  </p:cSld>
+  <p:clrMapOvr>
+    <a:masterClrMapping/>
+  </p:clrMapOvr>
+</p:sld>
+</file>
+
+<file path=ppt/slides/slide37.xml><?xml version="1.0" encoding="utf-8"?>
+<p:sld xmlns:a="http://schemas.openxmlformats.org/drawingml/2006/main" xmlns:r="http://schemas.openxmlformats.org/officeDocument/2006/relationships" xmlns:p="http://schemas.openxmlformats.org/presentationml/2006/main">
+  <p:cSld>
+    <p:spTree>
+      <p:nvGrpSpPr>
+        <p:cNvPr id="1" name=""/>
+        <p:cNvGrpSpPr/>
+        <p:nvPr/>
+      </p:nvGrpSpPr>
+      <p:grpSpPr>
+        <a:xfrm>
+          <a:off x="0" y="0"/>
+          <a:ext cx="0" cy="0"/>
+          <a:chOff x="0" y="0"/>
+          <a:chExt cx="0" cy="0"/>
+        </a:xfrm>
+      </p:grpSpPr>
+      <p:sp>
+        <p:nvSpPr>
+          <p:cNvPr id="2" name="Titre 1"/>
+          <p:cNvSpPr>
+            <a:spLocks noGrp="1"/>
+          </p:cNvSpPr>
+          <p:nvPr>
+            <p:ph type="title"/>
+          </p:nvPr>
+        </p:nvSpPr>
+        <p:spPr/>
+        <p:txBody>
+          <a:bodyPr/>
+          <a:lstStyle/>
+          <a:p>
+            <a:r>
+              <a:rPr lang="fr-FR" sz="2400" dirty="0"/>
+              <a:t>Sécurité </a:t>
+            </a:r>
+            <a:r>
+              <a:rPr lang="fr-FR" sz="2400" dirty="0" err="1"/>
+              <a:t>runtime</a:t>
+            </a:r>
+            <a:r>
+              <a:rPr lang="fr-FR" sz="2400" dirty="0"/>
+              <a:t>, observabilité et SIEM</a:t>
+            </a:r>
+            <a:r>
+              <a:rPr lang="fr-FR" sz="3600" dirty="0"/>
+              <a:t/>
+            </a:r>
+            <a:br>
+              <a:rPr lang="fr-FR" sz="3600" dirty="0"/>
+            </a:br>
+            <a:r>
+              <a:rPr lang="fr-FR" sz="1800" dirty="0"/>
               <a:t>Le SIEM : corrélation et détection avancée</a:t>
             </a:r>
           </a:p>
@@ -16935,7 +17558,7 @@
 </p:sld>
 </file>
 
-<file path=ppt/slides/slide35.xml><?xml version="1.0" encoding="utf-8"?>
+<file path=ppt/slides/slide38.xml><?xml version="1.0" encoding="utf-8"?>
 <p:sld xmlns:a="http://schemas.openxmlformats.org/drawingml/2006/main" xmlns:r="http://schemas.openxmlformats.org/officeDocument/2006/relationships" xmlns:p="http://schemas.openxmlformats.org/presentationml/2006/main">
   <p:cSld>
     <p:spTree>
@@ -17462,7 +18085,7 @@
 </p:sld>
 </file>
 
-<file path=ppt/slides/slide36.xml><?xml version="1.0" encoding="utf-8"?>
+<file path=ppt/slides/slide39.xml><?xml version="1.0" encoding="utf-8"?>
 <p:sld xmlns:a="http://schemas.openxmlformats.org/drawingml/2006/main" xmlns:r="http://schemas.openxmlformats.org/officeDocument/2006/relationships" xmlns:p="http://schemas.openxmlformats.org/presentationml/2006/main">
   <p:cSld>
     <p:spTree>
@@ -17713,7 +18336,298 @@
 </p:sld>
 </file>
 
-<file path=ppt/slides/slide37.xml><?xml version="1.0" encoding="utf-8"?>
+<file path=ppt/slides/slide4.xml><?xml version="1.0" encoding="utf-8"?>
+<p:sld xmlns:a="http://schemas.openxmlformats.org/drawingml/2006/main" xmlns:r="http://schemas.openxmlformats.org/officeDocument/2006/relationships" xmlns:p="http://schemas.openxmlformats.org/presentationml/2006/main">
+  <p:cSld>
+    <p:spTree>
+      <p:nvGrpSpPr>
+        <p:cNvPr id="1" name=""/>
+        <p:cNvGrpSpPr/>
+        <p:nvPr/>
+      </p:nvGrpSpPr>
+      <p:grpSpPr>
+        <a:xfrm>
+          <a:off x="0" y="0"/>
+          <a:ext cx="0" cy="0"/>
+          <a:chOff x="0" y="0"/>
+          <a:chExt cx="0" cy="0"/>
+        </a:xfrm>
+      </p:grpSpPr>
+      <p:sp>
+        <p:nvSpPr>
+          <p:cNvPr id="2" name="Titre 1"/>
+          <p:cNvSpPr>
+            <a:spLocks noGrp="1"/>
+          </p:cNvSpPr>
+          <p:nvPr>
+            <p:ph type="title"/>
+          </p:nvPr>
+        </p:nvSpPr>
+        <p:spPr/>
+        <p:txBody>
+          <a:bodyPr/>
+          <a:lstStyle/>
+          <a:p>
+            <a:r>
+              <a:rPr lang="fr-FR" dirty="0" err="1" smtClean="0"/>
+              <a:t>Devcontainers</a:t>
+            </a:r>
+            <a:r>
+              <a:rPr lang="fr-FR" dirty="0"/>
+              <a:t/>
+            </a:r>
+            <a:br>
+              <a:rPr lang="fr-FR" dirty="0"/>
+            </a:br>
+            <a:r>
+              <a:rPr lang="fr-FR" sz="1400" dirty="0" err="1"/>
+              <a:t>DevContainer</a:t>
+            </a:r>
+            <a:r>
+              <a:rPr lang="fr-FR" sz="1400" dirty="0"/>
+              <a:t> : environnement de développement reproductible (https://containers.dev</a:t>
+            </a:r>
+            <a:r>
+              <a:rPr lang="fr-FR" sz="1400" dirty="0" smtClean="0"/>
+              <a:t>/)</a:t>
+            </a:r>
+            <a:endParaRPr lang="fr-FR" sz="1400" dirty="0"/>
+          </a:p>
+        </p:txBody>
+      </p:sp>
+      <p:sp>
+        <p:nvSpPr>
+          <p:cNvPr id="3" name="Espace réservé du contenu 2"/>
+          <p:cNvSpPr>
+            <a:spLocks noGrp="1"/>
+          </p:cNvSpPr>
+          <p:nvPr>
+            <p:ph idx="1"/>
+          </p:nvPr>
+        </p:nvSpPr>
+        <p:spPr>
+          <a:xfrm>
+            <a:off x="673360" y="1076326"/>
+            <a:ext cx="8047211" cy="3667124"/>
+          </a:xfrm>
+        </p:spPr>
+        <p:txBody>
+          <a:bodyPr/>
+          <a:lstStyle/>
+          <a:p>
+            <a:pPr marL="0" indent="0">
+              <a:buNone/>
+            </a:pPr>
+            <a:r>
+              <a:rPr lang="fr-FR" dirty="0"/>
+              <a:t>Un </a:t>
+            </a:r>
+            <a:r>
+              <a:rPr lang="fr-FR" b="1" dirty="0" err="1"/>
+              <a:t>DevContainer</a:t>
+            </a:r>
+            <a:r>
+              <a:rPr lang="fr-FR" dirty="0"/>
+              <a:t> est un environnement de développement </a:t>
+            </a:r>
+            <a:r>
+              <a:rPr lang="fr-FR" b="1" dirty="0"/>
+              <a:t>défini dans du code et exécuté dans un conteneur Docker</a:t>
+            </a:r>
+            <a:r>
+              <a:rPr lang="fr-FR" dirty="0"/>
+              <a:t>.</a:t>
+            </a:r>
+          </a:p>
+          <a:p>
+            <a:pPr marL="0" indent="0">
+              <a:buNone/>
+            </a:pPr>
+            <a:r>
+              <a:rPr lang="fr-FR" dirty="0"/>
+              <a:t>Il permet de fournir à chaque développeur </a:t>
+            </a:r>
+            <a:r>
+              <a:rPr lang="fr-FR" b="1" dirty="0"/>
+              <a:t>exactement le même environnement de travail</a:t>
+            </a:r>
+            <a:r>
+              <a:rPr lang="fr-FR" dirty="0"/>
+              <a:t> :</a:t>
+            </a:r>
+          </a:p>
+          <a:p>
+            <a:pPr lvl="1"/>
+            <a:r>
+              <a:rPr lang="fr-FR" dirty="0"/>
+              <a:t>mêmes outils</a:t>
+            </a:r>
+          </a:p>
+          <a:p>
+            <a:pPr lvl="1"/>
+            <a:r>
+              <a:rPr lang="fr-FR" dirty="0"/>
+              <a:t>mêmes versions de langages</a:t>
+            </a:r>
+          </a:p>
+          <a:p>
+            <a:pPr lvl="1"/>
+            <a:r>
+              <a:rPr lang="fr-FR" dirty="0"/>
+              <a:t>mêmes dépendances</a:t>
+            </a:r>
+          </a:p>
+          <a:p>
+            <a:pPr lvl="1"/>
+            <a:r>
+              <a:rPr lang="fr-FR" dirty="0"/>
+              <a:t>même configuration système</a:t>
+            </a:r>
+          </a:p>
+          <a:p>
+            <a:pPr marL="0" indent="0">
+              <a:buNone/>
+            </a:pPr>
+            <a:r>
+              <a:rPr lang="fr-FR" dirty="0"/>
+              <a:t>L’environnement est décrit dans un fichier </a:t>
+            </a:r>
+            <a:r>
+              <a:rPr lang="fr-FR" b="1" dirty="0" err="1"/>
+              <a:t>devcontainer.json</a:t>
+            </a:r>
+            <a:r>
+              <a:rPr lang="fr-FR" dirty="0"/>
+              <a:t> et un </a:t>
+            </a:r>
+            <a:r>
+              <a:rPr lang="fr-FR" b="1" dirty="0" err="1"/>
+              <a:t>Dockerfile</a:t>
+            </a:r>
+            <a:r>
+              <a:rPr lang="fr-FR" dirty="0"/>
+              <a:t>.</a:t>
+            </a:r>
+          </a:p>
+          <a:p>
+            <a:pPr marL="0" indent="0">
+              <a:buNone/>
+            </a:pPr>
+            <a:r>
+              <a:rPr lang="fr-FR" dirty="0"/>
+              <a:t>Lorsqu’un développeur ouvre le projet dans </a:t>
+            </a:r>
+            <a:r>
+              <a:rPr lang="fr-FR" b="1" dirty="0"/>
+              <a:t>VS Code</a:t>
+            </a:r>
+            <a:r>
+              <a:rPr lang="fr-FR" dirty="0"/>
+              <a:t>, l’éditeur lance automatiquement le conteneur et se connecte dedans.</a:t>
+            </a:r>
+          </a:p>
+          <a:p>
+            <a:r>
+              <a:rPr lang="fr-FR" b="1" dirty="0" smtClean="0"/>
+              <a:t>Objectifs </a:t>
+            </a:r>
+            <a:r>
+              <a:rPr lang="fr-FR" b="1" dirty="0"/>
+              <a:t>principaux</a:t>
+            </a:r>
+          </a:p>
+          <a:p>
+            <a:pPr lvl="1"/>
+            <a:r>
+              <a:rPr lang="fr-FR" dirty="0"/>
+              <a:t>Supprimer les problèmes </a:t>
+            </a:r>
+            <a:r>
+              <a:rPr lang="fr-FR" b="1" dirty="0"/>
+              <a:t>“ça marche sur ma machine”</a:t>
+            </a:r>
+            <a:endParaRPr lang="fr-FR" dirty="0"/>
+          </a:p>
+          <a:p>
+            <a:pPr lvl="1"/>
+            <a:r>
+              <a:rPr lang="fr-FR" dirty="0"/>
+              <a:t>Fournir un </a:t>
+            </a:r>
+            <a:r>
+              <a:rPr lang="fr-FR" b="1" dirty="0"/>
+              <a:t>environnement reproductible</a:t>
+            </a:r>
+            <a:endParaRPr lang="fr-FR" dirty="0"/>
+          </a:p>
+          <a:p>
+            <a:pPr lvl="1"/>
+            <a:r>
+              <a:rPr lang="fr-FR" dirty="0"/>
+              <a:t>Simplifier l’</a:t>
+            </a:r>
+            <a:r>
+              <a:rPr lang="fr-FR" dirty="0" err="1"/>
+              <a:t>onboarding</a:t>
+            </a:r>
+            <a:r>
+              <a:rPr lang="fr-FR" dirty="0"/>
+              <a:t> des développeurs</a:t>
+            </a:r>
+          </a:p>
+          <a:p>
+            <a:pPr lvl="1"/>
+            <a:r>
+              <a:rPr lang="fr-FR" dirty="0"/>
+              <a:t>Garantir la cohérence entre développement et CI/CD</a:t>
+            </a:r>
+          </a:p>
+          <a:p>
+            <a:pPr lvl="1"/>
+            <a:r>
+              <a:rPr lang="fr-FR" dirty="0"/>
+              <a:t>Un </a:t>
+            </a:r>
+            <a:r>
+              <a:rPr lang="fr-FR" dirty="0" err="1"/>
+              <a:t>DevContainer</a:t>
+            </a:r>
+            <a:r>
+              <a:rPr lang="fr-FR" dirty="0"/>
+              <a:t> est donc </a:t>
+            </a:r>
+            <a:r>
+              <a:rPr lang="fr-FR" b="1" dirty="0"/>
+              <a:t>un environnement de développement portable et </a:t>
+            </a:r>
+            <a:r>
+              <a:rPr lang="fr-FR" b="1" dirty="0" err="1"/>
+              <a:t>versionné</a:t>
+            </a:r>
+            <a:r>
+              <a:rPr lang="fr-FR" dirty="0"/>
+              <a:t>.</a:t>
+            </a:r>
+          </a:p>
+          <a:p>
+            <a:endParaRPr lang="fr-FR" dirty="0"/>
+          </a:p>
+        </p:txBody>
+      </p:sp>
+    </p:spTree>
+    <p:extLst>
+      <p:ext uri="{BB962C8B-B14F-4D97-AF65-F5344CB8AC3E}">
+        <p14:creationId xmlns:p14="http://schemas.microsoft.com/office/powerpoint/2010/main" val="1259484963"/>
+      </p:ext>
+    </p:extLst>
+  </p:cSld>
+  <p:clrMapOvr>
+    <a:masterClrMapping/>
+  </p:clrMapOvr>
+</p:sld>
+</file>
+
+<file path=ppt/slides/slide40.xml><?xml version="1.0" encoding="utf-8"?>
 <p:sld xmlns:a="http://schemas.openxmlformats.org/drawingml/2006/main" xmlns:r="http://schemas.openxmlformats.org/officeDocument/2006/relationships" xmlns:p="http://schemas.openxmlformats.org/presentationml/2006/main">
   <p:cSld>
     <p:spTree>
@@ -18194,7 +19108,7 @@
 </p:sld>
 </file>
 
-<file path=ppt/slides/slide38.xml><?xml version="1.0" encoding="utf-8"?>
+<file path=ppt/slides/slide41.xml><?xml version="1.0" encoding="utf-8"?>
 <p:sld xmlns:a="http://schemas.openxmlformats.org/drawingml/2006/main" xmlns:r="http://schemas.openxmlformats.org/officeDocument/2006/relationships" xmlns:p="http://schemas.openxmlformats.org/presentationml/2006/main">
   <p:cSld>
     <p:spTree>
@@ -18693,213 +19607,6 @@
 </p:sld>
 </file>
 
-<file path=ppt/slides/slide4.xml><?xml version="1.0" encoding="utf-8"?>
-<p:sld xmlns:a="http://schemas.openxmlformats.org/drawingml/2006/main" xmlns:r="http://schemas.openxmlformats.org/officeDocument/2006/relationships" xmlns:p="http://schemas.openxmlformats.org/presentationml/2006/main">
-  <p:cSld>
-    <p:spTree>
-      <p:nvGrpSpPr>
-        <p:cNvPr id="1" name=""/>
-        <p:cNvGrpSpPr/>
-        <p:nvPr/>
-      </p:nvGrpSpPr>
-      <p:grpSpPr>
-        <a:xfrm>
-          <a:off x="0" y="0"/>
-          <a:ext cx="0" cy="0"/>
-          <a:chOff x="0" y="0"/>
-          <a:chExt cx="0" cy="0"/>
-        </a:xfrm>
-      </p:grpSpPr>
-      <p:sp>
-        <p:nvSpPr>
-          <p:cNvPr id="2" name="Titre 1"/>
-          <p:cNvSpPr>
-            <a:spLocks noGrp="1"/>
-          </p:cNvSpPr>
-          <p:nvPr>
-            <p:ph type="title"/>
-          </p:nvPr>
-        </p:nvSpPr>
-        <p:spPr/>
-        <p:txBody>
-          <a:bodyPr/>
-          <a:lstStyle/>
-          <a:p>
-            <a:r>
-              <a:rPr lang="fr-FR" sz="2400" dirty="0" smtClean="0"/>
-              <a:t>Kit de démarrage</a:t>
-            </a:r>
-            <a:endParaRPr lang="fr-FR" sz="2400" dirty="0"/>
-          </a:p>
-        </p:txBody>
-      </p:sp>
-      <p:sp>
-        <p:nvSpPr>
-          <p:cNvPr id="3" name="Espace réservé du contenu 2"/>
-          <p:cNvSpPr>
-            <a:spLocks noGrp="1"/>
-          </p:cNvSpPr>
-          <p:nvPr>
-            <p:ph idx="1"/>
-          </p:nvPr>
-        </p:nvSpPr>
-        <p:spPr>
-          <a:xfrm>
-            <a:off x="177451" y="993643"/>
-            <a:ext cx="8047211" cy="3568458"/>
-          </a:xfrm>
-        </p:spPr>
-        <p:txBody>
-          <a:bodyPr>
-            <a:normAutofit/>
-          </a:bodyPr>
-          <a:lstStyle/>
-          <a:p>
-            <a:pPr marL="0" indent="0">
-              <a:buNone/>
-            </a:pPr>
-            <a:r>
-              <a:rPr lang="fr-FR" dirty="0" smtClean="0"/>
-              <a:t>GITLAB </a:t>
-            </a:r>
-            <a:r>
-              <a:rPr lang="fr-FR" dirty="0"/>
-              <a:t>: https://dvp-srv-gitlab.campus12avenue.fr/ </a:t>
-            </a:r>
-            <a:r>
-              <a:rPr lang="fr-FR" dirty="0" smtClean="0"/>
-              <a:t> 172.16.21.16</a:t>
-            </a:r>
-            <a:r>
-              <a:rPr lang="fr-FR" dirty="0"/>
-              <a:t> </a:t>
-            </a:r>
-            <a:endParaRPr lang="fr-FR" dirty="0" smtClean="0"/>
-          </a:p>
-          <a:p>
-            <a:pPr marL="0" indent="0">
-              <a:buNone/>
-            </a:pPr>
-            <a:endParaRPr lang="fr-FR" dirty="0" smtClean="0"/>
-          </a:p>
-          <a:p>
-            <a:pPr marL="0" indent="0">
-              <a:buNone/>
-            </a:pPr>
-            <a:r>
-              <a:rPr lang="fr-FR" dirty="0" smtClean="0"/>
-              <a:t>Chaque étudiant est identifié par un indice</a:t>
-            </a:r>
-          </a:p>
-          <a:p>
-            <a:pPr marL="0" indent="0">
-              <a:buNone/>
-            </a:pPr>
-            <a:r>
-              <a:rPr lang="fr-FR" dirty="0" smtClean="0"/>
-              <a:t>s01…s07 et le mot de passe bienvenue</a:t>
-            </a:r>
-          </a:p>
-          <a:p>
-            <a:pPr marL="0" indent="0">
-              <a:buNone/>
-            </a:pPr>
-            <a:endParaRPr lang="fr-FR" dirty="0"/>
-          </a:p>
-          <a:p>
-            <a:pPr marL="0" indent="0">
-              <a:buNone/>
-            </a:pPr>
-            <a:r>
-              <a:rPr lang="fr-FR" dirty="0" smtClean="0"/>
-              <a:t>Chaque étudiant </a:t>
-            </a:r>
-          </a:p>
-          <a:p>
-            <a:r>
-              <a:rPr lang="fr-FR" dirty="0" smtClean="0"/>
-              <a:t>Groupe </a:t>
-            </a:r>
-            <a:r>
-              <a:rPr lang="fr-FR" dirty="0"/>
-              <a:t>: tp-devops-2526/</a:t>
-            </a:r>
-            <a:r>
-              <a:rPr lang="fr-FR" dirty="0" err="1"/>
-              <a:t>sXX</a:t>
-            </a:r>
-            <a:endParaRPr lang="fr-FR" dirty="0"/>
-          </a:p>
-          <a:p>
-            <a:r>
-              <a:rPr lang="fr-FR" dirty="0" smtClean="0"/>
-              <a:t>3 Repos </a:t>
-            </a:r>
-            <a:r>
-              <a:rPr lang="fr-FR" dirty="0"/>
-              <a:t>:</a:t>
-            </a:r>
-          </a:p>
-          <a:p>
-            <a:pPr lvl="1"/>
-            <a:r>
-              <a:rPr lang="fr-FR" dirty="0"/>
-              <a:t>infra: https://dvp-srv-gitlab.campus12avenue.fr/tp-devops-2526/sXX/infra.git</a:t>
-            </a:r>
-          </a:p>
-          <a:p>
-            <a:pPr lvl="1"/>
-            <a:r>
-              <a:rPr lang="fr-FR" dirty="0"/>
-              <a:t>api: https://dvp-srv-gitlab.campus12avenue.fr/tp-devops-2526/sXX/api.git</a:t>
-            </a:r>
-          </a:p>
-          <a:p>
-            <a:pPr lvl="1"/>
-            <a:r>
-              <a:rPr lang="fr-FR" dirty="0" err="1"/>
-              <a:t>gitops</a:t>
-            </a:r>
-            <a:r>
-              <a:rPr lang="fr-FR" dirty="0"/>
-              <a:t>: https://dvp-srv-gitlab.campus12avenue.fr/tp-devops-2526/sXX/gitops.git</a:t>
-            </a:r>
-          </a:p>
-          <a:p>
-            <a:pPr marL="0" indent="0">
-              <a:buNone/>
-            </a:pPr>
-            <a:r>
-              <a:rPr lang="fr-FR" sz="1200" dirty="0" smtClean="0"/>
-              <a:t>Où XX est </a:t>
-            </a:r>
-            <a:r>
-              <a:rPr lang="fr-FR" sz="1200" smtClean="0"/>
-              <a:t>votre indice</a:t>
-            </a:r>
-            <a:endParaRPr lang="fr-FR" sz="1200" dirty="0"/>
-          </a:p>
-          <a:p>
-            <a:pPr marL="0" indent="0">
-              <a:buNone/>
-            </a:pPr>
-            <a:endParaRPr lang="fr-FR" sz="1200" dirty="0"/>
-          </a:p>
-        </p:txBody>
-      </p:sp>
-    </p:spTree>
-    <p:extLst>
-      <p:ext uri="{BB962C8B-B14F-4D97-AF65-F5344CB8AC3E}">
-        <p14:creationId xmlns:p14="http://schemas.microsoft.com/office/powerpoint/2010/main" val="382485659"/>
-      </p:ext>
-    </p:extLst>
-  </p:cSld>
-  <p:clrMapOvr>
-    <a:masterClrMapping/>
-  </p:clrMapOvr>
-</p:sld>
-</file>
-
 <file path=ppt/slides/slide5.xml><?xml version="1.0" encoding="utf-8"?>
 <p:sld xmlns:a="http://schemas.openxmlformats.org/drawingml/2006/main" xmlns:r="http://schemas.openxmlformats.org/officeDocument/2006/relationships" xmlns:p="http://schemas.openxmlformats.org/presentationml/2006/main">
   <p:cSld>
@@ -18933,10 +19640,24 @@
           <a:lstStyle/>
           <a:p>
             <a:r>
-              <a:rPr lang="fr-FR" sz="2400" dirty="0" smtClean="0"/>
-              <a:t>xxx</a:t>
-            </a:r>
-            <a:endParaRPr lang="fr-FR" sz="2400" dirty="0"/>
+              <a:rPr lang="fr-FR" dirty="0" err="1" smtClean="0"/>
+              <a:t>Devcontainers</a:t>
+            </a:r>
+            <a:r>
+              <a:rPr lang="fr-FR" dirty="0"/>
+              <a:t/>
+            </a:r>
+            <a:br>
+              <a:rPr lang="fr-FR" dirty="0"/>
+            </a:br>
+            <a:r>
+              <a:rPr lang="fr-FR" sz="1400" dirty="0" err="1"/>
+              <a:t>DevContainer</a:t>
+            </a:r>
+            <a:r>
+              <a:rPr lang="fr-FR" sz="1400" dirty="0"/>
+              <a:t> : environnement de développement reproductible</a:t>
+            </a:r>
           </a:p>
         </p:txBody>
       </p:sp>
@@ -18952,43 +19673,172 @@
         </p:nvSpPr>
         <p:spPr>
           <a:xfrm>
-            <a:off x="177451" y="993643"/>
-            <a:ext cx="8047211" cy="3568458"/>
+            <a:off x="673360" y="1076326"/>
+            <a:ext cx="8047211" cy="1522468"/>
           </a:xfrm>
         </p:spPr>
         <p:txBody>
-          <a:bodyPr>
-            <a:normAutofit/>
-          </a:bodyPr>
+          <a:bodyPr/>
           <a:lstStyle/>
           <a:p>
-            <a:pPr marL="0" indent="0">
-              <a:buNone/>
-            </a:pPr>
-            <a:r>
-              <a:rPr lang="fr-FR" sz="1200" b="1" dirty="0" smtClean="0"/>
-              <a:t>xxx</a:t>
-            </a:r>
-            <a:endParaRPr lang="fr-FR" sz="1200" dirty="0"/>
-          </a:p>
-          <a:p>
-            <a:pPr marL="0" indent="0">
-              <a:buNone/>
-            </a:pPr>
-            <a:endParaRPr lang="fr-FR" sz="1200" dirty="0"/>
-          </a:p>
-          <a:p>
-            <a:pPr marL="0" indent="0">
-              <a:buNone/>
-            </a:pPr>
-            <a:endParaRPr lang="fr-FR" sz="1200" dirty="0"/>
+            <a:r>
+              <a:rPr lang="fr-FR" b="1" dirty="0"/>
+              <a:t>Fonctionnement</a:t>
+            </a:r>
+          </a:p>
+          <a:p>
+            <a:pPr lvl="1"/>
+            <a:r>
+              <a:rPr lang="fr-FR" b="1" dirty="0" smtClean="0"/>
+              <a:t>VS </a:t>
+            </a:r>
+            <a:r>
+              <a:rPr lang="fr-FR" b="1" dirty="0"/>
+              <a:t>Code lit</a:t>
+            </a:r>
+            <a:r>
+              <a:rPr lang="fr-FR" dirty="0"/>
+              <a:t> .</a:t>
+            </a:r>
+            <a:r>
+              <a:rPr lang="fr-FR" dirty="0" err="1"/>
+              <a:t>devcontainer</a:t>
+            </a:r>
+            <a:r>
+              <a:rPr lang="fr-FR" dirty="0"/>
+              <a:t>/</a:t>
+            </a:r>
+            <a:r>
+              <a:rPr lang="fr-FR" dirty="0" err="1"/>
+              <a:t>devcontainer.json</a:t>
+            </a:r>
+            <a:endParaRPr lang="fr-FR" dirty="0"/>
+          </a:p>
+          <a:p>
+            <a:pPr lvl="1"/>
+            <a:r>
+              <a:rPr lang="fr-FR" b="1" dirty="0"/>
+              <a:t>Docker crée</a:t>
+            </a:r>
+            <a:r>
+              <a:rPr lang="fr-FR" dirty="0"/>
+              <a:t> le container avec l’image spécifiée</a:t>
+            </a:r>
+          </a:p>
+          <a:p>
+            <a:pPr lvl="1"/>
+            <a:r>
+              <a:rPr lang="fr-FR" b="1" dirty="0"/>
+              <a:t>VS Code Server</a:t>
+            </a:r>
+            <a:r>
+              <a:rPr lang="fr-FR" dirty="0"/>
+              <a:t> s’installe dans le container</a:t>
+            </a:r>
+          </a:p>
+          <a:p>
+            <a:pPr lvl="1"/>
+            <a:r>
+              <a:rPr lang="fr-FR" b="1" dirty="0"/>
+              <a:t>Extensions</a:t>
+            </a:r>
+            <a:r>
+              <a:rPr lang="fr-FR" dirty="0"/>
+              <a:t> et </a:t>
+            </a:r>
+            <a:r>
+              <a:rPr lang="fr-FR" b="1" dirty="0"/>
+              <a:t>dépendances</a:t>
+            </a:r>
+            <a:r>
+              <a:rPr lang="fr-FR" dirty="0"/>
+              <a:t> s’installent automatiquement</a:t>
+            </a:r>
+          </a:p>
+          <a:p>
+            <a:pPr lvl="1"/>
+            <a:r>
+              <a:rPr lang="fr-FR" b="1" dirty="0"/>
+              <a:t>Votre code</a:t>
+            </a:r>
+            <a:r>
+              <a:rPr lang="fr-FR" dirty="0"/>
+              <a:t> est monté dans le container (volume)</a:t>
+            </a:r>
+          </a:p>
+          <a:p>
+            <a:endParaRPr lang="fr-FR" dirty="0"/>
           </a:p>
         </p:txBody>
       </p:sp>
+      <p:pic>
+        <p:nvPicPr>
+          <p:cNvPr id="1026" name="Picture 2"/>
+          <p:cNvPicPr>
+            <a:picLocks noChangeAspect="1" noChangeArrowheads="1"/>
+          </p:cNvPicPr>
+          <p:nvPr/>
+        </p:nvPicPr>
+        <p:blipFill>
+          <a:blip r:embed="rId2">
+            <a:extLst>
+              <a:ext uri="{28A0092B-C50C-407E-A947-70E740481C1C}">
+                <a14:useLocalDpi xmlns:a14="http://schemas.microsoft.com/office/drawing/2010/main" val="0"/>
+              </a:ext>
+            </a:extLst>
+          </a:blip>
+          <a:srcRect/>
+          <a:stretch>
+            <a:fillRect/>
+          </a:stretch>
+        </p:blipFill>
+        <p:spPr bwMode="auto">
+          <a:xfrm>
+            <a:off x="1485900" y="2449587"/>
+            <a:ext cx="5905500" cy="2403401"/>
+          </a:xfrm>
+          <a:prstGeom prst="rect">
+            <a:avLst/>
+          </a:prstGeom>
+          <a:noFill/>
+          <a:ln>
+            <a:noFill/>
+          </a:ln>
+          <a:effectLst/>
+          <a:extLst>
+            <a:ext uri="{909E8E84-426E-40DD-AFC4-6F175D3DCCD1}">
+              <a14:hiddenFill xmlns:a14="http://schemas.microsoft.com/office/drawing/2010/main">
+                <a:solidFill>
+                  <a:schemeClr val="accent1"/>
+                </a:solidFill>
+              </a14:hiddenFill>
+            </a:ext>
+            <a:ext uri="{91240B29-F687-4F45-9708-019B960494DF}">
+              <a14:hiddenLine xmlns:a14="http://schemas.microsoft.com/office/drawing/2010/main" w="9525">
+                <a:solidFill>
+                  <a:schemeClr val="tx1"/>
+                </a:solidFill>
+                <a:miter lim="800000"/>
+                <a:headEnd/>
+                <a:tailEnd/>
+              </a14:hiddenLine>
+            </a:ext>
+            <a:ext uri="{AF507438-7753-43E0-B8FC-AC1667EBCBE1}">
+              <a14:hiddenEffects xmlns:a14="http://schemas.microsoft.com/office/drawing/2010/main">
+                <a:effectLst>
+                  <a:outerShdw dist="35921" dir="2700000" algn="ctr" rotWithShape="0">
+                    <a:schemeClr val="bg2"/>
+                  </a:outerShdw>
+                </a:effectLst>
+              </a14:hiddenEffects>
+            </a:ext>
+          </a:extLst>
+        </p:spPr>
+      </p:pic>
     </p:spTree>
     <p:extLst>
       <p:ext uri="{BB962C8B-B14F-4D97-AF65-F5344CB8AC3E}">
-        <p14:creationId xmlns:p14="http://schemas.microsoft.com/office/powerpoint/2010/main" val="3300439207"/>
+        <p14:creationId xmlns:p14="http://schemas.microsoft.com/office/powerpoint/2010/main" val="1762689986"/>
       </p:ext>
     </p:extLst>
   </p:cSld>
@@ -19017,6 +19867,82 @@
       </p:grpSpPr>
       <p:sp>
         <p:nvSpPr>
+          <p:cNvPr id="8" name="Rectangle à coins arrondis 7"/>
+          <p:cNvSpPr/>
+          <p:nvPr/>
+        </p:nvSpPr>
+        <p:spPr>
+          <a:xfrm>
+            <a:off x="3114674" y="2114549"/>
+            <a:ext cx="3514726" cy="1676401"/>
+          </a:xfrm>
+          <a:prstGeom prst="roundRect">
+            <a:avLst/>
+          </a:prstGeom>
+        </p:spPr>
+        <p:style>
+          <a:lnRef idx="2">
+            <a:schemeClr val="accent1"/>
+          </a:lnRef>
+          <a:fillRef idx="1">
+            <a:schemeClr val="lt1"/>
+          </a:fillRef>
+          <a:effectRef idx="0">
+            <a:schemeClr val="accent1"/>
+          </a:effectRef>
+          <a:fontRef idx="minor">
+            <a:schemeClr val="dk1"/>
+          </a:fontRef>
+        </p:style>
+        <p:txBody>
+          <a:bodyPr rtlCol="0" anchor="ctr"/>
+          <a:lstStyle/>
+          <a:p>
+            <a:pPr algn="ctr"/>
+            <a:endParaRPr lang="fr-FR"/>
+          </a:p>
+        </p:txBody>
+      </p:sp>
+      <p:sp>
+        <p:nvSpPr>
+          <p:cNvPr id="16" name="Rectangle à coins arrondis 15"/>
+          <p:cNvSpPr/>
+          <p:nvPr/>
+        </p:nvSpPr>
+        <p:spPr>
+          <a:xfrm>
+            <a:off x="4218250" y="2733673"/>
+            <a:ext cx="1364720" cy="990601"/>
+          </a:xfrm>
+          <a:prstGeom prst="roundRect">
+            <a:avLst/>
+          </a:prstGeom>
+        </p:spPr>
+        <p:style>
+          <a:lnRef idx="2">
+            <a:schemeClr val="accent1"/>
+          </a:lnRef>
+          <a:fillRef idx="1">
+            <a:schemeClr val="lt1"/>
+          </a:fillRef>
+          <a:effectRef idx="0">
+            <a:schemeClr val="accent1"/>
+          </a:effectRef>
+          <a:fontRef idx="minor">
+            <a:schemeClr val="dk1"/>
+          </a:fontRef>
+        </p:style>
+        <p:txBody>
+          <a:bodyPr rtlCol="0" anchor="ctr"/>
+          <a:lstStyle/>
+          <a:p>
+            <a:pPr algn="ctr"/>
+            <a:endParaRPr lang="fr-FR"/>
+          </a:p>
+        </p:txBody>
+      </p:sp>
+      <p:sp>
+        <p:nvSpPr>
           <p:cNvPr id="2" name="Titre 1"/>
           <p:cNvSpPr>
             <a:spLocks noGrp="1"/>
@@ -19031,10 +19957,24 @@
           <a:lstStyle/>
           <a:p>
             <a:r>
-              <a:rPr lang="fr-FR" sz="2400" dirty="0" smtClean="0"/>
-              <a:t>xxx</a:t>
-            </a:r>
-            <a:endParaRPr lang="fr-FR" sz="2400" dirty="0"/>
+              <a:rPr lang="fr-FR" dirty="0" err="1" smtClean="0"/>
+              <a:t>Devcontainers</a:t>
+            </a:r>
+            <a:r>
+              <a:rPr lang="fr-FR" dirty="0"/>
+              <a:t/>
+            </a:r>
+            <a:br>
+              <a:rPr lang="fr-FR" dirty="0"/>
+            </a:br>
+            <a:r>
+              <a:rPr lang="fr-FR" sz="1400" dirty="0" err="1"/>
+              <a:t>DevContainer</a:t>
+            </a:r>
+            <a:r>
+              <a:rPr lang="fr-FR" sz="1400" dirty="0"/>
+              <a:t> : environnement de développement reproductible</a:t>
+            </a:r>
           </a:p>
         </p:txBody>
       </p:sp>
@@ -19050,43 +19990,831 @@
         </p:nvSpPr>
         <p:spPr>
           <a:xfrm>
-            <a:off x="177451" y="993643"/>
-            <a:ext cx="8047211" cy="3568458"/>
+            <a:off x="673360" y="1076326"/>
+            <a:ext cx="8047211" cy="434991"/>
           </a:xfrm>
         </p:spPr>
         <p:txBody>
-          <a:bodyPr>
-            <a:normAutofit/>
+          <a:bodyPr/>
+          <a:lstStyle/>
+          <a:p>
+            <a:r>
+              <a:rPr lang="fr-FR" b="1" dirty="0" smtClean="0"/>
+              <a:t>Application à notre TP</a:t>
+            </a:r>
+            <a:endParaRPr lang="fr-FR" b="1" dirty="0"/>
+          </a:p>
+          <a:p>
+            <a:endParaRPr lang="fr-FR" dirty="0"/>
+          </a:p>
+        </p:txBody>
+      </p:sp>
+      <p:sp>
+        <p:nvSpPr>
+          <p:cNvPr id="4" name="Rectangle à coins arrondis 3"/>
+          <p:cNvSpPr/>
+          <p:nvPr/>
+        </p:nvSpPr>
+        <p:spPr>
+          <a:xfrm>
+            <a:off x="942975" y="2114549"/>
+            <a:ext cx="1038225" cy="1114425"/>
+          </a:xfrm>
+          <a:prstGeom prst="roundRect">
+            <a:avLst/>
+          </a:prstGeom>
+        </p:spPr>
+        <p:style>
+          <a:lnRef idx="2">
+            <a:schemeClr val="accent1"/>
+          </a:lnRef>
+          <a:fillRef idx="1">
+            <a:schemeClr val="lt1"/>
+          </a:fillRef>
+          <a:effectRef idx="0">
+            <a:schemeClr val="accent1"/>
+          </a:effectRef>
+          <a:fontRef idx="minor">
+            <a:schemeClr val="dk1"/>
+          </a:fontRef>
+        </p:style>
+        <p:txBody>
+          <a:bodyPr rtlCol="0" anchor="ctr"/>
+          <a:lstStyle/>
+          <a:p>
+            <a:pPr algn="ctr"/>
+            <a:endParaRPr lang="fr-FR"/>
+          </a:p>
+        </p:txBody>
+      </p:sp>
+      <p:sp>
+        <p:nvSpPr>
+          <p:cNvPr id="5" name="ZoneTexte 4"/>
+          <p:cNvSpPr txBox="1"/>
+          <p:nvPr/>
+        </p:nvSpPr>
+        <p:spPr>
+          <a:xfrm>
+            <a:off x="1013887" y="2142441"/>
+            <a:ext cx="896399" cy="215444"/>
+          </a:xfrm>
+          <a:prstGeom prst="rect">
+            <a:avLst/>
+          </a:prstGeom>
+          <a:noFill/>
+        </p:spPr>
+        <p:txBody>
+          <a:bodyPr wrap="none" rtlCol="0">
+            <a:spAutoFit/>
           </a:bodyPr>
           <a:lstStyle/>
           <a:p>
-            <a:pPr marL="0" indent="0">
-              <a:buNone/>
-            </a:pPr>
-            <a:r>
-              <a:rPr lang="fr-FR" sz="1200" b="1" dirty="0" smtClean="0"/>
-              <a:t>xxx</a:t>
+            <a:r>
+              <a:rPr lang="fr-FR" sz="800" dirty="0" smtClean="0"/>
+              <a:t>Poste de travail</a:t>
+            </a:r>
+            <a:endParaRPr lang="fr-FR" sz="800" dirty="0"/>
+          </a:p>
+        </p:txBody>
+      </p:sp>
+      <p:sp>
+        <p:nvSpPr>
+          <p:cNvPr id="7" name="Rectangle à coins arrondis 6"/>
+          <p:cNvSpPr/>
+          <p:nvPr/>
+        </p:nvSpPr>
+        <p:spPr>
+          <a:xfrm>
+            <a:off x="1054630" y="2545556"/>
+            <a:ext cx="814911" cy="557212"/>
+          </a:xfrm>
+          <a:prstGeom prst="roundRect">
+            <a:avLst/>
+          </a:prstGeom>
+        </p:spPr>
+        <p:style>
+          <a:lnRef idx="2">
+            <a:schemeClr val="accent1"/>
+          </a:lnRef>
+          <a:fillRef idx="1">
+            <a:schemeClr val="lt1"/>
+          </a:fillRef>
+          <a:effectRef idx="0">
+            <a:schemeClr val="accent1"/>
+          </a:effectRef>
+          <a:fontRef idx="minor">
+            <a:schemeClr val="dk1"/>
+          </a:fontRef>
+        </p:style>
+        <p:txBody>
+          <a:bodyPr rtlCol="0" anchor="ctr"/>
+          <a:lstStyle/>
+          <a:p>
+            <a:pPr algn="ctr"/>
+            <a:r>
+              <a:rPr lang="fr-FR" sz="1200" dirty="0" err="1" smtClean="0"/>
+              <a:t>vscode</a:t>
             </a:r>
             <a:endParaRPr lang="fr-FR" sz="1200" dirty="0"/>
           </a:p>
-          <a:p>
-            <a:pPr marL="0" indent="0">
-              <a:buNone/>
-            </a:pPr>
+        </p:txBody>
+      </p:sp>
+      <p:sp>
+        <p:nvSpPr>
+          <p:cNvPr id="9" name="ZoneTexte 8"/>
+          <p:cNvSpPr txBox="1"/>
+          <p:nvPr/>
+        </p:nvSpPr>
+        <p:spPr>
+          <a:xfrm>
+            <a:off x="5050982" y="2188608"/>
+            <a:ext cx="1494320" cy="461665"/>
+          </a:xfrm>
+          <a:prstGeom prst="rect">
+            <a:avLst/>
+          </a:prstGeom>
+          <a:noFill/>
+        </p:spPr>
+        <p:txBody>
+          <a:bodyPr wrap="none" rtlCol="0">
+            <a:spAutoFit/>
+          </a:bodyPr>
+          <a:lstStyle/>
+          <a:p>
+            <a:r>
+              <a:rPr lang="fr-FR" sz="800" dirty="0" smtClean="0"/>
+              <a:t>Serveur de container</a:t>
+            </a:r>
+            <a:r>
+              <a:rPr lang="fr-FR" sz="800" dirty="0"/>
+              <a:t/>
+            </a:r>
+            <a:br>
+              <a:rPr lang="fr-FR" sz="800" dirty="0"/>
+            </a:br>
+            <a:r>
+              <a:rPr lang="fr-FR" sz="800" dirty="0"/>
+              <a:t>172.16.20.123</a:t>
+            </a:r>
+            <a:br>
+              <a:rPr lang="fr-FR" sz="800" dirty="0"/>
+            </a:br>
+            <a:r>
+              <a:rPr lang="fr-FR" sz="800" dirty="0" err="1" smtClean="0"/>
+              <a:t>dvp</a:t>
+            </a:r>
+            <a:r>
+              <a:rPr lang="fr-FR" sz="800" dirty="0" smtClean="0"/>
+              <a:t>-</a:t>
+            </a:r>
+            <a:r>
+              <a:rPr lang="fr-FR" sz="800" dirty="0" err="1" smtClean="0"/>
+              <a:t>srv</a:t>
+            </a:r>
+            <a:r>
+              <a:rPr lang="fr-FR" sz="800" dirty="0" smtClean="0"/>
+              <a:t>-</a:t>
+            </a:r>
+            <a:r>
+              <a:rPr lang="fr-FR" sz="800" dirty="0" err="1" smtClean="0"/>
+              <a:t>devcontainer</a:t>
+            </a:r>
+            <a:r>
+              <a:rPr lang="fr-FR" sz="800" dirty="0" smtClean="0"/>
+              <a:t>-master</a:t>
+            </a:r>
+            <a:endParaRPr lang="fr-FR" sz="800" dirty="0"/>
+          </a:p>
+        </p:txBody>
+      </p:sp>
+      <p:sp>
+        <p:nvSpPr>
+          <p:cNvPr id="10" name="Rectangle à coins arrondis 9"/>
+          <p:cNvSpPr/>
+          <p:nvPr/>
+        </p:nvSpPr>
+        <p:spPr>
+          <a:xfrm>
+            <a:off x="3226330" y="2545556"/>
+            <a:ext cx="814911" cy="557212"/>
+          </a:xfrm>
+          <a:prstGeom prst="roundRect">
+            <a:avLst/>
+          </a:prstGeom>
+        </p:spPr>
+        <p:style>
+          <a:lnRef idx="2">
+            <a:schemeClr val="accent1"/>
+          </a:lnRef>
+          <a:fillRef idx="1">
+            <a:schemeClr val="lt1"/>
+          </a:fillRef>
+          <a:effectRef idx="0">
+            <a:schemeClr val="accent1"/>
+          </a:effectRef>
+          <a:fontRef idx="minor">
+            <a:schemeClr val="dk1"/>
+          </a:fontRef>
+        </p:style>
+        <p:txBody>
+          <a:bodyPr rtlCol="0" anchor="ctr"/>
+          <a:lstStyle/>
+          <a:p>
+            <a:pPr algn="ctr"/>
+            <a:r>
+              <a:rPr lang="fr-FR" sz="1200" dirty="0" err="1" smtClean="0"/>
+              <a:t>Vscode</a:t>
+            </a:r>
+            <a:r>
+              <a:rPr lang="fr-FR" sz="1200" dirty="0" smtClean="0"/>
+              <a:t/>
+            </a:r>
+            <a:br>
+              <a:rPr lang="fr-FR" sz="1200" dirty="0" smtClean="0"/>
+            </a:br>
+            <a:r>
+              <a:rPr lang="fr-FR" sz="1200" dirty="0" smtClean="0"/>
+              <a:t>server</a:t>
+            </a:r>
             <a:endParaRPr lang="fr-FR" sz="1200" dirty="0"/>
           </a:p>
-          <a:p>
-            <a:pPr marL="0" indent="0">
-              <a:buNone/>
-            </a:pPr>
+        </p:txBody>
+      </p:sp>
+      <p:cxnSp>
+        <p:nvCxnSpPr>
+          <p:cNvPr id="11" name="Connecteur droit avec flèche 10"/>
+          <p:cNvCxnSpPr>
+            <a:endCxn id="10" idx="1"/>
+          </p:cNvCxnSpPr>
+          <p:nvPr/>
+        </p:nvCxnSpPr>
+        <p:spPr>
+          <a:xfrm>
+            <a:off x="1869541" y="2824162"/>
+            <a:ext cx="1356789" cy="0"/>
+          </a:xfrm>
+          <a:prstGeom prst="straightConnector1">
+            <a:avLst/>
+          </a:prstGeom>
+          <a:ln>
+            <a:tailEnd type="arrow"/>
+          </a:ln>
+        </p:spPr>
+        <p:style>
+          <a:lnRef idx="1">
+            <a:schemeClr val="accent1"/>
+          </a:lnRef>
+          <a:fillRef idx="0">
+            <a:schemeClr val="accent1"/>
+          </a:fillRef>
+          <a:effectRef idx="0">
+            <a:schemeClr val="accent1"/>
+          </a:effectRef>
+          <a:fontRef idx="minor">
+            <a:schemeClr val="tx1"/>
+          </a:fontRef>
+        </p:style>
+      </p:cxnSp>
+      <p:sp>
+        <p:nvSpPr>
+          <p:cNvPr id="13" name="ZoneTexte 12"/>
+          <p:cNvSpPr txBox="1"/>
+          <p:nvPr/>
+        </p:nvSpPr>
+        <p:spPr>
+          <a:xfrm>
+            <a:off x="2180687" y="2863067"/>
+            <a:ext cx="734496" cy="338554"/>
+          </a:xfrm>
+          <a:prstGeom prst="rect">
+            <a:avLst/>
+          </a:prstGeom>
+          <a:noFill/>
+        </p:spPr>
+        <p:txBody>
+          <a:bodyPr wrap="none" rtlCol="0">
+            <a:spAutoFit/>
+          </a:bodyPr>
+          <a:lstStyle/>
+          <a:p>
+            <a:r>
+              <a:rPr lang="fr-FR" sz="800" dirty="0" err="1" smtClean="0"/>
+              <a:t>Remote</a:t>
+            </a:r>
+            <a:r>
+              <a:rPr lang="fr-FR" sz="800" dirty="0" smtClean="0"/>
+              <a:t> </a:t>
+            </a:r>
+            <a:r>
+              <a:rPr lang="fr-FR" sz="800" dirty="0" err="1" smtClean="0"/>
+              <a:t>ssh</a:t>
+            </a:r>
+            <a:r>
+              <a:rPr lang="fr-FR" sz="800" dirty="0" smtClean="0"/>
+              <a:t/>
+            </a:r>
+            <a:br>
+              <a:rPr lang="fr-FR" sz="800" dirty="0" smtClean="0"/>
+            </a:br>
+            <a:r>
+              <a:rPr lang="fr-FR" sz="800" dirty="0" smtClean="0"/>
+              <a:t>user </a:t>
+            </a:r>
+            <a:r>
+              <a:rPr lang="fr-FR" sz="800" dirty="0" err="1" smtClean="0"/>
+              <a:t>sxx</a:t>
+            </a:r>
+            <a:endParaRPr lang="fr-FR" sz="800" dirty="0"/>
+          </a:p>
+        </p:txBody>
+      </p:sp>
+      <p:sp>
+        <p:nvSpPr>
+          <p:cNvPr id="15" name="Rectangle à coins arrondis 14"/>
+          <p:cNvSpPr/>
+          <p:nvPr/>
+        </p:nvSpPr>
+        <p:spPr>
+          <a:xfrm>
+            <a:off x="4493155" y="3102768"/>
+            <a:ext cx="814911" cy="557212"/>
+          </a:xfrm>
+          <a:prstGeom prst="roundRect">
+            <a:avLst/>
+          </a:prstGeom>
+        </p:spPr>
+        <p:style>
+          <a:lnRef idx="2">
+            <a:schemeClr val="accent1"/>
+          </a:lnRef>
+          <a:fillRef idx="1">
+            <a:schemeClr val="lt1"/>
+          </a:fillRef>
+          <a:effectRef idx="0">
+            <a:schemeClr val="accent1"/>
+          </a:effectRef>
+          <a:fontRef idx="minor">
+            <a:schemeClr val="dk1"/>
+          </a:fontRef>
+        </p:style>
+        <p:txBody>
+          <a:bodyPr rtlCol="0" anchor="ctr"/>
+          <a:lstStyle/>
+          <a:p>
+            <a:pPr algn="ctr"/>
+            <a:r>
+              <a:rPr lang="fr-FR" sz="1200" dirty="0" err="1" smtClean="0"/>
+              <a:t>Vscode</a:t>
+            </a:r>
+            <a:r>
+              <a:rPr lang="fr-FR" sz="1200" dirty="0" smtClean="0"/>
+              <a:t/>
+            </a:r>
+            <a:br>
+              <a:rPr lang="fr-FR" sz="1200" dirty="0" smtClean="0"/>
+            </a:br>
+            <a:r>
+              <a:rPr lang="fr-FR" sz="1200" dirty="0" smtClean="0"/>
+              <a:t>server</a:t>
+            </a:r>
             <a:endParaRPr lang="fr-FR" sz="1200" dirty="0"/>
+          </a:p>
+        </p:txBody>
+      </p:sp>
+      <p:sp>
+        <p:nvSpPr>
+          <p:cNvPr id="17" name="ZoneTexte 16"/>
+          <p:cNvSpPr txBox="1"/>
+          <p:nvPr/>
+        </p:nvSpPr>
+        <p:spPr>
+          <a:xfrm>
+            <a:off x="4328849" y="2816900"/>
+            <a:ext cx="631904" cy="215444"/>
+          </a:xfrm>
+          <a:prstGeom prst="rect">
+            <a:avLst/>
+          </a:prstGeom>
+          <a:noFill/>
+        </p:spPr>
+        <p:txBody>
+          <a:bodyPr wrap="none" rtlCol="0">
+            <a:spAutoFit/>
+          </a:bodyPr>
+          <a:lstStyle/>
+          <a:p>
+            <a:r>
+              <a:rPr lang="fr-FR" sz="800" dirty="0" smtClean="0"/>
+              <a:t>Container</a:t>
+            </a:r>
+            <a:endParaRPr lang="fr-FR" sz="800" dirty="0"/>
+          </a:p>
+        </p:txBody>
+      </p:sp>
+      <p:cxnSp>
+        <p:nvCxnSpPr>
+          <p:cNvPr id="18" name="Connecteur en angle 17"/>
+          <p:cNvCxnSpPr>
+            <a:stCxn id="10" idx="2"/>
+            <a:endCxn id="16" idx="1"/>
+          </p:cNvCxnSpPr>
+          <p:nvPr/>
+        </p:nvCxnSpPr>
+        <p:spPr>
+          <a:xfrm rot="16200000" flipH="1">
+            <a:off x="3862915" y="2873639"/>
+            <a:ext cx="126206" cy="584464"/>
+          </a:xfrm>
+          <a:prstGeom prst="bentConnector2">
+            <a:avLst/>
+          </a:prstGeom>
+          <a:ln>
+            <a:tailEnd type="arrow"/>
+          </a:ln>
+        </p:spPr>
+        <p:style>
+          <a:lnRef idx="1">
+            <a:schemeClr val="accent1"/>
+          </a:lnRef>
+          <a:fillRef idx="0">
+            <a:schemeClr val="accent1"/>
+          </a:fillRef>
+          <a:effectRef idx="0">
+            <a:schemeClr val="accent1"/>
+          </a:effectRef>
+          <a:fontRef idx="minor">
+            <a:schemeClr val="tx1"/>
+          </a:fontRef>
+        </p:style>
+      </p:cxnSp>
+      <p:sp>
+        <p:nvSpPr>
+          <p:cNvPr id="20" name="ZoneTexte 19"/>
+          <p:cNvSpPr txBox="1"/>
+          <p:nvPr/>
+        </p:nvSpPr>
+        <p:spPr>
+          <a:xfrm>
+            <a:off x="3365517" y="3273652"/>
+            <a:ext cx="609462" cy="461665"/>
+          </a:xfrm>
+          <a:prstGeom prst="rect">
+            <a:avLst/>
+          </a:prstGeom>
+          <a:noFill/>
+        </p:spPr>
+        <p:txBody>
+          <a:bodyPr wrap="none" rtlCol="0">
+            <a:spAutoFit/>
+          </a:bodyPr>
+          <a:lstStyle/>
+          <a:p>
+            <a:r>
+              <a:rPr lang="fr-FR" sz="800" dirty="0" err="1" smtClean="0"/>
+              <a:t>Reopen</a:t>
+            </a:r>
+            <a:r>
+              <a:rPr lang="fr-FR" sz="800" dirty="0" smtClean="0"/>
+              <a:t> </a:t>
+            </a:r>
+            <a:br>
+              <a:rPr lang="fr-FR" sz="800" dirty="0" smtClean="0"/>
+            </a:br>
+            <a:r>
+              <a:rPr lang="fr-FR" sz="800" dirty="0" smtClean="0"/>
+              <a:t>in </a:t>
+            </a:r>
+            <a:br>
+              <a:rPr lang="fr-FR" sz="800" dirty="0" smtClean="0"/>
+            </a:br>
+            <a:r>
+              <a:rPr lang="fr-FR" sz="800" dirty="0" smtClean="0"/>
+              <a:t>container</a:t>
+            </a:r>
+            <a:endParaRPr lang="fr-FR" sz="800" dirty="0"/>
+          </a:p>
+        </p:txBody>
+      </p:sp>
+      <p:cxnSp>
+        <p:nvCxnSpPr>
+          <p:cNvPr id="21" name="Connecteur en angle 20"/>
+          <p:cNvCxnSpPr>
+            <a:stCxn id="7" idx="3"/>
+            <a:endCxn id="16" idx="2"/>
+          </p:cNvCxnSpPr>
+          <p:nvPr/>
+        </p:nvCxnSpPr>
+        <p:spPr>
+          <a:xfrm>
+            <a:off x="1869541" y="2824162"/>
+            <a:ext cx="3031069" cy="900112"/>
+          </a:xfrm>
+          <a:prstGeom prst="bentConnector4">
+            <a:avLst>
+              <a:gd name="adj1" fmla="val 92"/>
+              <a:gd name="adj2" fmla="val 125397"/>
+            </a:avLst>
+          </a:prstGeom>
+          <a:ln>
+            <a:tailEnd type="arrow"/>
+          </a:ln>
+        </p:spPr>
+        <p:style>
+          <a:lnRef idx="1">
+            <a:schemeClr val="accent1"/>
+          </a:lnRef>
+          <a:fillRef idx="0">
+            <a:schemeClr val="accent1"/>
+          </a:fillRef>
+          <a:effectRef idx="0">
+            <a:schemeClr val="accent1"/>
+          </a:effectRef>
+          <a:fontRef idx="minor">
+            <a:schemeClr val="tx1"/>
+          </a:fontRef>
+        </p:style>
+      </p:cxnSp>
+      <p:sp>
+        <p:nvSpPr>
+          <p:cNvPr id="24" name="ZoneTexte 23"/>
+          <p:cNvSpPr txBox="1"/>
+          <p:nvPr/>
+        </p:nvSpPr>
+        <p:spPr>
+          <a:xfrm>
+            <a:off x="2426748" y="2551568"/>
+            <a:ext cx="242374" cy="215444"/>
+          </a:xfrm>
+          <a:prstGeom prst="rect">
+            <a:avLst/>
+          </a:prstGeom>
+          <a:noFill/>
+        </p:spPr>
+        <p:txBody>
+          <a:bodyPr wrap="none" rtlCol="0">
+            <a:spAutoFit/>
+          </a:bodyPr>
+          <a:lstStyle/>
+          <a:p>
+            <a:r>
+              <a:rPr lang="fr-FR" sz="800" dirty="0" smtClean="0"/>
+              <a:t>1</a:t>
+            </a:r>
+            <a:endParaRPr lang="fr-FR" sz="800" dirty="0"/>
+          </a:p>
+        </p:txBody>
+      </p:sp>
+      <p:sp>
+        <p:nvSpPr>
+          <p:cNvPr id="25" name="ZoneTexte 24"/>
+          <p:cNvSpPr txBox="1"/>
+          <p:nvPr/>
+        </p:nvSpPr>
+        <p:spPr>
+          <a:xfrm>
+            <a:off x="3549061" y="2336124"/>
+            <a:ext cx="242374" cy="215444"/>
+          </a:xfrm>
+          <a:prstGeom prst="rect">
+            <a:avLst/>
+          </a:prstGeom>
+          <a:noFill/>
+        </p:spPr>
+        <p:txBody>
+          <a:bodyPr wrap="none" rtlCol="0">
+            <a:spAutoFit/>
+          </a:bodyPr>
+          <a:lstStyle/>
+          <a:p>
+            <a:r>
+              <a:rPr lang="fr-FR" sz="800" dirty="0" smtClean="0"/>
+              <a:t>2</a:t>
+            </a:r>
+            <a:endParaRPr lang="fr-FR" sz="800" dirty="0"/>
+          </a:p>
+        </p:txBody>
+      </p:sp>
+      <p:sp>
+        <p:nvSpPr>
+          <p:cNvPr id="26" name="ZoneTexte 25"/>
+          <p:cNvSpPr txBox="1"/>
+          <p:nvPr/>
+        </p:nvSpPr>
+        <p:spPr>
+          <a:xfrm>
+            <a:off x="3951267" y="3273650"/>
+            <a:ext cx="242374" cy="215444"/>
+          </a:xfrm>
+          <a:prstGeom prst="rect">
+            <a:avLst/>
+          </a:prstGeom>
+          <a:noFill/>
+        </p:spPr>
+        <p:txBody>
+          <a:bodyPr wrap="none" rtlCol="0">
+            <a:spAutoFit/>
+          </a:bodyPr>
+          <a:lstStyle/>
+          <a:p>
+            <a:r>
+              <a:rPr lang="fr-FR" sz="800" dirty="0"/>
+              <a:t>3</a:t>
+            </a:r>
+            <a:endParaRPr lang="fr-FR" sz="800" dirty="0"/>
+          </a:p>
+        </p:txBody>
+      </p:sp>
+      <p:sp>
+        <p:nvSpPr>
+          <p:cNvPr id="27" name="Rectangle à coins arrondis 26"/>
+          <p:cNvSpPr/>
+          <p:nvPr/>
+        </p:nvSpPr>
+        <p:spPr>
+          <a:xfrm>
+            <a:off x="2774416" y="1392016"/>
+            <a:ext cx="1718740" cy="442914"/>
+          </a:xfrm>
+          <a:prstGeom prst="roundRect">
+            <a:avLst/>
+          </a:prstGeom>
+        </p:spPr>
+        <p:style>
+          <a:lnRef idx="2">
+            <a:schemeClr val="accent1"/>
+          </a:lnRef>
+          <a:fillRef idx="1">
+            <a:schemeClr val="lt1"/>
+          </a:fillRef>
+          <a:effectRef idx="0">
+            <a:schemeClr val="accent1"/>
+          </a:effectRef>
+          <a:fontRef idx="minor">
+            <a:schemeClr val="dk1"/>
+          </a:fontRef>
+        </p:style>
+        <p:txBody>
+          <a:bodyPr rtlCol="0" anchor="ctr"/>
+          <a:lstStyle/>
+          <a:p>
+            <a:pPr algn="ctr"/>
+            <a:endParaRPr lang="fr-FR"/>
+          </a:p>
+        </p:txBody>
+      </p:sp>
+      <p:sp>
+        <p:nvSpPr>
+          <p:cNvPr id="28" name="ZoneTexte 27"/>
+          <p:cNvSpPr txBox="1"/>
+          <p:nvPr/>
+        </p:nvSpPr>
+        <p:spPr>
+          <a:xfrm>
+            <a:off x="2716748" y="1411300"/>
+            <a:ext cx="1929326" cy="461665"/>
+          </a:xfrm>
+          <a:prstGeom prst="rect">
+            <a:avLst/>
+          </a:prstGeom>
+          <a:noFill/>
+        </p:spPr>
+        <p:txBody>
+          <a:bodyPr wrap="square" rtlCol="0">
+            <a:spAutoFit/>
+          </a:bodyPr>
+          <a:lstStyle/>
+          <a:p>
+            <a:r>
+              <a:rPr lang="fr-FR" sz="800" dirty="0"/>
+              <a:t>GITLAB</a:t>
+            </a:r>
+            <a:br>
+              <a:rPr lang="fr-FR" sz="800" dirty="0"/>
+            </a:br>
+            <a:r>
+              <a:rPr lang="fr-FR" sz="800" dirty="0"/>
+              <a:t>172.16.21.16 </a:t>
+            </a:r>
+            <a:r>
+              <a:rPr lang="fr-FR" sz="800" dirty="0" smtClean="0"/>
+              <a:t/>
+            </a:r>
+            <a:br>
+              <a:rPr lang="fr-FR" sz="800" dirty="0" smtClean="0"/>
+            </a:br>
+            <a:r>
+              <a:rPr lang="fr-FR" sz="800" dirty="0" smtClean="0"/>
+              <a:t>dvp-srv-gitlab.campus12avenue.fr</a:t>
+            </a:r>
+            <a:endParaRPr lang="fr-FR" sz="800" dirty="0"/>
+          </a:p>
+        </p:txBody>
+      </p:sp>
+      <p:cxnSp>
+        <p:nvCxnSpPr>
+          <p:cNvPr id="29" name="Connecteur droit avec flèche 28"/>
+          <p:cNvCxnSpPr>
+            <a:stCxn id="27" idx="2"/>
+            <a:endCxn id="10" idx="0"/>
+          </p:cNvCxnSpPr>
+          <p:nvPr/>
+        </p:nvCxnSpPr>
+        <p:spPr>
+          <a:xfrm>
+            <a:off x="3633786" y="1834930"/>
+            <a:ext cx="0" cy="710626"/>
+          </a:xfrm>
+          <a:prstGeom prst="straightConnector1">
+            <a:avLst/>
+          </a:prstGeom>
+          <a:ln>
+            <a:tailEnd type="arrow"/>
+          </a:ln>
+        </p:spPr>
+        <p:style>
+          <a:lnRef idx="1">
+            <a:schemeClr val="accent1"/>
+          </a:lnRef>
+          <a:fillRef idx="0">
+            <a:schemeClr val="accent1"/>
+          </a:fillRef>
+          <a:effectRef idx="0">
+            <a:schemeClr val="accent1"/>
+          </a:effectRef>
+          <a:fontRef idx="minor">
+            <a:schemeClr val="tx1"/>
+          </a:fontRef>
+        </p:style>
+      </p:cxnSp>
+      <p:cxnSp>
+        <p:nvCxnSpPr>
+          <p:cNvPr id="1025" name="Connecteur en angle 1024"/>
+          <p:cNvCxnSpPr>
+            <a:stCxn id="27" idx="3"/>
+          </p:cNvCxnSpPr>
+          <p:nvPr/>
+        </p:nvCxnSpPr>
+        <p:spPr>
+          <a:xfrm>
+            <a:off x="4493156" y="1613473"/>
+            <a:ext cx="407455" cy="1489293"/>
+          </a:xfrm>
+          <a:prstGeom prst="bentConnector2">
+            <a:avLst/>
+          </a:prstGeom>
+          <a:ln>
+            <a:tailEnd type="arrow"/>
+          </a:ln>
+        </p:spPr>
+        <p:style>
+          <a:lnRef idx="1">
+            <a:schemeClr val="accent1"/>
+          </a:lnRef>
+          <a:fillRef idx="0">
+            <a:schemeClr val="accent1"/>
+          </a:fillRef>
+          <a:effectRef idx="0">
+            <a:schemeClr val="accent1"/>
+          </a:effectRef>
+          <a:fontRef idx="minor">
+            <a:schemeClr val="tx1"/>
+          </a:fontRef>
+        </p:style>
+      </p:cxnSp>
+      <p:sp>
+        <p:nvSpPr>
+          <p:cNvPr id="37" name="ZoneTexte 36"/>
+          <p:cNvSpPr txBox="1"/>
+          <p:nvPr/>
+        </p:nvSpPr>
+        <p:spPr>
+          <a:xfrm>
+            <a:off x="4960753" y="1727208"/>
+            <a:ext cx="242374" cy="215444"/>
+          </a:xfrm>
+          <a:prstGeom prst="rect">
+            <a:avLst/>
+          </a:prstGeom>
+          <a:noFill/>
+        </p:spPr>
+        <p:txBody>
+          <a:bodyPr wrap="none" rtlCol="0">
+            <a:spAutoFit/>
+          </a:bodyPr>
+          <a:lstStyle/>
+          <a:p>
+            <a:r>
+              <a:rPr lang="fr-FR" sz="800" dirty="0"/>
+              <a:t>3</a:t>
+            </a:r>
+            <a:endParaRPr lang="fr-FR" sz="800" dirty="0"/>
           </a:p>
         </p:txBody>
       </p:sp>
     </p:spTree>
     <p:extLst>
       <p:ext uri="{BB962C8B-B14F-4D97-AF65-F5344CB8AC3E}">
-        <p14:creationId xmlns:p14="http://schemas.microsoft.com/office/powerpoint/2010/main" val="2169687527"/>
+        <p14:creationId xmlns:p14="http://schemas.microsoft.com/office/powerpoint/2010/main" val="4155349294"/>
       </p:ext>
     </p:extLst>
   </p:cSld>
@@ -19128,11 +20856,7 @@
           <a:bodyPr/>
           <a:lstStyle/>
           <a:p>
-            <a:r>
-              <a:rPr lang="fr-FR" sz="2400" dirty="0" smtClean="0"/>
-              <a:t>xxx</a:t>
-            </a:r>
-            <a:endParaRPr lang="fr-FR" sz="2400" dirty="0"/>
+            <a:endParaRPr lang="fr-FR"/>
           </a:p>
         </p:txBody>
       </p:sp>
@@ -19146,45 +20870,19 @@
             <p:ph idx="1"/>
           </p:nvPr>
         </p:nvSpPr>
-        <p:spPr>
-          <a:xfrm>
-            <a:off x="177451" y="993643"/>
-            <a:ext cx="8047211" cy="3568458"/>
-          </a:xfrm>
-        </p:spPr>
+        <p:spPr/>
         <p:txBody>
-          <a:bodyPr>
-            <a:normAutofit/>
-          </a:bodyPr>
+          <a:bodyPr/>
           <a:lstStyle/>
           <a:p>
-            <a:pPr marL="0" indent="0">
-              <a:buNone/>
-            </a:pPr>
-            <a:r>
-              <a:rPr lang="fr-FR" sz="1200" b="1" dirty="0" smtClean="0"/>
-              <a:t>xxx</a:t>
-            </a:r>
-            <a:endParaRPr lang="fr-FR" sz="1200" dirty="0"/>
-          </a:p>
-          <a:p>
-            <a:pPr marL="0" indent="0">
-              <a:buNone/>
-            </a:pPr>
-            <a:endParaRPr lang="fr-FR" sz="1200" dirty="0"/>
-          </a:p>
-          <a:p>
-            <a:pPr marL="0" indent="0">
-              <a:buNone/>
-            </a:pPr>
-            <a:endParaRPr lang="fr-FR" sz="1200" dirty="0"/>
+            <a:endParaRPr lang="fr-FR"/>
           </a:p>
         </p:txBody>
       </p:sp>
     </p:spTree>
     <p:extLst>
       <p:ext uri="{BB962C8B-B14F-4D97-AF65-F5344CB8AC3E}">
-        <p14:creationId xmlns:p14="http://schemas.microsoft.com/office/powerpoint/2010/main" val="2418676195"/>
+        <p14:creationId xmlns:p14="http://schemas.microsoft.com/office/powerpoint/2010/main" val="2421161741"/>
       </p:ext>
     </p:extLst>
   </p:cSld>
@@ -19227,8 +20925,8 @@
           <a:lstStyle/>
           <a:p>
             <a:r>
-              <a:rPr lang="fr-FR" sz="2400" dirty="0" smtClean="0"/>
-              <a:t>xxx</a:t>
+              <a:rPr lang="fr-FR" sz="2400" dirty="0" err="1" smtClean="0"/>
+              <a:t>Devcontainer</a:t>
             </a:r>
             <a:endParaRPr lang="fr-FR" sz="2400" dirty="0"/>
           </a:p>
@@ -19260,9 +20958,157 @@
               <a:buNone/>
             </a:pPr>
             <a:r>
-              <a:rPr lang="fr-FR" sz="1200" b="1" dirty="0" smtClean="0"/>
-              <a:t>xxx</a:t>
-            </a:r>
+              <a:rPr lang="fr-FR" b="1" dirty="0" err="1" smtClean="0"/>
+              <a:t>Prerequis</a:t>
+            </a:r>
+            <a:endParaRPr lang="fr-FR" b="1" dirty="0" smtClean="0"/>
+          </a:p>
+          <a:p>
+            <a:pPr marL="0" indent="0">
+              <a:buNone/>
+            </a:pPr>
+            <a:r>
+              <a:rPr lang="fr-FR" b="1" dirty="0" smtClean="0"/>
+              <a:t>- </a:t>
+            </a:r>
+            <a:r>
+              <a:rPr lang="fr-FR" b="1" dirty="0" err="1" smtClean="0"/>
+              <a:t>Vérfier</a:t>
+            </a:r>
+            <a:r>
+              <a:rPr lang="fr-FR" b="1" dirty="0" smtClean="0"/>
+              <a:t> que on est ok à 100% sur les flux entre le </a:t>
+            </a:r>
+            <a:r>
+              <a:rPr lang="fr-FR" b="1" dirty="0" err="1" smtClean="0"/>
+              <a:t>serveru</a:t>
+            </a:r>
+            <a:r>
+              <a:rPr lang="fr-FR" b="1" dirty="0" smtClean="0"/>
+              <a:t> de container et les </a:t>
+            </a:r>
+            <a:r>
+              <a:rPr lang="fr-FR" b="1" dirty="0" err="1" smtClean="0"/>
+              <a:t>vm</a:t>
+            </a:r>
+            <a:r>
+              <a:rPr lang="fr-FR" b="1" dirty="0" smtClean="0"/>
+              <a:t> Infra, </a:t>
+            </a:r>
+            <a:r>
+              <a:rPr lang="fr-FR" b="1" dirty="0" err="1" smtClean="0"/>
+              <a:t>dev</a:t>
+            </a:r>
+            <a:r>
+              <a:rPr lang="fr-FR" b="1" dirty="0" smtClean="0"/>
+              <a:t> </a:t>
+            </a:r>
+            <a:r>
+              <a:rPr lang="fr-FR" b="1" dirty="0" err="1" smtClean="0"/>
+              <a:t>prod</a:t>
+            </a:r>
+            <a:endParaRPr lang="fr-FR" b="1" dirty="0" smtClean="0"/>
+          </a:p>
+          <a:p>
+            <a:pPr marL="0" indent="0">
+              <a:buNone/>
+            </a:pPr>
+            <a:r>
+              <a:rPr lang="fr-FR" b="1" dirty="0" smtClean="0"/>
+              <a:t>&gt;&gt; </a:t>
+            </a:r>
+            <a:r>
+              <a:rPr lang="fr-FR" b="1" dirty="0" err="1" smtClean="0"/>
+              <a:t>deplacer</a:t>
+            </a:r>
+            <a:r>
+              <a:rPr lang="fr-FR" b="1" dirty="0" smtClean="0"/>
+              <a:t> </a:t>
+            </a:r>
+            <a:endParaRPr lang="fr-FR" b="1" dirty="0"/>
+          </a:p>
+          <a:p>
+            <a:pPr marL="0" indent="0">
+              <a:buNone/>
+            </a:pPr>
+            <a:endParaRPr lang="fr-FR" b="1" dirty="0" smtClean="0"/>
+          </a:p>
+          <a:p>
+            <a:pPr marL="0" indent="0">
+              <a:buNone/>
+            </a:pPr>
+            <a:endParaRPr lang="fr-FR" b="1" dirty="0" smtClean="0"/>
+          </a:p>
+          <a:p>
+            <a:pPr marL="0" indent="0">
+              <a:buNone/>
+            </a:pPr>
+            <a:endParaRPr lang="fr-FR" b="1" dirty="0"/>
+          </a:p>
+          <a:p>
+            <a:pPr marL="0" indent="0">
+              <a:buNone/>
+            </a:pPr>
+            <a:r>
+              <a:rPr lang="fr-FR" b="1" dirty="0" err="1" smtClean="0"/>
+              <a:t>Creation</a:t>
+            </a:r>
+            <a:r>
+              <a:rPr lang="fr-FR" b="1" dirty="0" smtClean="0"/>
+              <a:t> des </a:t>
+            </a:r>
+            <a:r>
+              <a:rPr lang="fr-FR" b="1" dirty="0" err="1" smtClean="0"/>
+              <a:t>users</a:t>
+            </a:r>
+            <a:r>
+              <a:rPr lang="fr-FR" b="1" dirty="0" smtClean="0"/>
+              <a:t> s01 à s10 sur </a:t>
+            </a:r>
+            <a:r>
+              <a:rPr lang="fr-FR" b="1" dirty="0" err="1" smtClean="0"/>
+              <a:t>serveru</a:t>
+            </a:r>
+            <a:r>
+              <a:rPr lang="fr-FR" b="1" dirty="0" smtClean="0"/>
+              <a:t> de container, refaire avec s minuscule</a:t>
+            </a:r>
+          </a:p>
+          <a:p>
+            <a:pPr marL="0" indent="0">
+              <a:buNone/>
+            </a:pPr>
+            <a:endParaRPr lang="fr-FR" sz="1200" b="1" dirty="0"/>
+          </a:p>
+          <a:p>
+            <a:pPr marL="0" indent="0">
+              <a:buNone/>
+            </a:pPr>
+            <a:r>
+              <a:rPr lang="fr-FR" b="1" dirty="0" smtClean="0"/>
+              <a:t>Dans le container user.name et </a:t>
+            </a:r>
+            <a:r>
+              <a:rPr lang="fr-FR" b="1" dirty="0" err="1" smtClean="0"/>
+              <a:t>user.mal</a:t>
+            </a:r>
+            <a:r>
+              <a:rPr lang="fr-FR" b="1" dirty="0" smtClean="0"/>
+              <a:t> ne sont </a:t>
+            </a:r>
+            <a:r>
+              <a:rPr lang="fr-FR" b="1" dirty="0" err="1" smtClean="0"/>
+              <a:t>pa</a:t>
+            </a:r>
+            <a:r>
+              <a:rPr lang="fr-FR" b="1" smtClean="0"/>
+              <a:t> initialisé dans git</a:t>
+            </a:r>
+          </a:p>
+          <a:p>
+            <a:pPr marL="0" indent="0">
+              <a:buNone/>
+            </a:pPr>
             <a:endParaRPr lang="fr-FR" sz="1200" dirty="0"/>
           </a:p>
           <a:p>
@@ -19282,7 +21128,7 @@
     </p:spTree>
     <p:extLst>
       <p:ext uri="{BB962C8B-B14F-4D97-AF65-F5344CB8AC3E}">
-        <p14:creationId xmlns:p14="http://schemas.microsoft.com/office/powerpoint/2010/main" val="50873378"/>
+        <p14:creationId xmlns:p14="http://schemas.microsoft.com/office/powerpoint/2010/main" val="3300439207"/>
       </p:ext>
     </p:extLst>
   </p:cSld>
@@ -19319,35 +21165,16 @@
             <p:ph type="title"/>
           </p:nvPr>
         </p:nvSpPr>
-        <p:spPr>
-          <a:xfrm>
-            <a:off x="611560" y="267494"/>
-            <a:ext cx="8380040" cy="531900"/>
-          </a:xfrm>
-        </p:spPr>
+        <p:spPr/>
         <p:txBody>
           <a:bodyPr/>
           <a:lstStyle/>
           <a:p>
             <a:r>
-              <a:rPr lang="fr-FR" sz="2400" dirty="0"/>
-              <a:t>Introduction au </a:t>
-            </a:r>
-            <a:r>
-              <a:rPr lang="fr-FR" sz="2400" dirty="0" err="1"/>
-              <a:t>DevSecOps</a:t>
-            </a:r>
-            <a:r>
-              <a:rPr lang="fr-FR" sz="2400" dirty="0"/>
-              <a:t> et à la Security by Design</a:t>
-            </a:r>
-            <a:br>
-              <a:rPr lang="fr-FR" sz="2400" dirty="0"/>
-            </a:br>
-            <a:r>
-              <a:rPr lang="fr-FR" sz="1800" dirty="0"/>
-              <a:t>Pourquoi la sécurité doit évoluer</a:t>
-            </a:r>
+              <a:rPr lang="fr-FR" sz="2400" dirty="0" smtClean="0"/>
+              <a:t>xxx</a:t>
+            </a:r>
+            <a:endParaRPr lang="fr-FR" sz="2400" dirty="0"/>
           </a:p>
         </p:txBody>
       </p:sp>
@@ -19363,299 +21190,43 @@
         </p:nvSpPr>
         <p:spPr>
           <a:xfrm>
-            <a:off x="421900" y="937260"/>
-            <a:ext cx="8569700" cy="3562972"/>
+            <a:off x="177451" y="993643"/>
+            <a:ext cx="8047211" cy="3568458"/>
           </a:xfrm>
         </p:spPr>
         <p:txBody>
           <a:bodyPr>
-            <a:noAutofit/>
+            <a:normAutofit/>
           </a:bodyPr>
           <a:lstStyle/>
           <a:p>
-            <a:r>
-              <a:rPr lang="fr-FR" sz="1200" b="1" dirty="0"/>
-              <a:t>Sécurité traditionnelle (historique)</a:t>
-            </a:r>
-          </a:p>
-          <a:p>
-            <a:pPr lvl="1">
-              <a:buFont typeface="Arial" pitchFamily="34" charset="0"/>
-              <a:buChar char="•"/>
-            </a:pPr>
-            <a:r>
-              <a:rPr lang="fr-FR" sz="1200" dirty="0"/>
-              <a:t>Intervient :</a:t>
-            </a:r>
-          </a:p>
-          <a:p>
-            <a:pPr lvl="2">
-              <a:buFont typeface="Arial" pitchFamily="34" charset="0"/>
-              <a:buChar char="•"/>
-            </a:pPr>
-            <a:r>
-              <a:rPr lang="fr-FR" sz="1200" dirty="0"/>
-              <a:t>en fin de projet,</a:t>
-            </a:r>
-          </a:p>
-          <a:p>
-            <a:pPr lvl="2">
-              <a:buFont typeface="Arial" pitchFamily="34" charset="0"/>
-              <a:buChar char="•"/>
-            </a:pPr>
-            <a:r>
-              <a:rPr lang="fr-FR" sz="1200" dirty="0"/>
-              <a:t>avant la mise en production,</a:t>
-            </a:r>
-          </a:p>
-          <a:p>
-            <a:pPr lvl="2">
-              <a:buFont typeface="Arial" pitchFamily="34" charset="0"/>
-              <a:buChar char="•"/>
-            </a:pPr>
-            <a:r>
-              <a:rPr lang="fr-FR" sz="1200" dirty="0"/>
-              <a:t>sous forme d’audits ponctuels.</a:t>
-            </a:r>
-          </a:p>
-          <a:p>
-            <a:pPr lvl="1">
-              <a:buFont typeface="Arial" pitchFamily="34" charset="0"/>
-              <a:buChar char="•"/>
-            </a:pPr>
-            <a:r>
-              <a:rPr lang="fr-FR" sz="1200" dirty="0"/>
-              <a:t>Fonctionne sur :</a:t>
-            </a:r>
-          </a:p>
-          <a:p>
-            <a:pPr lvl="2">
-              <a:buFont typeface="Arial" pitchFamily="34" charset="0"/>
-              <a:buChar char="•"/>
-            </a:pPr>
-            <a:r>
-              <a:rPr lang="fr-FR" sz="1200" dirty="0"/>
-              <a:t>des cycles longs,</a:t>
-            </a:r>
-          </a:p>
-          <a:p>
-            <a:pPr lvl="2">
-              <a:buFont typeface="Arial" pitchFamily="34" charset="0"/>
-              <a:buChar char="•"/>
-            </a:pPr>
-            <a:r>
-              <a:rPr lang="fr-FR" sz="1200" dirty="0"/>
-              <a:t>des architectures stables,</a:t>
-            </a:r>
-          </a:p>
-          <a:p>
-            <a:pPr lvl="2">
-              <a:buFont typeface="Arial" pitchFamily="34" charset="0"/>
-              <a:buChar char="•"/>
-            </a:pPr>
-            <a:r>
-              <a:rPr lang="fr-FR" sz="1200" dirty="0"/>
-              <a:t>peu de changements.</a:t>
-            </a:r>
-          </a:p>
-          <a:p>
-            <a:r>
-              <a:rPr lang="fr-FR" sz="1200" b="1" dirty="0"/>
-              <a:t>Limites dans un monde </a:t>
-            </a:r>
-            <a:r>
-              <a:rPr lang="fr-FR" sz="1200" b="1" dirty="0" err="1"/>
-              <a:t>DevOps</a:t>
-            </a:r>
-            <a:endParaRPr lang="fr-FR" sz="1200" b="1" dirty="0"/>
-          </a:p>
-          <a:p>
-            <a:pPr lvl="1">
-              <a:buFont typeface="Arial" pitchFamily="34" charset="0"/>
-              <a:buChar char="•"/>
-            </a:pPr>
-            <a:r>
-              <a:rPr lang="fr-FR" sz="1200" dirty="0"/>
-              <a:t>Déploiements fréquents.</a:t>
-            </a:r>
-          </a:p>
-          <a:p>
-            <a:pPr lvl="1">
-              <a:buFont typeface="Arial" pitchFamily="34" charset="0"/>
-              <a:buChar char="•"/>
-            </a:pPr>
-            <a:r>
-              <a:rPr lang="fr-FR" sz="1200" dirty="0"/>
-              <a:t>Architectures distribuées.</a:t>
-            </a:r>
-          </a:p>
-          <a:p>
-            <a:pPr lvl="1">
-              <a:buFont typeface="Arial" pitchFamily="34" charset="0"/>
-              <a:buChar char="•"/>
-            </a:pPr>
-            <a:r>
-              <a:rPr lang="fr-FR" sz="1200" dirty="0"/>
-              <a:t>Infrastructure dynamique.</a:t>
-            </a:r>
-          </a:p>
-          <a:p>
-            <a:pPr lvl="1">
-              <a:buFont typeface="Arial" pitchFamily="34" charset="0"/>
-              <a:buChar char="•"/>
-            </a:pPr>
-            <a:r>
-              <a:rPr lang="fr-FR" sz="1200" dirty="0"/>
-              <a:t>Équipes autonomes.</a:t>
-            </a:r>
-          </a:p>
-          <a:p>
             <a:pPr marL="0" indent="0">
               <a:buNone/>
             </a:pPr>
             <a:r>
-              <a:rPr lang="fr-FR" sz="1200" dirty="0"/>
-              <a:t>Une sécurité tardive est une </a:t>
-            </a:r>
-            <a:r>
-              <a:rPr lang="fr-FR" sz="1200" b="1" dirty="0"/>
-              <a:t>sécurité inefficace</a:t>
-            </a:r>
-            <a:r>
-              <a:rPr lang="fr-FR" sz="1200" dirty="0"/>
-              <a:t>, une faille détectée en production est toujours une faille détectée trop tard.</a:t>
-            </a:r>
-          </a:p>
-        </p:txBody>
-      </p:sp>
-      <p:sp>
-        <p:nvSpPr>
-          <p:cNvPr id="4" name="Rectangle 3"/>
-          <p:cNvSpPr/>
-          <p:nvPr/>
-        </p:nvSpPr>
-        <p:spPr>
-          <a:xfrm>
-            <a:off x="6059146" y="2119044"/>
-            <a:ext cx="2909594" cy="646331"/>
-          </a:xfrm>
-          <a:prstGeom prst="rect">
-            <a:avLst/>
-          </a:prstGeom>
-        </p:spPr>
-        <p:txBody>
-          <a:bodyPr wrap="square">
-            <a:spAutoFit/>
-          </a:bodyPr>
-          <a:lstStyle/>
-          <a:p>
-            <a:r>
-              <a:rPr lang="fr-FR" sz="1200" dirty="0">
-                <a:solidFill>
-                  <a:srgbClr val="485155"/>
-                </a:solidFill>
-                <a:latin typeface="Arial"/>
-                <a:cs typeface="Arial"/>
-              </a:rPr>
-              <a:t>La sécurité est perçue comme un frein,</a:t>
-            </a:r>
-          </a:p>
-          <a:p>
-            <a:r>
-              <a:rPr lang="fr-FR" sz="1200" dirty="0">
-                <a:solidFill>
-                  <a:srgbClr val="485155"/>
-                </a:solidFill>
-                <a:latin typeface="Arial"/>
-                <a:cs typeface="Arial"/>
-              </a:rPr>
-              <a:t>les vulnérabilités détectées trop tard, les opérationnels contournent la sécurité</a:t>
-            </a:r>
-          </a:p>
-        </p:txBody>
-      </p:sp>
-      <p:sp>
-        <p:nvSpPr>
-          <p:cNvPr id="5" name="Flèche droite 4"/>
-          <p:cNvSpPr/>
-          <p:nvPr/>
-        </p:nvSpPr>
-        <p:spPr>
-          <a:xfrm>
-            <a:off x="5373346" y="2252826"/>
-            <a:ext cx="685800" cy="378768"/>
-          </a:xfrm>
-          <a:prstGeom prst="rightArrow">
-            <a:avLst/>
-          </a:prstGeom>
-        </p:spPr>
-        <p:style>
-          <a:lnRef idx="2">
-            <a:schemeClr val="accent1">
-              <a:shade val="50000"/>
-            </a:schemeClr>
-          </a:lnRef>
-          <a:fillRef idx="1">
-            <a:schemeClr val="accent1"/>
-          </a:fillRef>
-          <a:effectRef idx="0">
-            <a:schemeClr val="accent1"/>
-          </a:effectRef>
-          <a:fontRef idx="minor">
-            <a:schemeClr val="lt1"/>
-          </a:fontRef>
-        </p:style>
-        <p:txBody>
-          <a:bodyPr rtlCol="0" anchor="ctr"/>
-          <a:lstStyle/>
-          <a:p>
-            <a:pPr algn="ctr"/>
-            <a:endParaRPr lang="fr-FR"/>
-          </a:p>
-        </p:txBody>
-      </p:sp>
-      <p:sp>
-        <p:nvSpPr>
-          <p:cNvPr id="6" name="Accolade fermante 5"/>
-          <p:cNvSpPr/>
-          <p:nvPr/>
-        </p:nvSpPr>
-        <p:spPr>
-          <a:xfrm>
-            <a:off x="4853940" y="998220"/>
-            <a:ext cx="335280" cy="2887980"/>
-          </a:xfrm>
-          <a:prstGeom prst="rightBrace">
-            <a:avLst/>
-          </a:prstGeom>
-        </p:spPr>
-        <p:style>
-          <a:lnRef idx="2">
-            <a:schemeClr val="accent1"/>
-          </a:lnRef>
-          <a:fillRef idx="0">
-            <a:schemeClr val="accent1"/>
-          </a:fillRef>
-          <a:effectRef idx="1">
-            <a:schemeClr val="accent1"/>
-          </a:effectRef>
-          <a:fontRef idx="minor">
-            <a:schemeClr val="tx1"/>
-          </a:fontRef>
-        </p:style>
-        <p:txBody>
-          <a:bodyPr rtlCol="0" anchor="ctr"/>
-          <a:lstStyle/>
-          <a:p>
-            <a:pPr algn="ctr"/>
-            <a:endParaRPr lang="fr-FR"/>
+              <a:rPr lang="fr-FR" sz="1200" b="1" dirty="0" smtClean="0"/>
+              <a:t>xxx</a:t>
+            </a:r>
+            <a:endParaRPr lang="fr-FR" sz="1200" dirty="0"/>
+          </a:p>
+          <a:p>
+            <a:pPr marL="0" indent="0">
+              <a:buNone/>
+            </a:pPr>
+            <a:endParaRPr lang="fr-FR" sz="1200" dirty="0"/>
+          </a:p>
+          <a:p>
+            <a:pPr marL="0" indent="0">
+              <a:buNone/>
+            </a:pPr>
+            <a:endParaRPr lang="fr-FR" sz="1200" dirty="0"/>
           </a:p>
         </p:txBody>
       </p:sp>
     </p:spTree>
     <p:extLst>
       <p:ext uri="{BB962C8B-B14F-4D97-AF65-F5344CB8AC3E}">
-        <p14:creationId xmlns:p14="http://schemas.microsoft.com/office/powerpoint/2010/main" val="3032461768"/>
+        <p14:creationId xmlns:p14="http://schemas.microsoft.com/office/powerpoint/2010/main" val="2169687527"/>
       </p:ext>
     </p:extLst>
   </p:cSld>
@@ -20440,26 +22011,6 @@
 </file>
 
 <file path=customXml/item1.xml><?xml version="1.0" encoding="utf-8"?>
-<?mso-contentType ?>
-<FormTemplates xmlns="http://schemas.microsoft.com/sharepoint/v3/contenttype/forms">
-  <Display>DocumentLibraryForm</Display>
-  <Edit>DocumentLibraryForm</Edit>
-  <New>DocumentLibraryForm</New>
-</FormTemplates>
-</file>
-
-<file path=customXml/item2.xml><?xml version="1.0" encoding="utf-8"?>
-<p:properties xmlns:p="http://schemas.microsoft.com/office/2006/metadata/properties" xmlns:xsi="http://www.w3.org/2001/XMLSchema-instance" xmlns:pc="http://schemas.microsoft.com/office/infopath/2007/PartnerControls">
-  <documentManagement>
-    <lcf76f155ced4ddcb4097134ff3c332f xmlns="edc04842-e236-415d-8f7e-a24afe8e9967">
-      <Terms xmlns="http://schemas.microsoft.com/office/infopath/2007/PartnerControls"/>
-    </lcf76f155ced4ddcb4097134ff3c332f>
-    <TaxCatchAll xmlns="e24868e2-9e8a-477a-81c3-86220c38e5a2" xsi:nil="true"/>
-  </documentManagement>
-</p:properties>
-</file>
-
-<file path=customXml/item3.xml><?xml version="1.0" encoding="utf-8"?>
 <ct:contentTypeSchema xmlns:ct="http://schemas.microsoft.com/office/2006/metadata/contentType" xmlns:ma="http://schemas.microsoft.com/office/2006/metadata/properties/metaAttributes" ct:_="" ma:_="" ma:contentTypeName="Document" ma:contentTypeID="0x01010055A6A34606179B428CCD588D6092A603" ma:contentTypeVersion="12" ma:contentTypeDescription="Crée un document." ma:contentTypeScope="" ma:versionID="7b683815daf67284c2fb09d69d27e23e">
   <xsd:schema xmlns:xsd="http://www.w3.org/2001/XMLSchema" xmlns:xs="http://www.w3.org/2001/XMLSchema" xmlns:p="http://schemas.microsoft.com/office/2006/metadata/properties" xmlns:ns2="edc04842-e236-415d-8f7e-a24afe8e9967" xmlns:ns3="e24868e2-9e8a-477a-81c3-86220c38e5a2" targetNamespace="http://schemas.microsoft.com/office/2006/metadata/properties" ma:root="true" ma:fieldsID="d712f7de4ee33d67d88fc39eba0dce2c" ns2:_="" ns3:_="">
     <xsd:import namespace="edc04842-e236-415d-8f7e-a24afe8e9967"/>
@@ -20660,10 +22211,41 @@
 </ct:contentTypeSchema>
 </file>
 
+<file path=customXml/item2.xml><?xml version="1.0" encoding="utf-8"?>
+<p:properties xmlns:p="http://schemas.microsoft.com/office/2006/metadata/properties" xmlns:xsi="http://www.w3.org/2001/XMLSchema-instance" xmlns:pc="http://schemas.microsoft.com/office/infopath/2007/PartnerControls">
+  <documentManagement>
+    <lcf76f155ced4ddcb4097134ff3c332f xmlns="edc04842-e236-415d-8f7e-a24afe8e9967">
+      <Terms xmlns="http://schemas.microsoft.com/office/infopath/2007/PartnerControls"/>
+    </lcf76f155ced4ddcb4097134ff3c332f>
+    <TaxCatchAll xmlns="e24868e2-9e8a-477a-81c3-86220c38e5a2" xsi:nil="true"/>
+  </documentManagement>
+</p:properties>
+</file>
+
+<file path=customXml/item3.xml><?xml version="1.0" encoding="utf-8"?>
+<?mso-contentType ?>
+<FormTemplates xmlns="http://schemas.microsoft.com/sharepoint/v3/contenttype/forms">
+  <Display>DocumentLibraryForm</Display>
+  <Edit>DocumentLibraryForm</Edit>
+  <New>DocumentLibraryForm</New>
+</FormTemplates>
+</file>
+
 <file path=customXml/itemProps1.xml><?xml version="1.0" encoding="utf-8"?>
-<ds:datastoreItem xmlns:ds="http://schemas.openxmlformats.org/officeDocument/2006/customXml" ds:itemID="{B7E3FE3B-CF8C-4C08-AA63-08901AB111E0}">
+<ds:datastoreItem xmlns:ds="http://schemas.openxmlformats.org/officeDocument/2006/customXml" ds:itemID="{E58F4795-375C-4D09-A760-2C80A68B044A}">
   <ds:schemaRefs>
-    <ds:schemaRef ds:uri="http://schemas.microsoft.com/sharepoint/v3/contenttype/forms"/>
+    <ds:schemaRef ds:uri="e24868e2-9e8a-477a-81c3-86220c38e5a2"/>
+    <ds:schemaRef ds:uri="edc04842-e236-415d-8f7e-a24afe8e9967"/>
+    <ds:schemaRef ds:uri="http://purl.org/dc/elements/1.1/"/>
+    <ds:schemaRef ds:uri="http://purl.org/dc/terms/"/>
+    <ds:schemaRef ds:uri="http://schemas.microsoft.com/internal/obd"/>
+    <ds:schemaRef ds:uri="http://schemas.microsoft.com/office/2006/documentManagement/types"/>
+    <ds:schemaRef ds:uri="http://schemas.microsoft.com/office/2006/metadata/contentType"/>
+    <ds:schemaRef ds:uri="http://schemas.microsoft.com/office/2006/metadata/properties"/>
+    <ds:schemaRef ds:uri="http://schemas.microsoft.com/office/2006/metadata/properties/metaAttributes"/>
+    <ds:schemaRef ds:uri="http://schemas.microsoft.com/office/infopath/2007/PartnerControls"/>
+    <ds:schemaRef ds:uri="http://schemas.openxmlformats.org/package/2006/metadata/core-properties"/>
+    <ds:schemaRef ds:uri="http://www.w3.org/2001/XMLSchema"/>
   </ds:schemaRefs>
 </ds:datastoreItem>
 </file>
@@ -20686,20 +22268,9 @@
 </file>
 
 <file path=customXml/itemProps3.xml><?xml version="1.0" encoding="utf-8"?>
-<ds:datastoreItem xmlns:ds="http://schemas.openxmlformats.org/officeDocument/2006/customXml" ds:itemID="{E58F4795-375C-4D09-A760-2C80A68B044A}">
+<ds:datastoreItem xmlns:ds="http://schemas.openxmlformats.org/officeDocument/2006/customXml" ds:itemID="{B7E3FE3B-CF8C-4C08-AA63-08901AB111E0}">
   <ds:schemaRefs>
-    <ds:schemaRef ds:uri="e24868e2-9e8a-477a-81c3-86220c38e5a2"/>
-    <ds:schemaRef ds:uri="edc04842-e236-415d-8f7e-a24afe8e9967"/>
-    <ds:schemaRef ds:uri="http://purl.org/dc/elements/1.1/"/>
-    <ds:schemaRef ds:uri="http://purl.org/dc/terms/"/>
-    <ds:schemaRef ds:uri="http://schemas.microsoft.com/internal/obd"/>
-    <ds:schemaRef ds:uri="http://schemas.microsoft.com/office/2006/documentManagement/types"/>
-    <ds:schemaRef ds:uri="http://schemas.microsoft.com/office/2006/metadata/contentType"/>
-    <ds:schemaRef ds:uri="http://schemas.microsoft.com/office/2006/metadata/properties"/>
-    <ds:schemaRef ds:uri="http://schemas.microsoft.com/office/2006/metadata/properties/metaAttributes"/>
-    <ds:schemaRef ds:uri="http://schemas.microsoft.com/office/infopath/2007/PartnerControls"/>
-    <ds:schemaRef ds:uri="http://schemas.openxmlformats.org/package/2006/metadata/core-properties"/>
-    <ds:schemaRef ds:uri="http://www.w3.org/2001/XMLSchema"/>
+    <ds:schemaRef ds:uri="http://schemas.microsoft.com/sharepoint/v3/contenttype/forms"/>
   </ds:schemaRefs>
 </ds:datastoreItem>
 </file>